--- a/Presentations of Bachelor's theses.pptx
+++ b/Presentations of Bachelor's theses.pptx
@@ -8,6 +8,10 @@
     <p:sldId id="258" r:id="rId2"/>
     <p:sldId id="259" r:id="rId3"/>
     <p:sldId id="257" r:id="rId4"/>
+    <p:sldId id="260" r:id="rId5"/>
+    <p:sldId id="261" r:id="rId6"/>
+    <p:sldId id="262" r:id="rId7"/>
+    <p:sldId id="263" r:id="rId8"/>
   </p:sldIdLst>
   <p:sldSz cx="12192000" cy="6858000"/>
   <p:notesSz cx="6858000" cy="9144000"/>
@@ -106,6 +110,11 @@
       </a:defRPr>
     </a:lvl9pPr>
   </p:defaultTextStyle>
+  <p:extLst>
+    <p:ext uri="{EFAFB233-063F-42B5-8137-9DF3F51BA10A}">
+      <p15:sldGuideLst xmlns:p15="http://schemas.microsoft.com/office/powerpoint/2012/main"/>
+    </p:ext>
+  </p:extLst>
 </p:presentation>
 </file>
 
@@ -258,7 +267,7 @@
           <a:p>
             <a:fld id="{E9846F43-F1B2-4AEE-B1BF-466D06853D46}" type="datetimeFigureOut">
               <a:rPr lang="ru-RU" smtClean="0"/>
-              <a:t>24.11.2025</a:t>
+              <a:t>27.11.2025</a:t>
             </a:fld>
             <a:endParaRPr lang="ru-RU"/>
           </a:p>
@@ -458,7 +467,7 @@
           <a:p>
             <a:fld id="{E9846F43-F1B2-4AEE-B1BF-466D06853D46}" type="datetimeFigureOut">
               <a:rPr lang="ru-RU" smtClean="0"/>
-              <a:t>24.11.2025</a:t>
+              <a:t>27.11.2025</a:t>
             </a:fld>
             <a:endParaRPr lang="ru-RU"/>
           </a:p>
@@ -668,7 +677,7 @@
           <a:p>
             <a:fld id="{E9846F43-F1B2-4AEE-B1BF-466D06853D46}" type="datetimeFigureOut">
               <a:rPr lang="ru-RU" smtClean="0"/>
-              <a:t>24.11.2025</a:t>
+              <a:t>27.11.2025</a:t>
             </a:fld>
             <a:endParaRPr lang="ru-RU"/>
           </a:p>
@@ -868,7 +877,7 @@
           <a:p>
             <a:fld id="{E9846F43-F1B2-4AEE-B1BF-466D06853D46}" type="datetimeFigureOut">
               <a:rPr lang="ru-RU" smtClean="0"/>
-              <a:t>24.11.2025</a:t>
+              <a:t>27.11.2025</a:t>
             </a:fld>
             <a:endParaRPr lang="ru-RU"/>
           </a:p>
@@ -1144,7 +1153,7 @@
           <a:p>
             <a:fld id="{E9846F43-F1B2-4AEE-B1BF-466D06853D46}" type="datetimeFigureOut">
               <a:rPr lang="ru-RU" smtClean="0"/>
-              <a:t>24.11.2025</a:t>
+              <a:t>27.11.2025</a:t>
             </a:fld>
             <a:endParaRPr lang="ru-RU"/>
           </a:p>
@@ -1412,7 +1421,7 @@
           <a:p>
             <a:fld id="{E9846F43-F1B2-4AEE-B1BF-466D06853D46}" type="datetimeFigureOut">
               <a:rPr lang="ru-RU" smtClean="0"/>
-              <a:t>24.11.2025</a:t>
+              <a:t>27.11.2025</a:t>
             </a:fld>
             <a:endParaRPr lang="ru-RU"/>
           </a:p>
@@ -1827,7 +1836,7 @@
           <a:p>
             <a:fld id="{E9846F43-F1B2-4AEE-B1BF-466D06853D46}" type="datetimeFigureOut">
               <a:rPr lang="ru-RU" smtClean="0"/>
-              <a:t>24.11.2025</a:t>
+              <a:t>27.11.2025</a:t>
             </a:fld>
             <a:endParaRPr lang="ru-RU"/>
           </a:p>
@@ -1969,7 +1978,7 @@
           <a:p>
             <a:fld id="{E9846F43-F1B2-4AEE-B1BF-466D06853D46}" type="datetimeFigureOut">
               <a:rPr lang="ru-RU" smtClean="0"/>
-              <a:t>24.11.2025</a:t>
+              <a:t>27.11.2025</a:t>
             </a:fld>
             <a:endParaRPr lang="ru-RU"/>
           </a:p>
@@ -2082,7 +2091,7 @@
           <a:p>
             <a:fld id="{E9846F43-F1B2-4AEE-B1BF-466D06853D46}" type="datetimeFigureOut">
               <a:rPr lang="ru-RU" smtClean="0"/>
-              <a:t>24.11.2025</a:t>
+              <a:t>27.11.2025</a:t>
             </a:fld>
             <a:endParaRPr lang="ru-RU"/>
           </a:p>
@@ -2395,7 +2404,7 @@
           <a:p>
             <a:fld id="{E9846F43-F1B2-4AEE-B1BF-466D06853D46}" type="datetimeFigureOut">
               <a:rPr lang="ru-RU" smtClean="0"/>
-              <a:t>24.11.2025</a:t>
+              <a:t>27.11.2025</a:t>
             </a:fld>
             <a:endParaRPr lang="ru-RU"/>
           </a:p>
@@ -2684,7 +2693,7 @@
           <a:p>
             <a:fld id="{E9846F43-F1B2-4AEE-B1BF-466D06853D46}" type="datetimeFigureOut">
               <a:rPr lang="ru-RU" smtClean="0"/>
-              <a:t>24.11.2025</a:t>
+              <a:t>27.11.2025</a:t>
             </a:fld>
             <a:endParaRPr lang="ru-RU"/>
           </a:p>
@@ -2927,7 +2936,7 @@
           <a:p>
             <a:fld id="{E9846F43-F1B2-4AEE-B1BF-466D06853D46}" type="datetimeFigureOut">
               <a:rPr lang="ru-RU" smtClean="0"/>
-              <a:t>24.11.2025</a:t>
+              <a:t>27.11.2025</a:t>
             </a:fld>
             <a:endParaRPr lang="ru-RU"/>
           </a:p>
@@ -3639,7 +3648,10 @@
           <a:bodyPr/>
           <a:lstStyle/>
           <a:p>
-            <a:endParaRPr lang="ru-RU"/>
+            <a:r>
+              <a:rPr lang="ru-RU" dirty="0"/>
+              <a:t>Актуальность темы</a:t>
+            </a:r>
           </a:p>
         </p:txBody>
       </p:sp>
@@ -3663,6 +3675,30 @@
         <p:txBody>
           <a:bodyPr/>
           <a:lstStyle/>
+          <a:p>
+            <a:r>
+              <a:rPr lang="ru-RU" dirty="0"/>
+              <a:t>Рынок мобильных приложений стремительно растёт по пользователям, загрузкам и выручке.</a:t>
+            </a:r>
+          </a:p>
+          <a:p>
+            <a:r>
+              <a:rPr lang="ru-RU" dirty="0"/>
+              <a:t>Генеративный ИИ усилил спрос на мобильных разработчиков и расширил круг их задач.</a:t>
+            </a:r>
+          </a:p>
+          <a:p>
+            <a:r>
+              <a:rPr lang="ru-RU" dirty="0"/>
+              <a:t>Европа и Северная Америка — одни из самых прибыльных рынков с высокой концентрацией разработчиков и растущей конкуренцией за позиции.</a:t>
+            </a:r>
+          </a:p>
+          <a:p>
+            <a:r>
+              <a:rPr lang="ru-RU" dirty="0"/>
+              <a:t>Быстрая смена технологий (iOS/Android, языки, фреймворки) усложняет выбор актуальных инструментов и обновление учебных программ.</a:t>
+            </a:r>
+          </a:p>
           <a:p>
             <a:endParaRPr lang="ru-RU" dirty="0"/>
           </a:p>
@@ -3719,7 +3755,10 @@
           <a:bodyPr/>
           <a:lstStyle/>
           <a:p>
-            <a:endParaRPr lang="ru-RU"/>
+            <a:r>
+              <a:rPr lang="ru-RU" dirty="0"/>
+              <a:t>Проблема и цель исследования</a:t>
+            </a:r>
           </a:p>
         </p:txBody>
       </p:sp>
@@ -3741,19 +3780,20 @@
         </p:nvSpPr>
         <p:spPr/>
         <p:txBody>
-          <a:bodyPr/>
+          <a:bodyPr>
+            <a:normAutofit/>
+          </a:bodyPr>
           <a:lstStyle/>
           <a:p>
             <a:r>
               <a:rPr lang="ru-RU" dirty="0"/>
-              <a:t>ЭСТОНСКИЙ УНИВЕРСИТЕТ ПРЕДПРИНИМАТЕЛЬСТВА МАЙНОР Учебная программа: Веб-дизайн и цифровая графика Специализация: Веб-технологии Ivan Ireev </a:t>
-            </a:r>
-            <a:endParaRPr lang="en-US" dirty="0"/>
+              <a:t>Проблема: сложность определения наиболее востребованных навыков и инструментов мобильных разработчиков при быстром обновлении технологий.</a:t>
+            </a:r>
           </a:p>
           <a:p>
             <a:r>
               <a:rPr lang="ru-RU" dirty="0"/>
-              <a:t>Анализ частоты упоминаний технологий в вакансиях разработчиков iOS и Android в Европе и Северной Америке Заключительная работа Руководитель: Boris Shvartsman, PhD Таллинн 2025</a:t>
+              <a:t>Цель: выявить наиболее часто упоминаемые в вакансиях технологии для iOS- и Android-разработчиков, сравнить требования в Европе и Северной Америке и составить рекомендации по изучению для специалистов и учебных программ.</a:t>
             </a:r>
           </a:p>
         </p:txBody>
@@ -3762,6 +3802,338 @@
     <p:extLst>
       <p:ext uri="{BB962C8B-B14F-4D97-AF65-F5344CB8AC3E}">
         <p14:creationId xmlns:p14="http://schemas.microsoft.com/office/powerpoint/2010/main" val="3048753171"/>
+      </p:ext>
+    </p:extLst>
+  </p:cSld>
+  <p:clrMapOvr>
+    <a:masterClrMapping/>
+  </p:clrMapOvr>
+</p:sld>
+</file>
+
+<file path=ppt/slides/slide4.xml><?xml version="1.0" encoding="utf-8"?>
+<p:sld xmlns:a="http://schemas.openxmlformats.org/drawingml/2006/main" xmlns:r="http://schemas.openxmlformats.org/officeDocument/2006/relationships" xmlns:p="http://schemas.openxmlformats.org/presentationml/2006/main">
+  <p:cSld>
+    <p:spTree>
+      <p:nvGrpSpPr>
+        <p:cNvPr id="1" name=""/>
+        <p:cNvGrpSpPr/>
+        <p:nvPr/>
+      </p:nvGrpSpPr>
+      <p:grpSpPr>
+        <a:xfrm>
+          <a:off x="0" y="0"/>
+          <a:ext cx="0" cy="0"/>
+          <a:chOff x="0" y="0"/>
+          <a:chExt cx="0" cy="0"/>
+        </a:xfrm>
+      </p:grpSpPr>
+      <p:sp>
+        <p:nvSpPr>
+          <p:cNvPr id="2" name="Title 1">
+            <a:extLst>
+              <a:ext uri="{FF2B5EF4-FFF2-40B4-BE49-F238E27FC236}">
+                <a16:creationId xmlns:a16="http://schemas.microsoft.com/office/drawing/2014/main" id="{D310B972-DCD3-164E-D66C-C0A738DBF382}"/>
+              </a:ext>
+            </a:extLst>
+          </p:cNvPr>
+          <p:cNvSpPr>
+            <a:spLocks noGrp="1"/>
+          </p:cNvSpPr>
+          <p:nvPr>
+            <p:ph type="title"/>
+          </p:nvPr>
+        </p:nvSpPr>
+        <p:spPr/>
+        <p:txBody>
+          <a:bodyPr/>
+          <a:lstStyle/>
+          <a:p>
+            <a:r>
+              <a:rPr lang="ru-RU" dirty="0"/>
+              <a:t>Методология</a:t>
+            </a:r>
+          </a:p>
+        </p:txBody>
+      </p:sp>
+      <p:sp>
+        <p:nvSpPr>
+          <p:cNvPr id="3" name="Content Placeholder 2">
+            <a:extLst>
+              <a:ext uri="{FF2B5EF4-FFF2-40B4-BE49-F238E27FC236}">
+                <a16:creationId xmlns:a16="http://schemas.microsoft.com/office/drawing/2014/main" id="{D130A9BD-B04E-9736-B80F-CBF99CC2CAAA}"/>
+              </a:ext>
+            </a:extLst>
+          </p:cNvPr>
+          <p:cNvSpPr>
+            <a:spLocks noGrp="1"/>
+          </p:cNvSpPr>
+          <p:nvPr>
+            <p:ph idx="1"/>
+          </p:nvPr>
+        </p:nvSpPr>
+        <p:spPr/>
+        <p:txBody>
+          <a:bodyPr/>
+          <a:lstStyle/>
+          <a:p>
+            <a:r>
+              <a:rPr lang="ru-RU" dirty="0"/>
+              <a:t>Сделать схемку</a:t>
+            </a:r>
+          </a:p>
+        </p:txBody>
+      </p:sp>
+    </p:spTree>
+    <p:extLst>
+      <p:ext uri="{BB962C8B-B14F-4D97-AF65-F5344CB8AC3E}">
+        <p14:creationId xmlns:p14="http://schemas.microsoft.com/office/powerpoint/2010/main" val="1705616875"/>
+      </p:ext>
+    </p:extLst>
+  </p:cSld>
+  <p:clrMapOvr>
+    <a:masterClrMapping/>
+  </p:clrMapOvr>
+</p:sld>
+</file>
+
+<file path=ppt/slides/slide5.xml><?xml version="1.0" encoding="utf-8"?>
+<p:sld xmlns:a="http://schemas.openxmlformats.org/drawingml/2006/main" xmlns:r="http://schemas.openxmlformats.org/officeDocument/2006/relationships" xmlns:p="http://schemas.openxmlformats.org/presentationml/2006/main">
+  <p:cSld>
+    <p:spTree>
+      <p:nvGrpSpPr>
+        <p:cNvPr id="1" name=""/>
+        <p:cNvGrpSpPr/>
+        <p:nvPr/>
+      </p:nvGrpSpPr>
+      <p:grpSpPr>
+        <a:xfrm>
+          <a:off x="0" y="0"/>
+          <a:ext cx="0" cy="0"/>
+          <a:chOff x="0" y="0"/>
+          <a:chExt cx="0" cy="0"/>
+        </a:xfrm>
+      </p:grpSpPr>
+      <p:sp>
+        <p:nvSpPr>
+          <p:cNvPr id="2" name="Title 1">
+            <a:extLst>
+              <a:ext uri="{FF2B5EF4-FFF2-40B4-BE49-F238E27FC236}">
+                <a16:creationId xmlns:a16="http://schemas.microsoft.com/office/drawing/2014/main" id="{DAF4E5DE-E810-9EC3-D073-6D9687D6AEB4}"/>
+              </a:ext>
+            </a:extLst>
+          </p:cNvPr>
+          <p:cNvSpPr>
+            <a:spLocks noGrp="1"/>
+          </p:cNvSpPr>
+          <p:nvPr>
+            <p:ph type="title"/>
+          </p:nvPr>
+        </p:nvSpPr>
+        <p:spPr/>
+        <p:txBody>
+          <a:bodyPr/>
+          <a:lstStyle/>
+          <a:p>
+            <a:r>
+              <a:rPr lang="ru-RU" dirty="0"/>
+              <a:t>Результаты</a:t>
+            </a:r>
+          </a:p>
+        </p:txBody>
+      </p:sp>
+      <p:sp>
+        <p:nvSpPr>
+          <p:cNvPr id="3" name="Content Placeholder 2">
+            <a:extLst>
+              <a:ext uri="{FF2B5EF4-FFF2-40B4-BE49-F238E27FC236}">
+                <a16:creationId xmlns:a16="http://schemas.microsoft.com/office/drawing/2014/main" id="{FECD2DE2-A1B2-06B3-C893-46EE72DEB445}"/>
+              </a:ext>
+            </a:extLst>
+          </p:cNvPr>
+          <p:cNvSpPr>
+            <a:spLocks noGrp="1"/>
+          </p:cNvSpPr>
+          <p:nvPr>
+            <p:ph idx="1"/>
+          </p:nvPr>
+        </p:nvSpPr>
+        <p:spPr/>
+        <p:txBody>
+          <a:bodyPr/>
+          <a:lstStyle/>
+          <a:p>
+            <a:endParaRPr lang="ru-RU"/>
+          </a:p>
+        </p:txBody>
+      </p:sp>
+    </p:spTree>
+    <p:extLst>
+      <p:ext uri="{BB962C8B-B14F-4D97-AF65-F5344CB8AC3E}">
+        <p14:creationId xmlns:p14="http://schemas.microsoft.com/office/powerpoint/2010/main" val="1895634139"/>
+      </p:ext>
+    </p:extLst>
+  </p:cSld>
+  <p:clrMapOvr>
+    <a:masterClrMapping/>
+  </p:clrMapOvr>
+</p:sld>
+</file>
+
+<file path=ppt/slides/slide6.xml><?xml version="1.0" encoding="utf-8"?>
+<p:sld xmlns:a="http://schemas.openxmlformats.org/drawingml/2006/main" xmlns:r="http://schemas.openxmlformats.org/officeDocument/2006/relationships" xmlns:p="http://schemas.openxmlformats.org/presentationml/2006/main">
+  <p:cSld>
+    <p:spTree>
+      <p:nvGrpSpPr>
+        <p:cNvPr id="1" name=""/>
+        <p:cNvGrpSpPr/>
+        <p:nvPr/>
+      </p:nvGrpSpPr>
+      <p:grpSpPr>
+        <a:xfrm>
+          <a:off x="0" y="0"/>
+          <a:ext cx="0" cy="0"/>
+          <a:chOff x="0" y="0"/>
+          <a:chExt cx="0" cy="0"/>
+        </a:xfrm>
+      </p:grpSpPr>
+      <p:sp>
+        <p:nvSpPr>
+          <p:cNvPr id="2" name="Title 1">
+            <a:extLst>
+              <a:ext uri="{FF2B5EF4-FFF2-40B4-BE49-F238E27FC236}">
+                <a16:creationId xmlns:a16="http://schemas.microsoft.com/office/drawing/2014/main" id="{19499884-ED48-50C9-4165-051E6C2BED78}"/>
+              </a:ext>
+            </a:extLst>
+          </p:cNvPr>
+          <p:cNvSpPr>
+            <a:spLocks noGrp="1"/>
+          </p:cNvSpPr>
+          <p:nvPr>
+            <p:ph type="title"/>
+          </p:nvPr>
+        </p:nvSpPr>
+        <p:spPr/>
+        <p:txBody>
+          <a:bodyPr/>
+          <a:lstStyle/>
+          <a:p>
+            <a:r>
+              <a:rPr lang="ru-RU" dirty="0"/>
+              <a:t>Результаты</a:t>
+            </a:r>
+          </a:p>
+        </p:txBody>
+      </p:sp>
+      <p:sp>
+        <p:nvSpPr>
+          <p:cNvPr id="3" name="Content Placeholder 2">
+            <a:extLst>
+              <a:ext uri="{FF2B5EF4-FFF2-40B4-BE49-F238E27FC236}">
+                <a16:creationId xmlns:a16="http://schemas.microsoft.com/office/drawing/2014/main" id="{073F2D2F-3CBB-3B06-7E11-EE56A7B51577}"/>
+              </a:ext>
+            </a:extLst>
+          </p:cNvPr>
+          <p:cNvSpPr>
+            <a:spLocks noGrp="1"/>
+          </p:cNvSpPr>
+          <p:nvPr>
+            <p:ph idx="1"/>
+          </p:nvPr>
+        </p:nvSpPr>
+        <p:spPr/>
+        <p:txBody>
+          <a:bodyPr/>
+          <a:lstStyle/>
+          <a:p>
+            <a:endParaRPr lang="ru-RU" dirty="0"/>
+          </a:p>
+        </p:txBody>
+      </p:sp>
+    </p:spTree>
+    <p:extLst>
+      <p:ext uri="{BB962C8B-B14F-4D97-AF65-F5344CB8AC3E}">
+        <p14:creationId xmlns:p14="http://schemas.microsoft.com/office/powerpoint/2010/main" val="1655250204"/>
+      </p:ext>
+    </p:extLst>
+  </p:cSld>
+  <p:clrMapOvr>
+    <a:masterClrMapping/>
+  </p:clrMapOvr>
+</p:sld>
+</file>
+
+<file path=ppt/slides/slide7.xml><?xml version="1.0" encoding="utf-8"?>
+<p:sld xmlns:a="http://schemas.openxmlformats.org/drawingml/2006/main" xmlns:r="http://schemas.openxmlformats.org/officeDocument/2006/relationships" xmlns:p="http://schemas.openxmlformats.org/presentationml/2006/main">
+  <p:cSld>
+    <p:spTree>
+      <p:nvGrpSpPr>
+        <p:cNvPr id="1" name=""/>
+        <p:cNvGrpSpPr/>
+        <p:nvPr/>
+      </p:nvGrpSpPr>
+      <p:grpSpPr>
+        <a:xfrm>
+          <a:off x="0" y="0"/>
+          <a:ext cx="0" cy="0"/>
+          <a:chOff x="0" y="0"/>
+          <a:chExt cx="0" cy="0"/>
+        </a:xfrm>
+      </p:grpSpPr>
+      <p:sp>
+        <p:nvSpPr>
+          <p:cNvPr id="2" name="Title 1">
+            <a:extLst>
+              <a:ext uri="{FF2B5EF4-FFF2-40B4-BE49-F238E27FC236}">
+                <a16:creationId xmlns:a16="http://schemas.microsoft.com/office/drawing/2014/main" id="{B6F64BA4-0D1D-0885-752D-4A3101ED7AB7}"/>
+              </a:ext>
+            </a:extLst>
+          </p:cNvPr>
+          <p:cNvSpPr>
+            <a:spLocks noGrp="1"/>
+          </p:cNvSpPr>
+          <p:nvPr>
+            <p:ph type="title"/>
+          </p:nvPr>
+        </p:nvSpPr>
+        <p:spPr/>
+        <p:txBody>
+          <a:bodyPr/>
+          <a:lstStyle/>
+          <a:p>
+            <a:endParaRPr lang="ru-RU"/>
+          </a:p>
+        </p:txBody>
+      </p:sp>
+      <p:sp>
+        <p:nvSpPr>
+          <p:cNvPr id="3" name="Content Placeholder 2">
+            <a:extLst>
+              <a:ext uri="{FF2B5EF4-FFF2-40B4-BE49-F238E27FC236}">
+                <a16:creationId xmlns:a16="http://schemas.microsoft.com/office/drawing/2014/main" id="{22CE1CD7-22EA-5A23-350B-EF2A5E77A4EC}"/>
+              </a:ext>
+            </a:extLst>
+          </p:cNvPr>
+          <p:cNvSpPr>
+            <a:spLocks noGrp="1"/>
+          </p:cNvSpPr>
+          <p:nvPr>
+            <p:ph idx="1"/>
+          </p:nvPr>
+        </p:nvSpPr>
+        <p:spPr/>
+        <p:txBody>
+          <a:bodyPr/>
+          <a:lstStyle/>
+          <a:p>
+            <a:endParaRPr lang="ru-RU"/>
+          </a:p>
+        </p:txBody>
+      </p:sp>
+    </p:spTree>
+    <p:extLst>
+      <p:ext uri="{BB962C8B-B14F-4D97-AF65-F5344CB8AC3E}">
+        <p14:creationId xmlns:p14="http://schemas.microsoft.com/office/powerpoint/2010/main" val="1316099249"/>
       </p:ext>
     </p:extLst>
   </p:cSld>

--- a/Presentations of Bachelor's theses.pptx
+++ b/Presentations of Bachelor's theses.pptx
@@ -11,7 +11,10 @@
     <p:sldId id="260" r:id="rId5"/>
     <p:sldId id="261" r:id="rId6"/>
     <p:sldId id="262" r:id="rId7"/>
-    <p:sldId id="263" r:id="rId8"/>
+    <p:sldId id="264" r:id="rId8"/>
+    <p:sldId id="263" r:id="rId9"/>
+    <p:sldId id="266" r:id="rId10"/>
+    <p:sldId id="265" r:id="rId11"/>
   </p:sldIdLst>
   <p:sldSz cx="12192000" cy="6858000"/>
   <p:notesSz cx="6858000" cy="9144000"/>
@@ -267,7 +270,7 @@
           <a:p>
             <a:fld id="{E9846F43-F1B2-4AEE-B1BF-466D06853D46}" type="datetimeFigureOut">
               <a:rPr lang="ru-RU" smtClean="0"/>
-              <a:t>27.11.2025</a:t>
+              <a:t>28.11.2025</a:t>
             </a:fld>
             <a:endParaRPr lang="ru-RU"/>
           </a:p>
@@ -467,7 +470,7 @@
           <a:p>
             <a:fld id="{E9846F43-F1B2-4AEE-B1BF-466D06853D46}" type="datetimeFigureOut">
               <a:rPr lang="ru-RU" smtClean="0"/>
-              <a:t>27.11.2025</a:t>
+              <a:t>28.11.2025</a:t>
             </a:fld>
             <a:endParaRPr lang="ru-RU"/>
           </a:p>
@@ -677,7 +680,7 @@
           <a:p>
             <a:fld id="{E9846F43-F1B2-4AEE-B1BF-466D06853D46}" type="datetimeFigureOut">
               <a:rPr lang="ru-RU" smtClean="0"/>
-              <a:t>27.11.2025</a:t>
+              <a:t>28.11.2025</a:t>
             </a:fld>
             <a:endParaRPr lang="ru-RU"/>
           </a:p>
@@ -877,7 +880,7 @@
           <a:p>
             <a:fld id="{E9846F43-F1B2-4AEE-B1BF-466D06853D46}" type="datetimeFigureOut">
               <a:rPr lang="ru-RU" smtClean="0"/>
-              <a:t>27.11.2025</a:t>
+              <a:t>28.11.2025</a:t>
             </a:fld>
             <a:endParaRPr lang="ru-RU"/>
           </a:p>
@@ -1153,7 +1156,7 @@
           <a:p>
             <a:fld id="{E9846F43-F1B2-4AEE-B1BF-466D06853D46}" type="datetimeFigureOut">
               <a:rPr lang="ru-RU" smtClean="0"/>
-              <a:t>27.11.2025</a:t>
+              <a:t>28.11.2025</a:t>
             </a:fld>
             <a:endParaRPr lang="ru-RU"/>
           </a:p>
@@ -1421,7 +1424,7 @@
           <a:p>
             <a:fld id="{E9846F43-F1B2-4AEE-B1BF-466D06853D46}" type="datetimeFigureOut">
               <a:rPr lang="ru-RU" smtClean="0"/>
-              <a:t>27.11.2025</a:t>
+              <a:t>28.11.2025</a:t>
             </a:fld>
             <a:endParaRPr lang="ru-RU"/>
           </a:p>
@@ -1836,7 +1839,7 @@
           <a:p>
             <a:fld id="{E9846F43-F1B2-4AEE-B1BF-466D06853D46}" type="datetimeFigureOut">
               <a:rPr lang="ru-RU" smtClean="0"/>
-              <a:t>27.11.2025</a:t>
+              <a:t>28.11.2025</a:t>
             </a:fld>
             <a:endParaRPr lang="ru-RU"/>
           </a:p>
@@ -1978,7 +1981,7 @@
           <a:p>
             <a:fld id="{E9846F43-F1B2-4AEE-B1BF-466D06853D46}" type="datetimeFigureOut">
               <a:rPr lang="ru-RU" smtClean="0"/>
-              <a:t>27.11.2025</a:t>
+              <a:t>28.11.2025</a:t>
             </a:fld>
             <a:endParaRPr lang="ru-RU"/>
           </a:p>
@@ -2091,7 +2094,7 @@
           <a:p>
             <a:fld id="{E9846F43-F1B2-4AEE-B1BF-466D06853D46}" type="datetimeFigureOut">
               <a:rPr lang="ru-RU" smtClean="0"/>
-              <a:t>27.11.2025</a:t>
+              <a:t>28.11.2025</a:t>
             </a:fld>
             <a:endParaRPr lang="ru-RU"/>
           </a:p>
@@ -2404,7 +2407,7 @@
           <a:p>
             <a:fld id="{E9846F43-F1B2-4AEE-B1BF-466D06853D46}" type="datetimeFigureOut">
               <a:rPr lang="ru-RU" smtClean="0"/>
-              <a:t>27.11.2025</a:t>
+              <a:t>28.11.2025</a:t>
             </a:fld>
             <a:endParaRPr lang="ru-RU"/>
           </a:p>
@@ -2693,7 +2696,7 @@
           <a:p>
             <a:fld id="{E9846F43-F1B2-4AEE-B1BF-466D06853D46}" type="datetimeFigureOut">
               <a:rPr lang="ru-RU" smtClean="0"/>
-              <a:t>27.11.2025</a:t>
+              <a:t>28.11.2025</a:t>
             </a:fld>
             <a:endParaRPr lang="ru-RU"/>
           </a:p>
@@ -2936,7 +2939,7 @@
           <a:p>
             <a:fld id="{E9846F43-F1B2-4AEE-B1BF-466D06853D46}" type="datetimeFigureOut">
               <a:rPr lang="ru-RU" smtClean="0"/>
-              <a:t>27.11.2025</a:t>
+              <a:t>28.11.2025</a:t>
             </a:fld>
             <a:endParaRPr lang="ru-RU"/>
           </a:p>
@@ -3610,6 +3613,89 @@
 </p:sld>
 </file>
 
+<file path=ppt/slides/slide10.xml><?xml version="1.0" encoding="utf-8"?>
+<p:sld xmlns:a="http://schemas.openxmlformats.org/drawingml/2006/main" xmlns:r="http://schemas.openxmlformats.org/officeDocument/2006/relationships" xmlns:p="http://schemas.openxmlformats.org/presentationml/2006/main">
+  <p:cSld>
+    <p:spTree>
+      <p:nvGrpSpPr>
+        <p:cNvPr id="1" name=""/>
+        <p:cNvGrpSpPr/>
+        <p:nvPr/>
+      </p:nvGrpSpPr>
+      <p:grpSpPr>
+        <a:xfrm>
+          <a:off x="0" y="0"/>
+          <a:ext cx="0" cy="0"/>
+          <a:chOff x="0" y="0"/>
+          <a:chExt cx="0" cy="0"/>
+        </a:xfrm>
+      </p:grpSpPr>
+      <p:sp>
+        <p:nvSpPr>
+          <p:cNvPr id="2" name="Title 1">
+            <a:extLst>
+              <a:ext uri="{FF2B5EF4-FFF2-40B4-BE49-F238E27FC236}">
+                <a16:creationId xmlns:a16="http://schemas.microsoft.com/office/drawing/2014/main" id="{CB8DC19C-5148-0A92-9163-5C2674A8DB3A}"/>
+              </a:ext>
+            </a:extLst>
+          </p:cNvPr>
+          <p:cNvSpPr>
+            <a:spLocks noGrp="1"/>
+          </p:cNvSpPr>
+          <p:nvPr>
+            <p:ph type="title"/>
+          </p:nvPr>
+        </p:nvSpPr>
+        <p:spPr/>
+        <p:txBody>
+          <a:bodyPr/>
+          <a:lstStyle/>
+          <a:p>
+            <a:r>
+              <a:rPr lang="ru-RU" dirty="0"/>
+              <a:t>Вопросы рецензента</a:t>
+            </a:r>
+          </a:p>
+        </p:txBody>
+      </p:sp>
+      <p:sp>
+        <p:nvSpPr>
+          <p:cNvPr id="3" name="Content Placeholder 2">
+            <a:extLst>
+              <a:ext uri="{FF2B5EF4-FFF2-40B4-BE49-F238E27FC236}">
+                <a16:creationId xmlns:a16="http://schemas.microsoft.com/office/drawing/2014/main" id="{F204D05D-778F-BAF8-E587-998E7445A8E4}"/>
+              </a:ext>
+            </a:extLst>
+          </p:cNvPr>
+          <p:cNvSpPr>
+            <a:spLocks noGrp="1"/>
+          </p:cNvSpPr>
+          <p:nvPr>
+            <p:ph idx="1"/>
+          </p:nvPr>
+        </p:nvSpPr>
+        <p:spPr/>
+        <p:txBody>
+          <a:bodyPr/>
+          <a:lstStyle/>
+          <a:p>
+            <a:endParaRPr lang="ru-RU" dirty="0"/>
+          </a:p>
+        </p:txBody>
+      </p:sp>
+    </p:spTree>
+    <p:extLst>
+      <p:ext uri="{BB962C8B-B14F-4D97-AF65-F5344CB8AC3E}">
+        <p14:creationId xmlns:p14="http://schemas.microsoft.com/office/powerpoint/2010/main" val="92624472"/>
+      </p:ext>
+    </p:extLst>
+  </p:cSld>
+  <p:clrMapOvr>
+    <a:masterClrMapping/>
+  </p:clrMapOvr>
+</p:sld>
+</file>
+
 <file path=ppt/slides/slide2.xml><?xml version="1.0" encoding="utf-8"?>
 <p:sld xmlns:a="http://schemas.openxmlformats.org/drawingml/2006/main" xmlns:r="http://schemas.openxmlformats.org/officeDocument/2006/relationships" xmlns:p="http://schemas.openxmlformats.org/presentationml/2006/main">
   <p:cSld>
@@ -3877,13 +3963,41 @@
           <a:bodyPr/>
           <a:lstStyle/>
           <a:p>
-            <a:r>
-              <a:rPr lang="ru-RU" dirty="0"/>
-              <a:t>Сделать схемку</a:t>
-            </a:r>
-          </a:p>
-        </p:txBody>
-      </p:sp>
+            <a:endParaRPr lang="ru-RU" dirty="0"/>
+          </a:p>
+        </p:txBody>
+      </p:sp>
+      <p:pic>
+        <p:nvPicPr>
+          <p:cNvPr id="15" name="Picture 14">
+            <a:hlinkClick r:id="rId2"/>
+            <a:extLst>
+              <a:ext uri="{FF2B5EF4-FFF2-40B4-BE49-F238E27FC236}">
+                <a16:creationId xmlns:a16="http://schemas.microsoft.com/office/drawing/2014/main" id="{1F9D9668-B71C-9AB0-C9A2-7D8D67A92D25}"/>
+              </a:ext>
+            </a:extLst>
+          </p:cNvPr>
+          <p:cNvPicPr>
+            <a:picLocks noChangeAspect="1"/>
+          </p:cNvPicPr>
+          <p:nvPr/>
+        </p:nvPicPr>
+        <p:blipFill>
+          <a:blip r:embed="rId3"/>
+          <a:stretch>
+            <a:fillRect/>
+          </a:stretch>
+        </p:blipFill>
+        <p:spPr>
+          <a:xfrm>
+            <a:off x="589781" y="1395843"/>
+            <a:ext cx="11012437" cy="5210902"/>
+          </a:xfrm>
+          <a:prstGeom prst="rect">
+            <a:avLst/>
+          </a:prstGeom>
+        </p:spPr>
+      </p:pic>
     </p:spTree>
     <p:extLst>
       <p:ext uri="{BB962C8B-B14F-4D97-AF65-F5344CB8AC3E}">
@@ -3963,10 +4077,40 @@
           <a:bodyPr/>
           <a:lstStyle/>
           <a:p>
-            <a:endParaRPr lang="ru-RU"/>
-          </a:p>
-        </p:txBody>
-      </p:sp>
+            <a:endParaRPr lang="ru-RU" dirty="0"/>
+          </a:p>
+        </p:txBody>
+      </p:sp>
+      <p:pic>
+        <p:nvPicPr>
+          <p:cNvPr id="5" name="Picture 4">
+            <a:extLst>
+              <a:ext uri="{FF2B5EF4-FFF2-40B4-BE49-F238E27FC236}">
+                <a16:creationId xmlns:a16="http://schemas.microsoft.com/office/drawing/2014/main" id="{60BC2A8C-BF4C-5040-D761-F7FE93E01423}"/>
+              </a:ext>
+            </a:extLst>
+          </p:cNvPr>
+          <p:cNvPicPr>
+            <a:picLocks noChangeAspect="1"/>
+          </p:cNvPicPr>
+          <p:nvPr/>
+        </p:nvPicPr>
+        <p:blipFill>
+          <a:blip r:embed="rId2"/>
+          <a:stretch>
+            <a:fillRect/>
+          </a:stretch>
+        </p:blipFill>
+        <p:spPr>
+          <a:xfrm>
+            <a:off x="838200" y="1825625"/>
+            <a:ext cx="7004175" cy="4020823"/>
+          </a:xfrm>
+          <a:prstGeom prst="rect">
+            <a:avLst/>
+          </a:prstGeom>
+        </p:spPr>
+      </p:pic>
     </p:spTree>
     <p:extLst>
       <p:ext uri="{BB962C8B-B14F-4D97-AF65-F5344CB8AC3E}">
@@ -4043,9 +4187,40 @@
         </p:nvSpPr>
         <p:spPr/>
         <p:txBody>
-          <a:bodyPr/>
-          <a:lstStyle/>
-          <a:p>
+          <a:bodyPr>
+            <a:normAutofit/>
+          </a:bodyPr>
+          <a:lstStyle/>
+          <a:p>
+            <a:r>
+              <a:rPr lang="ru-RU" dirty="0"/>
+              <a:t>В целом по обеим платформам повторяется общий каркас стека:</a:t>
+            </a:r>
+          </a:p>
+          <a:p>
+            <a:pPr lvl="1"/>
+            <a:r>
+              <a:rPr lang="ru-RU" dirty="0"/>
+              <a:t> язык платформы </a:t>
+            </a:r>
+          </a:p>
+          <a:p>
+            <a:pPr lvl="1"/>
+            <a:r>
+              <a:rPr lang="ru-RU" dirty="0"/>
+              <a:t>система контроля версий </a:t>
+            </a:r>
+          </a:p>
+          <a:p>
+            <a:pPr lvl="1"/>
+            <a:r>
+              <a:rPr lang="ru-RU" dirty="0"/>
+              <a:t>IDE</a:t>
+            </a:r>
+            <a:r>
+              <a:rPr lang="en-US" dirty="0"/>
+              <a:t>…</a:t>
+            </a:r>
             <a:endParaRPr lang="ru-RU" dirty="0"/>
           </a:p>
         </p:txBody>
@@ -4085,6 +4260,106 @@
           <p:cNvPr id="2" name="Title 1">
             <a:extLst>
               <a:ext uri="{FF2B5EF4-FFF2-40B4-BE49-F238E27FC236}">
+                <a16:creationId xmlns:a16="http://schemas.microsoft.com/office/drawing/2014/main" id="{BEC27215-C1F7-3B59-3396-2A6F8AD5769F}"/>
+              </a:ext>
+            </a:extLst>
+          </p:cNvPr>
+          <p:cNvSpPr>
+            <a:spLocks noGrp="1"/>
+          </p:cNvSpPr>
+          <p:nvPr>
+            <p:ph type="title"/>
+          </p:nvPr>
+        </p:nvSpPr>
+        <p:spPr/>
+        <p:txBody>
+          <a:bodyPr/>
+          <a:lstStyle/>
+          <a:p>
+            <a:r>
+              <a:rPr lang="ru-RU" dirty="0"/>
+              <a:t>Обсуждение + выводы</a:t>
+            </a:r>
+          </a:p>
+        </p:txBody>
+      </p:sp>
+      <p:sp>
+        <p:nvSpPr>
+          <p:cNvPr id="3" name="Content Placeholder 2">
+            <a:extLst>
+              <a:ext uri="{FF2B5EF4-FFF2-40B4-BE49-F238E27FC236}">
+                <a16:creationId xmlns:a16="http://schemas.microsoft.com/office/drawing/2014/main" id="{1125D273-41BD-973A-6857-8ECB6919C8C5}"/>
+              </a:ext>
+            </a:extLst>
+          </p:cNvPr>
+          <p:cNvSpPr>
+            <a:spLocks noGrp="1"/>
+          </p:cNvSpPr>
+          <p:nvPr>
+            <p:ph idx="1"/>
+          </p:nvPr>
+        </p:nvSpPr>
+        <p:spPr/>
+        <p:txBody>
+          <a:bodyPr/>
+          <a:lstStyle/>
+          <a:p>
+            <a:r>
+              <a:rPr lang="ru-RU" dirty="0"/>
+              <a:t>Ключевые результаты: главные требования стабильны как для iOS-, так и для Android-разработчиков, а межрегиональные различия касаются редких/специфичных технологий.</a:t>
+            </a:r>
+            <a:endParaRPr lang="en-US" dirty="0"/>
+          </a:p>
+          <a:p>
+            <a:endParaRPr lang="ru-RU" dirty="0"/>
+          </a:p>
+          <a:p>
+            <a:r>
+              <a:rPr lang="ru-RU" dirty="0"/>
+              <a:t>Результаты исследования согласуются с литературой/прошлыми исследованиями. </a:t>
+            </a:r>
+            <a:endParaRPr lang="en-US" dirty="0"/>
+          </a:p>
+          <a:p>
+            <a:endParaRPr lang="ru-RU" dirty="0"/>
+          </a:p>
+        </p:txBody>
+      </p:sp>
+    </p:spTree>
+    <p:extLst>
+      <p:ext uri="{BB962C8B-B14F-4D97-AF65-F5344CB8AC3E}">
+        <p14:creationId xmlns:p14="http://schemas.microsoft.com/office/powerpoint/2010/main" val="3226884331"/>
+      </p:ext>
+    </p:extLst>
+  </p:cSld>
+  <p:clrMapOvr>
+    <a:masterClrMapping/>
+  </p:clrMapOvr>
+</p:sld>
+</file>
+
+<file path=ppt/slides/slide8.xml><?xml version="1.0" encoding="utf-8"?>
+<p:sld xmlns:a="http://schemas.openxmlformats.org/drawingml/2006/main" xmlns:r="http://schemas.openxmlformats.org/officeDocument/2006/relationships" xmlns:p="http://schemas.openxmlformats.org/presentationml/2006/main">
+  <p:cSld>
+    <p:spTree>
+      <p:nvGrpSpPr>
+        <p:cNvPr id="1" name=""/>
+        <p:cNvGrpSpPr/>
+        <p:nvPr/>
+      </p:nvGrpSpPr>
+      <p:grpSpPr>
+        <a:xfrm>
+          <a:off x="0" y="0"/>
+          <a:ext cx="0" cy="0"/>
+          <a:chOff x="0" y="0"/>
+          <a:chExt cx="0" cy="0"/>
+        </a:xfrm>
+      </p:grpSpPr>
+      <p:sp>
+        <p:nvSpPr>
+          <p:cNvPr id="2" name="Title 1">
+            <a:extLst>
+              <a:ext uri="{FF2B5EF4-FFF2-40B4-BE49-F238E27FC236}">
                 <a16:creationId xmlns:a16="http://schemas.microsoft.com/office/drawing/2014/main" id="{B6F64BA4-0D1D-0885-752D-4A3101ED7AB7}"/>
               </a:ext>
             </a:extLst>
@@ -4101,7 +4376,10 @@
           <a:bodyPr/>
           <a:lstStyle/>
           <a:p>
-            <a:endParaRPr lang="ru-RU"/>
+            <a:r>
+              <a:rPr lang="ru-RU" dirty="0"/>
+              <a:t>Рекомендации?</a:t>
+            </a:r>
           </a:p>
         </p:txBody>
       </p:sp>
@@ -4126,7 +4404,125 @@
           <a:bodyPr/>
           <a:lstStyle/>
           <a:p>
-            <a:endParaRPr lang="ru-RU"/>
+            <a:r>
+              <a:rPr lang="ru-RU" dirty="0"/>
+              <a:t>Формат основа/дополнение, где учтены как основной так и второстепенный стек. Например, у </a:t>
+            </a:r>
+            <a:r>
+              <a:rPr lang="en-US" dirty="0"/>
+              <a:t>Android </a:t>
+            </a:r>
+            <a:r>
+              <a:rPr lang="ru-RU" dirty="0"/>
+              <a:t>есть 2 основных языка: </a:t>
+            </a:r>
+            <a:r>
+              <a:rPr lang="en-US" dirty="0"/>
+              <a:t>Kotlin (</a:t>
+            </a:r>
+            <a:r>
+              <a:rPr lang="ru-RU" dirty="0"/>
+              <a:t>более новый и всё более популярный</a:t>
+            </a:r>
+            <a:r>
+              <a:rPr lang="en-US" dirty="0"/>
+              <a:t>)</a:t>
+            </a:r>
+            <a:r>
+              <a:rPr lang="ru-RU" dirty="0"/>
+              <a:t> и </a:t>
+            </a:r>
+            <a:r>
+              <a:rPr lang="en-US" dirty="0"/>
+              <a:t>Java (</a:t>
+            </a:r>
+            <a:r>
+              <a:rPr lang="ru-RU" dirty="0"/>
+              <a:t>легаси</a:t>
+            </a:r>
+            <a:r>
+              <a:rPr lang="en-US" dirty="0"/>
+              <a:t>)</a:t>
+            </a:r>
+            <a:r>
+              <a:rPr lang="ru-RU" dirty="0"/>
+              <a:t>. Бывает такое, что технология актуальна как для обоих языков (</a:t>
+            </a:r>
+            <a:r>
+              <a:rPr lang="en-US" dirty="0"/>
+              <a:t>Git</a:t>
+            </a:r>
+            <a:r>
+              <a:rPr lang="ru-RU" dirty="0"/>
+              <a:t>), так и только для одного</a:t>
+            </a:r>
+            <a:r>
+              <a:rPr lang="en-US" dirty="0"/>
+              <a:t> (</a:t>
+            </a:r>
+            <a:r>
+              <a:rPr lang="ru-RU" dirty="0"/>
+              <a:t>только </a:t>
+            </a:r>
+            <a:r>
+              <a:rPr lang="en-US" dirty="0"/>
+              <a:t>Kotlin </a:t>
+            </a:r>
+            <a:r>
+              <a:rPr lang="ru-RU" dirty="0"/>
+              <a:t>или </a:t>
+            </a:r>
+            <a:r>
+              <a:rPr lang="en-US" dirty="0"/>
+              <a:t>Java)</a:t>
+            </a:r>
+            <a:r>
+              <a:rPr lang="ru-RU" dirty="0"/>
+              <a:t>.</a:t>
+            </a:r>
+            <a:r>
+              <a:rPr lang="en-US" dirty="0"/>
+              <a:t> </a:t>
+            </a:r>
+            <a:r>
+              <a:rPr lang="ru-RU" dirty="0"/>
+              <a:t>В рекомендации этот момент учтён. </a:t>
+            </a:r>
+          </a:p>
+          <a:p>
+            <a:r>
+              <a:rPr lang="ru-RU" dirty="0"/>
+              <a:t>5.3.1. Рекомендации для специалистов </a:t>
+            </a:r>
+            <a:r>
+              <a:rPr lang="en-US" dirty="0"/>
+              <a:t>Android </a:t>
+            </a:r>
+            <a:r>
+              <a:rPr lang="ru-RU" dirty="0"/>
+              <a:t>Основа • язык платформы – </a:t>
+            </a:r>
+            <a:r>
+              <a:rPr lang="en-US" dirty="0"/>
+              <a:t>Kotlin (79,59 %), Java (58,92 %); • </a:t>
+            </a:r>
+            <a:r>
+              <a:rPr lang="ru-RU" dirty="0"/>
+              <a:t>система контроля версий – </a:t>
+            </a:r>
+            <a:r>
+              <a:rPr lang="en-US" dirty="0"/>
+              <a:t>Git (33,21 %); • IDE – Android Studio (19,91 %); • </a:t>
+            </a:r>
+            <a:r>
+              <a:rPr lang="ru-RU" dirty="0"/>
+              <a:t>сетевое взаимодействие (</a:t>
+            </a:r>
+            <a:r>
+              <a:rPr lang="en-US" dirty="0"/>
+              <a:t>API) – RES</a:t>
+            </a:r>
+            <a:endParaRPr lang="ru-RU" dirty="0"/>
           </a:p>
         </p:txBody>
       </p:sp>
@@ -4134,6 +4530,89 @@
     <p:extLst>
       <p:ext uri="{BB962C8B-B14F-4D97-AF65-F5344CB8AC3E}">
         <p14:creationId xmlns:p14="http://schemas.microsoft.com/office/powerpoint/2010/main" val="1316099249"/>
+      </p:ext>
+    </p:extLst>
+  </p:cSld>
+  <p:clrMapOvr>
+    <a:masterClrMapping/>
+  </p:clrMapOvr>
+</p:sld>
+</file>
+
+<file path=ppt/slides/slide9.xml><?xml version="1.0" encoding="utf-8"?>
+<p:sld xmlns:a="http://schemas.openxmlformats.org/drawingml/2006/main" xmlns:r="http://schemas.openxmlformats.org/officeDocument/2006/relationships" xmlns:p="http://schemas.openxmlformats.org/presentationml/2006/main">
+  <p:cSld>
+    <p:spTree>
+      <p:nvGrpSpPr>
+        <p:cNvPr id="1" name=""/>
+        <p:cNvGrpSpPr/>
+        <p:nvPr/>
+      </p:nvGrpSpPr>
+      <p:grpSpPr>
+        <a:xfrm>
+          <a:off x="0" y="0"/>
+          <a:ext cx="0" cy="0"/>
+          <a:chOff x="0" y="0"/>
+          <a:chExt cx="0" cy="0"/>
+        </a:xfrm>
+      </p:grpSpPr>
+      <p:sp>
+        <p:nvSpPr>
+          <p:cNvPr id="2" name="Title 1">
+            <a:extLst>
+              <a:ext uri="{FF2B5EF4-FFF2-40B4-BE49-F238E27FC236}">
+                <a16:creationId xmlns:a16="http://schemas.microsoft.com/office/drawing/2014/main" id="{847D6EE1-6D2F-9E32-9EC1-EE212D09B274}"/>
+              </a:ext>
+            </a:extLst>
+          </p:cNvPr>
+          <p:cNvSpPr>
+            <a:spLocks noGrp="1"/>
+          </p:cNvSpPr>
+          <p:nvPr>
+            <p:ph type="title"/>
+          </p:nvPr>
+        </p:nvSpPr>
+        <p:spPr/>
+        <p:txBody>
+          <a:bodyPr/>
+          <a:lstStyle/>
+          <a:p>
+            <a:r>
+              <a:rPr lang="ru-RU" dirty="0"/>
+              <a:t>Спасибо за внимание</a:t>
+            </a:r>
+          </a:p>
+        </p:txBody>
+      </p:sp>
+      <p:sp>
+        <p:nvSpPr>
+          <p:cNvPr id="3" name="Content Placeholder 2">
+            <a:extLst>
+              <a:ext uri="{FF2B5EF4-FFF2-40B4-BE49-F238E27FC236}">
+                <a16:creationId xmlns:a16="http://schemas.microsoft.com/office/drawing/2014/main" id="{8EAE1704-D6E6-F256-8CE9-6988DC10C741}"/>
+              </a:ext>
+            </a:extLst>
+          </p:cNvPr>
+          <p:cNvSpPr>
+            <a:spLocks noGrp="1"/>
+          </p:cNvSpPr>
+          <p:nvPr>
+            <p:ph idx="1"/>
+          </p:nvPr>
+        </p:nvSpPr>
+        <p:spPr/>
+        <p:txBody>
+          <a:bodyPr/>
+          <a:lstStyle/>
+          <a:p>
+            <a:endParaRPr lang="ru-RU"/>
+          </a:p>
+        </p:txBody>
+      </p:sp>
+    </p:spTree>
+    <p:extLst>
+      <p:ext uri="{BB962C8B-B14F-4D97-AF65-F5344CB8AC3E}">
+        <p14:creationId xmlns:p14="http://schemas.microsoft.com/office/powerpoint/2010/main" val="531444177"/>
       </p:ext>
     </p:extLst>
   </p:cSld>

--- a/Presentations of Bachelor's theses.pptx
+++ b/Presentations of Bachelor's theses.pptx
@@ -9,12 +9,12 @@
     <p:sldId id="259" r:id="rId3"/>
     <p:sldId id="257" r:id="rId4"/>
     <p:sldId id="260" r:id="rId5"/>
-    <p:sldId id="261" r:id="rId6"/>
+    <p:sldId id="267" r:id="rId6"/>
     <p:sldId id="262" r:id="rId7"/>
     <p:sldId id="264" r:id="rId8"/>
-    <p:sldId id="263" r:id="rId9"/>
-    <p:sldId id="266" r:id="rId10"/>
-    <p:sldId id="265" r:id="rId11"/>
+    <p:sldId id="266" r:id="rId9"/>
+    <p:sldId id="265" r:id="rId10"/>
+    <p:sldId id="268" r:id="rId11"/>
   </p:sldIdLst>
   <p:sldSz cx="12192000" cy="6858000"/>
   <p:notesSz cx="6858000" cy="9144000"/>
@@ -270,7 +270,7 @@
           <a:p>
             <a:fld id="{E9846F43-F1B2-4AEE-B1BF-466D06853D46}" type="datetimeFigureOut">
               <a:rPr lang="ru-RU" smtClean="0"/>
-              <a:t>28.11.2025</a:t>
+              <a:t>01.12.2025</a:t>
             </a:fld>
             <a:endParaRPr lang="ru-RU"/>
           </a:p>
@@ -470,7 +470,7 @@
           <a:p>
             <a:fld id="{E9846F43-F1B2-4AEE-B1BF-466D06853D46}" type="datetimeFigureOut">
               <a:rPr lang="ru-RU" smtClean="0"/>
-              <a:t>28.11.2025</a:t>
+              <a:t>01.12.2025</a:t>
             </a:fld>
             <a:endParaRPr lang="ru-RU"/>
           </a:p>
@@ -680,7 +680,7 @@
           <a:p>
             <a:fld id="{E9846F43-F1B2-4AEE-B1BF-466D06853D46}" type="datetimeFigureOut">
               <a:rPr lang="ru-RU" smtClean="0"/>
-              <a:t>28.11.2025</a:t>
+              <a:t>01.12.2025</a:t>
             </a:fld>
             <a:endParaRPr lang="ru-RU"/>
           </a:p>
@@ -880,7 +880,7 @@
           <a:p>
             <a:fld id="{E9846F43-F1B2-4AEE-B1BF-466D06853D46}" type="datetimeFigureOut">
               <a:rPr lang="ru-RU" smtClean="0"/>
-              <a:t>28.11.2025</a:t>
+              <a:t>01.12.2025</a:t>
             </a:fld>
             <a:endParaRPr lang="ru-RU"/>
           </a:p>
@@ -1156,7 +1156,7 @@
           <a:p>
             <a:fld id="{E9846F43-F1B2-4AEE-B1BF-466D06853D46}" type="datetimeFigureOut">
               <a:rPr lang="ru-RU" smtClean="0"/>
-              <a:t>28.11.2025</a:t>
+              <a:t>01.12.2025</a:t>
             </a:fld>
             <a:endParaRPr lang="ru-RU"/>
           </a:p>
@@ -1424,7 +1424,7 @@
           <a:p>
             <a:fld id="{E9846F43-F1B2-4AEE-B1BF-466D06853D46}" type="datetimeFigureOut">
               <a:rPr lang="ru-RU" smtClean="0"/>
-              <a:t>28.11.2025</a:t>
+              <a:t>01.12.2025</a:t>
             </a:fld>
             <a:endParaRPr lang="ru-RU"/>
           </a:p>
@@ -1839,7 +1839,7 @@
           <a:p>
             <a:fld id="{E9846F43-F1B2-4AEE-B1BF-466D06853D46}" type="datetimeFigureOut">
               <a:rPr lang="ru-RU" smtClean="0"/>
-              <a:t>28.11.2025</a:t>
+              <a:t>01.12.2025</a:t>
             </a:fld>
             <a:endParaRPr lang="ru-RU"/>
           </a:p>
@@ -1981,7 +1981,7 @@
           <a:p>
             <a:fld id="{E9846F43-F1B2-4AEE-B1BF-466D06853D46}" type="datetimeFigureOut">
               <a:rPr lang="ru-RU" smtClean="0"/>
-              <a:t>28.11.2025</a:t>
+              <a:t>01.12.2025</a:t>
             </a:fld>
             <a:endParaRPr lang="ru-RU"/>
           </a:p>
@@ -2094,7 +2094,7 @@
           <a:p>
             <a:fld id="{E9846F43-F1B2-4AEE-B1BF-466D06853D46}" type="datetimeFigureOut">
               <a:rPr lang="ru-RU" smtClean="0"/>
-              <a:t>28.11.2025</a:t>
+              <a:t>01.12.2025</a:t>
             </a:fld>
             <a:endParaRPr lang="ru-RU"/>
           </a:p>
@@ -2407,7 +2407,7 @@
           <a:p>
             <a:fld id="{E9846F43-F1B2-4AEE-B1BF-466D06853D46}" type="datetimeFigureOut">
               <a:rPr lang="ru-RU" smtClean="0"/>
-              <a:t>28.11.2025</a:t>
+              <a:t>01.12.2025</a:t>
             </a:fld>
             <a:endParaRPr lang="ru-RU"/>
           </a:p>
@@ -2696,7 +2696,7 @@
           <a:p>
             <a:fld id="{E9846F43-F1B2-4AEE-B1BF-466D06853D46}" type="datetimeFigureOut">
               <a:rPr lang="ru-RU" smtClean="0"/>
-              <a:t>28.11.2025</a:t>
+              <a:t>01.12.2025</a:t>
             </a:fld>
             <a:endParaRPr lang="ru-RU"/>
           </a:p>
@@ -2939,7 +2939,7 @@
           <a:p>
             <a:fld id="{E9846F43-F1B2-4AEE-B1BF-466D06853D46}" type="datetimeFigureOut">
               <a:rPr lang="ru-RU" smtClean="0"/>
-              <a:t>28.11.2025</a:t>
+              <a:t>01.12.2025</a:t>
             </a:fld>
             <a:endParaRPr lang="ru-RU"/>
           </a:p>
@@ -3635,7 +3635,7 @@
           <p:cNvPr id="2" name="Title 1">
             <a:extLst>
               <a:ext uri="{FF2B5EF4-FFF2-40B4-BE49-F238E27FC236}">
-                <a16:creationId xmlns:a16="http://schemas.microsoft.com/office/drawing/2014/main" id="{CB8DC19C-5148-0A92-9163-5C2674A8DB3A}"/>
+                <a16:creationId xmlns:a16="http://schemas.microsoft.com/office/drawing/2014/main" id="{C310D019-DF5D-FE77-908B-6B425EFCDDE0}"/>
               </a:ext>
             </a:extLst>
           </p:cNvPr>
@@ -3653,7 +3653,7 @@
           <a:p>
             <a:r>
               <a:rPr lang="ru-RU" dirty="0"/>
-              <a:t>Вопросы рецензента</a:t>
+              <a:t>Ссылки на источники</a:t>
             </a:r>
           </a:p>
         </p:txBody>
@@ -3663,7 +3663,7 @@
           <p:cNvPr id="3" name="Content Placeholder 2">
             <a:extLst>
               <a:ext uri="{FF2B5EF4-FFF2-40B4-BE49-F238E27FC236}">
-                <a16:creationId xmlns:a16="http://schemas.microsoft.com/office/drawing/2014/main" id="{F204D05D-778F-BAF8-E587-998E7445A8E4}"/>
+                <a16:creationId xmlns:a16="http://schemas.microsoft.com/office/drawing/2014/main" id="{2FD37D67-1AEE-44BD-42A0-2D3EC9B15E33}"/>
               </a:ext>
             </a:extLst>
           </p:cNvPr>
@@ -3686,7 +3686,7 @@
     </p:spTree>
     <p:extLst>
       <p:ext uri="{BB962C8B-B14F-4D97-AF65-F5344CB8AC3E}">
-        <p14:creationId xmlns:p14="http://schemas.microsoft.com/office/powerpoint/2010/main" val="92624472"/>
+        <p14:creationId xmlns:p14="http://schemas.microsoft.com/office/powerpoint/2010/main" val="365788303"/>
       </p:ext>
     </p:extLst>
   </p:cSld>
@@ -3942,45 +3942,22 @@
           </a:p>
         </p:txBody>
       </p:sp>
-      <p:sp>
-        <p:nvSpPr>
-          <p:cNvPr id="3" name="Content Placeholder 2">
-            <a:extLst>
-              <a:ext uri="{FF2B5EF4-FFF2-40B4-BE49-F238E27FC236}">
-                <a16:creationId xmlns:a16="http://schemas.microsoft.com/office/drawing/2014/main" id="{D130A9BD-B04E-9736-B80F-CBF99CC2CAAA}"/>
-              </a:ext>
-            </a:extLst>
-          </p:cNvPr>
-          <p:cNvSpPr>
-            <a:spLocks noGrp="1"/>
-          </p:cNvSpPr>
-          <p:nvPr>
-            <p:ph idx="1"/>
-          </p:nvPr>
-        </p:nvSpPr>
-        <p:spPr/>
-        <p:txBody>
-          <a:bodyPr/>
-          <a:lstStyle/>
-          <a:p>
-            <a:endParaRPr lang="ru-RU" dirty="0"/>
-          </a:p>
-        </p:txBody>
-      </p:sp>
       <p:pic>
         <p:nvPicPr>
-          <p:cNvPr id="15" name="Picture 14">
+          <p:cNvPr id="5" name="Content Placeholder 4">
             <a:hlinkClick r:id="rId2"/>
             <a:extLst>
               <a:ext uri="{FF2B5EF4-FFF2-40B4-BE49-F238E27FC236}">
-                <a16:creationId xmlns:a16="http://schemas.microsoft.com/office/drawing/2014/main" id="{1F9D9668-B71C-9AB0-C9A2-7D8D67A92D25}"/>
+                <a16:creationId xmlns:a16="http://schemas.microsoft.com/office/drawing/2014/main" id="{2F79D6BF-CD45-073D-C09B-B57007679754}"/>
               </a:ext>
             </a:extLst>
           </p:cNvPr>
           <p:cNvPicPr>
-            <a:picLocks noChangeAspect="1"/>
+            <a:picLocks noGrp="1" noChangeAspect="1"/>
           </p:cNvPicPr>
-          <p:nvPr/>
+          <p:nvPr>
+            <p:ph idx="1"/>
+          </p:nvPr>
         </p:nvPicPr>
         <p:blipFill>
           <a:blip r:embed="rId3"/>
@@ -3990,8 +3967,8 @@
         </p:blipFill>
         <p:spPr>
           <a:xfrm>
-            <a:off x="589781" y="1395843"/>
-            <a:ext cx="11012437" cy="5210902"/>
+            <a:off x="657225" y="1374814"/>
+            <a:ext cx="10877550" cy="5118061"/>
           </a:xfrm>
           <a:prstGeom prst="rect">
             <a:avLst/>
@@ -4033,7 +4010,7 @@
           <p:cNvPr id="2" name="Title 1">
             <a:extLst>
               <a:ext uri="{FF2B5EF4-FFF2-40B4-BE49-F238E27FC236}">
-                <a16:creationId xmlns:a16="http://schemas.microsoft.com/office/drawing/2014/main" id="{DAF4E5DE-E810-9EC3-D073-6D9687D6AEB4}"/>
+                <a16:creationId xmlns:a16="http://schemas.microsoft.com/office/drawing/2014/main" id="{D8E9A2DA-DD70-C3C0-8B68-81D50155BAD5}"/>
               </a:ext>
             </a:extLst>
           </p:cNvPr>
@@ -4051,7 +4028,7 @@
           <a:p>
             <a:r>
               <a:rPr lang="ru-RU" dirty="0"/>
-              <a:t>Результаты</a:t>
+              <a:t>Результаты 1</a:t>
             </a:r>
           </a:p>
         </p:txBody>
@@ -4061,7 +4038,7 @@
           <p:cNvPr id="3" name="Content Placeholder 2">
             <a:extLst>
               <a:ext uri="{FF2B5EF4-FFF2-40B4-BE49-F238E27FC236}">
-                <a16:creationId xmlns:a16="http://schemas.microsoft.com/office/drawing/2014/main" id="{FECD2DE2-A1B2-06B3-C893-46EE72DEB445}"/>
+                <a16:creationId xmlns:a16="http://schemas.microsoft.com/office/drawing/2014/main" id="{DDDC9CA8-3DFA-836C-509E-9569BCC2271F}"/>
               </a:ext>
             </a:extLst>
           </p:cNvPr>
@@ -4072,21 +4049,57 @@
             <p:ph idx="1"/>
           </p:nvPr>
         </p:nvSpPr>
-        <p:spPr/>
-        <p:txBody>
-          <a:bodyPr/>
-          <a:lstStyle/>
-          <a:p>
+        <p:spPr>
+          <a:xfrm>
+            <a:off x="5781174" y="1825625"/>
+            <a:ext cx="5867901" cy="4351338"/>
+          </a:xfrm>
+        </p:spPr>
+        <p:txBody>
+          <a:bodyPr/>
+          <a:lstStyle/>
+          <a:p>
+            <a:r>
+              <a:rPr lang="ru-RU" dirty="0"/>
+              <a:t>2 178 релевантных вакансий iOS/Android (Европа + Северная Америка).</a:t>
+            </a:r>
+          </a:p>
+          <a:p>
+            <a:r>
+              <a:rPr lang="pt-BR" dirty="0"/>
+              <a:t>4 группы: EU+Android, EU+iOS, NA+Android, NA+iOS</a:t>
+            </a:r>
+            <a:r>
+              <a:rPr lang="ru-RU" dirty="0"/>
+              <a:t>.</a:t>
+            </a:r>
+            <a:r>
+              <a:rPr lang="pt-BR" dirty="0"/>
+              <a:t> </a:t>
+            </a:r>
             <a:endParaRPr lang="ru-RU" dirty="0"/>
+          </a:p>
+          <a:p>
+            <a:r>
+              <a:rPr lang="ru-RU" dirty="0"/>
+              <a:t>213 технологий, сгруппированных в 28 категорий.</a:t>
+            </a:r>
+          </a:p>
+          <a:p>
+            <a:r>
+              <a:rPr lang="ru-RU" dirty="0"/>
+              <a:t>Результаты: таблицы + интерактивный дашборд Tableau с фильтрами.</a:t>
+            </a:r>
           </a:p>
         </p:txBody>
       </p:sp>
       <p:pic>
         <p:nvPicPr>
-          <p:cNvPr id="5" name="Picture 4">
-            <a:extLst>
-              <a:ext uri="{FF2B5EF4-FFF2-40B4-BE49-F238E27FC236}">
-                <a16:creationId xmlns:a16="http://schemas.microsoft.com/office/drawing/2014/main" id="{60BC2A8C-BF4C-5040-D761-F7FE93E01423}"/>
+          <p:cNvPr id="4" name="Content Placeholder 6">
+            <a:hlinkClick r:id="rId2"/>
+            <a:extLst>
+              <a:ext uri="{FF2B5EF4-FFF2-40B4-BE49-F238E27FC236}">
+                <a16:creationId xmlns:a16="http://schemas.microsoft.com/office/drawing/2014/main" id="{B1BDA3B3-3580-B25A-BDAB-1251FE8DDFF3}"/>
               </a:ext>
             </a:extLst>
           </p:cNvPr>
@@ -4096,15 +4109,15 @@
           <p:nvPr/>
         </p:nvPicPr>
         <p:blipFill>
-          <a:blip r:embed="rId2"/>
+          <a:blip r:embed="rId3"/>
           <a:stretch>
             <a:fillRect/>
           </a:stretch>
         </p:blipFill>
         <p:spPr>
           <a:xfrm>
-            <a:off x="838200" y="1825625"/>
-            <a:ext cx="7004175" cy="4020823"/>
+            <a:off x="542925" y="1825625"/>
+            <a:ext cx="5182334" cy="2974975"/>
           </a:xfrm>
           <a:prstGeom prst="rect">
             <a:avLst/>
@@ -4114,7 +4127,7 @@
     </p:spTree>
     <p:extLst>
       <p:ext uri="{BB962C8B-B14F-4D97-AF65-F5344CB8AC3E}">
-        <p14:creationId xmlns:p14="http://schemas.microsoft.com/office/powerpoint/2010/main" val="1895634139"/>
+        <p14:creationId xmlns:p14="http://schemas.microsoft.com/office/powerpoint/2010/main" val="4006114258"/>
       </p:ext>
     </p:extLst>
   </p:cSld>
@@ -4166,6 +4179,14 @@
               <a:rPr lang="ru-RU" dirty="0"/>
               <a:t>Результаты</a:t>
             </a:r>
+            <a:r>
+              <a:rPr lang="en-US" dirty="0"/>
+              <a:t> </a:t>
+            </a:r>
+            <a:r>
+              <a:rPr lang="ru-RU" dirty="0"/>
+              <a:t>2</a:t>
+            </a:r>
           </a:p>
         </p:txBody>
       </p:sp>
@@ -4182,45 +4203,215 @@
             <a:spLocks noGrp="1"/>
           </p:cNvSpPr>
           <p:nvPr>
-            <p:ph idx="1"/>
-          </p:nvPr>
-        </p:nvSpPr>
-        <p:spPr/>
+            <p:ph sz="half" idx="1"/>
+          </p:nvPr>
+        </p:nvSpPr>
+        <p:spPr>
+          <a:xfrm>
+            <a:off x="838200" y="2476499"/>
+            <a:ext cx="5181600" cy="3895726"/>
+          </a:xfrm>
+        </p:spPr>
         <p:txBody>
           <a:bodyPr>
-            <a:normAutofit/>
+            <a:noAutofit/>
           </a:bodyPr>
           <a:lstStyle/>
           <a:p>
+            <a:pPr lvl="1"/>
             <a:r>
               <a:rPr lang="ru-RU" dirty="0"/>
-              <a:t>В целом по обеим платформам повторяется общий каркас стека:</a:t>
+              <a:t>язык платформы  </a:t>
             </a:r>
           </a:p>
           <a:p>
             <a:pPr lvl="1"/>
             <a:r>
               <a:rPr lang="ru-RU" dirty="0"/>
-              <a:t> язык платформы </a:t>
+              <a:t>система контроля версий  </a:t>
             </a:r>
           </a:p>
           <a:p>
             <a:pPr lvl="1"/>
             <a:r>
               <a:rPr lang="ru-RU" dirty="0"/>
-              <a:t>система контроля версий </a:t>
+              <a:t>IDE  </a:t>
             </a:r>
           </a:p>
           <a:p>
             <a:pPr lvl="1"/>
             <a:r>
               <a:rPr lang="ru-RU" dirty="0"/>
-              <a:t>IDE</a:t>
-            </a:r>
-            <a:r>
-              <a:rPr lang="en-US" dirty="0"/>
-              <a:t>…</a:t>
-            </a:r>
+              <a:t>сетевое взаимодействие (API)  </a:t>
+            </a:r>
+          </a:p>
+          <a:p>
+            <a:pPr lvl="1"/>
+            <a:r>
+              <a:rPr lang="ru-RU" dirty="0"/>
+              <a:t>методологии разработки и PM-инструменты  </a:t>
+            </a:r>
+          </a:p>
+          <a:p>
+            <a:pPr lvl="1"/>
+            <a:r>
+              <a:rPr lang="ru-RU" dirty="0"/>
+              <a:t>UI-фреймворки  </a:t>
+            </a:r>
+          </a:p>
+          <a:p>
+            <a:pPr lvl="1"/>
+            <a:r>
+              <a:rPr lang="ru-RU" dirty="0"/>
+              <a:t>хранение данных  </a:t>
+            </a:r>
+          </a:p>
+          <a:p>
+            <a:pPr lvl="1"/>
+            <a:r>
+              <a:rPr lang="ru-RU" dirty="0"/>
+              <a:t>платформенный SDK/базовые компоненты  </a:t>
+            </a:r>
+          </a:p>
+        </p:txBody>
+      </p:sp>
+      <p:sp>
+        <p:nvSpPr>
+          <p:cNvPr id="4" name="Content Placeholder 3">
+            <a:extLst>
+              <a:ext uri="{FF2B5EF4-FFF2-40B4-BE49-F238E27FC236}">
+                <a16:creationId xmlns:a16="http://schemas.microsoft.com/office/drawing/2014/main" id="{83C1DAA2-5DBA-15DA-A878-4F9733F84084}"/>
+              </a:ext>
+            </a:extLst>
+          </p:cNvPr>
+          <p:cNvSpPr>
+            <a:spLocks noGrp="1"/>
+          </p:cNvSpPr>
+          <p:nvPr>
+            <p:ph sz="half" idx="2"/>
+          </p:nvPr>
+        </p:nvSpPr>
+        <p:spPr>
+          <a:xfrm>
+            <a:off x="6172200" y="2476499"/>
+            <a:ext cx="5181600" cy="3895726"/>
+          </a:xfrm>
+        </p:spPr>
+        <p:txBody>
+          <a:bodyPr>
+            <a:normAutofit fontScale="92500" lnSpcReduction="10000"/>
+          </a:bodyPr>
+          <a:lstStyle/>
+          <a:p>
+            <a:pPr lvl="1"/>
+            <a:r>
+              <a:rPr lang="ru-RU" sz="2600" dirty="0"/>
+              <a:t>архитектура и DI </a:t>
+            </a:r>
+          </a:p>
+          <a:p>
+            <a:pPr lvl="1"/>
+            <a:r>
+              <a:rPr lang="ru-RU" sz="2600" dirty="0"/>
+              <a:t>каналы публикации  </a:t>
+            </a:r>
+          </a:p>
+          <a:p>
+            <a:pPr lvl="1"/>
+            <a:r>
+              <a:rPr lang="ru-RU" sz="2600" dirty="0"/>
+              <a:t>асинхронность/реактивность  </a:t>
+            </a:r>
+          </a:p>
+          <a:p>
+            <a:pPr lvl="1"/>
+            <a:r>
+              <a:rPr lang="ru-RU" sz="2600" dirty="0"/>
+              <a:t>сборка и управление зависимостями  </a:t>
+            </a:r>
+          </a:p>
+          <a:p>
+            <a:pPr lvl="1"/>
+            <a:r>
+              <a:rPr lang="ru-RU" sz="2600" dirty="0"/>
+              <a:t>тестирование  </a:t>
+            </a:r>
+          </a:p>
+          <a:p>
+            <a:pPr lvl="1"/>
+            <a:r>
+              <a:rPr lang="ru-RU" sz="2600" dirty="0"/>
+              <a:t>дополнительные языки  </a:t>
+            </a:r>
+          </a:p>
+          <a:p>
+            <a:pPr lvl="1"/>
+            <a:r>
+              <a:rPr lang="ru-RU" sz="2600" dirty="0"/>
+              <a:t>облачные/бэкенд-сервисы (</a:t>
+            </a:r>
+            <a:r>
+              <a:rPr lang="ru-RU" sz="2600" dirty="0" err="1"/>
+              <a:t>BaaS</a:t>
+            </a:r>
+            <a:r>
+              <a:rPr lang="ru-RU" sz="2600" dirty="0"/>
+              <a:t>)  </a:t>
+            </a:r>
+          </a:p>
+          <a:p>
+            <a:pPr lvl="1"/>
+            <a:r>
+              <a:rPr lang="ru-RU" sz="2600" dirty="0"/>
+              <a:t>CI/CD и автоматизация  </a:t>
+            </a:r>
+          </a:p>
+          <a:p>
+            <a:pPr lvl="1"/>
+            <a:r>
+              <a:rPr lang="ru-RU" sz="2600" dirty="0"/>
+              <a:t>остальное </a:t>
+            </a:r>
+          </a:p>
+          <a:p>
+            <a:endParaRPr lang="ru-RU" dirty="0"/>
+          </a:p>
+        </p:txBody>
+      </p:sp>
+      <p:sp>
+        <p:nvSpPr>
+          <p:cNvPr id="5" name="TextBox 4">
+            <a:extLst>
+              <a:ext uri="{FF2B5EF4-FFF2-40B4-BE49-F238E27FC236}">
+                <a16:creationId xmlns:a16="http://schemas.microsoft.com/office/drawing/2014/main" id="{BC29CB38-4D78-AEF3-5735-8BEACD27A66B}"/>
+              </a:ext>
+            </a:extLst>
+          </p:cNvPr>
+          <p:cNvSpPr txBox="1"/>
+          <p:nvPr/>
+        </p:nvSpPr>
+        <p:spPr>
+          <a:xfrm>
+            <a:off x="838200" y="1752123"/>
+            <a:ext cx="9058275" cy="800219"/>
+          </a:xfrm>
+          <a:prstGeom prst="rect">
+            <a:avLst/>
+          </a:prstGeom>
+          <a:noFill/>
+        </p:spPr>
+        <p:txBody>
+          <a:bodyPr wrap="square" rtlCol="0">
+            <a:spAutoFit/>
+          </a:bodyPr>
+          <a:lstStyle/>
+          <a:p>
+            <a:r>
+              <a:rPr lang="ru-RU" sz="2800" dirty="0"/>
+              <a:t>По обоим платформам повторяется общий каркас стека:</a:t>
+            </a:r>
+          </a:p>
+          <a:p>
             <a:endParaRPr lang="ru-RU" dirty="0"/>
           </a:p>
         </p:txBody>
@@ -4278,7 +4469,7 @@
           <a:p>
             <a:r>
               <a:rPr lang="ru-RU" dirty="0"/>
-              <a:t>Обсуждение + выводы</a:t>
+              <a:t>Выводы и рекомендации</a:t>
             </a:r>
           </a:p>
         </p:txBody>
@@ -4306,17 +4497,19 @@
           <a:p>
             <a:r>
               <a:rPr lang="ru-RU" dirty="0"/>
-              <a:t>Ключевые результаты: главные требования стабильны как для iOS-, так и для Android-разработчиков, а межрегиональные различия касаются редких/специфичных технологий.</a:t>
-            </a:r>
-            <a:endParaRPr lang="en-US" dirty="0"/>
-          </a:p>
-          <a:p>
-            <a:endParaRPr lang="ru-RU" dirty="0"/>
+              <a:t>Ключевые выводы: главные требования стабильны как для iOS-, так и для Android-разработчиков, а межрегиональные различия касаются редких/специфичных технологий.</a:t>
+            </a:r>
           </a:p>
           <a:p>
             <a:r>
               <a:rPr lang="ru-RU" dirty="0"/>
               <a:t>Результаты исследования согласуются с литературой/прошлыми исследованиями. </a:t>
+            </a:r>
+          </a:p>
+          <a:p>
+            <a:r>
+              <a:rPr lang="ru-RU" dirty="0"/>
+              <a:t>На основе результатов составлены рекомендации по изучению в формате «Основа/Дополнение» для обеих платформ.</a:t>
             </a:r>
             <a:endParaRPr lang="en-US" dirty="0"/>
           </a:p>
@@ -4360,15 +4553,15 @@
           <p:cNvPr id="2" name="Title 1">
             <a:extLst>
               <a:ext uri="{FF2B5EF4-FFF2-40B4-BE49-F238E27FC236}">
-                <a16:creationId xmlns:a16="http://schemas.microsoft.com/office/drawing/2014/main" id="{B6F64BA4-0D1D-0885-752D-4A3101ED7AB7}"/>
-              </a:ext>
-            </a:extLst>
-          </p:cNvPr>
-          <p:cNvSpPr>
-            <a:spLocks noGrp="1"/>
-          </p:cNvSpPr>
-          <p:nvPr>
-            <p:ph type="title"/>
+                <a16:creationId xmlns:a16="http://schemas.microsoft.com/office/drawing/2014/main" id="{847D6EE1-6D2F-9E32-9EC1-EE212D09B274}"/>
+              </a:ext>
+            </a:extLst>
+          </p:cNvPr>
+          <p:cNvSpPr>
+            <a:spLocks noGrp="1"/>
+          </p:cNvSpPr>
+          <p:nvPr>
+            <p:ph type="ctrTitle"/>
           </p:nvPr>
         </p:nvSpPr>
         <p:spPr/>
@@ -4378,25 +4571,25 @@
           <a:p>
             <a:r>
               <a:rPr lang="ru-RU" dirty="0"/>
-              <a:t>Рекомендации?</a:t>
-            </a:r>
-          </a:p>
-        </p:txBody>
-      </p:sp>
-      <p:sp>
-        <p:nvSpPr>
-          <p:cNvPr id="3" name="Content Placeholder 2">
-            <a:extLst>
-              <a:ext uri="{FF2B5EF4-FFF2-40B4-BE49-F238E27FC236}">
-                <a16:creationId xmlns:a16="http://schemas.microsoft.com/office/drawing/2014/main" id="{22CE1CD7-22EA-5A23-350B-EF2A5E77A4EC}"/>
-              </a:ext>
-            </a:extLst>
-          </p:cNvPr>
-          <p:cNvSpPr>
-            <a:spLocks noGrp="1"/>
-          </p:cNvSpPr>
-          <p:nvPr>
-            <p:ph idx="1"/>
+              <a:t>Спасибо за внимание</a:t>
+            </a:r>
+          </a:p>
+        </p:txBody>
+      </p:sp>
+      <p:sp>
+        <p:nvSpPr>
+          <p:cNvPr id="4" name="Subtitle 3">
+            <a:extLst>
+              <a:ext uri="{FF2B5EF4-FFF2-40B4-BE49-F238E27FC236}">
+                <a16:creationId xmlns:a16="http://schemas.microsoft.com/office/drawing/2014/main" id="{9C58F630-B371-2B29-97B2-5932BEE916D2}"/>
+              </a:ext>
+            </a:extLst>
+          </p:cNvPr>
+          <p:cNvSpPr>
+            <a:spLocks noGrp="1"/>
+          </p:cNvSpPr>
+          <p:nvPr>
+            <p:ph type="subTitle" idx="1"/>
           </p:nvPr>
         </p:nvSpPr>
         <p:spPr/>
@@ -4406,130 +4599,15 @@
           <a:p>
             <a:r>
               <a:rPr lang="ru-RU" dirty="0"/>
-              <a:t>Формат основа/дополнение, где учтены как основной так и второстепенный стек. Например, у </a:t>
-            </a:r>
-            <a:r>
-              <a:rPr lang="en-US" dirty="0"/>
-              <a:t>Android </a:t>
-            </a:r>
-            <a:r>
-              <a:rPr lang="ru-RU" dirty="0"/>
-              <a:t>есть 2 основных языка: </a:t>
-            </a:r>
-            <a:r>
-              <a:rPr lang="en-US" dirty="0"/>
-              <a:t>Kotlin (</a:t>
-            </a:r>
-            <a:r>
-              <a:rPr lang="ru-RU" dirty="0"/>
-              <a:t>более новый и всё более популярный</a:t>
-            </a:r>
-            <a:r>
-              <a:rPr lang="en-US" dirty="0"/>
-              <a:t>)</a:t>
-            </a:r>
-            <a:r>
-              <a:rPr lang="ru-RU" dirty="0"/>
-              <a:t> и </a:t>
-            </a:r>
-            <a:r>
-              <a:rPr lang="en-US" dirty="0"/>
-              <a:t>Java (</a:t>
-            </a:r>
-            <a:r>
-              <a:rPr lang="ru-RU" dirty="0"/>
-              <a:t>легаси</a:t>
-            </a:r>
-            <a:r>
-              <a:rPr lang="en-US" dirty="0"/>
-              <a:t>)</a:t>
-            </a:r>
-            <a:r>
-              <a:rPr lang="ru-RU" dirty="0"/>
-              <a:t>. Бывает такое, что технология актуальна как для обоих языков (</a:t>
-            </a:r>
-            <a:r>
-              <a:rPr lang="en-US" dirty="0"/>
-              <a:t>Git</a:t>
-            </a:r>
-            <a:r>
-              <a:rPr lang="ru-RU" dirty="0"/>
-              <a:t>), так и только для одного</a:t>
-            </a:r>
-            <a:r>
-              <a:rPr lang="en-US" dirty="0"/>
-              <a:t> (</a:t>
-            </a:r>
-            <a:r>
-              <a:rPr lang="ru-RU" dirty="0"/>
-              <a:t>только </a:t>
-            </a:r>
-            <a:r>
-              <a:rPr lang="en-US" dirty="0"/>
-              <a:t>Kotlin </a:t>
-            </a:r>
-            <a:r>
-              <a:rPr lang="ru-RU" dirty="0"/>
-              <a:t>или </a:t>
-            </a:r>
-            <a:r>
-              <a:rPr lang="en-US" dirty="0"/>
-              <a:t>Java)</a:t>
-            </a:r>
-            <a:r>
-              <a:rPr lang="ru-RU" dirty="0"/>
-              <a:t>.</a:t>
-            </a:r>
-            <a:r>
-              <a:rPr lang="en-US" dirty="0"/>
               <a:t> </a:t>
             </a:r>
-            <a:r>
-              <a:rPr lang="ru-RU" dirty="0"/>
-              <a:t>В рекомендации этот момент учтён. </a:t>
-            </a:r>
-          </a:p>
-          <a:p>
-            <a:r>
-              <a:rPr lang="ru-RU" dirty="0"/>
-              <a:t>5.3.1. Рекомендации для специалистов </a:t>
-            </a:r>
-            <a:r>
-              <a:rPr lang="en-US" dirty="0"/>
-              <a:t>Android </a:t>
-            </a:r>
-            <a:r>
-              <a:rPr lang="ru-RU" dirty="0"/>
-              <a:t>Основа • язык платформы – </a:t>
-            </a:r>
-            <a:r>
-              <a:rPr lang="en-US" dirty="0"/>
-              <a:t>Kotlin (79,59 %), Java (58,92 %); • </a:t>
-            </a:r>
-            <a:r>
-              <a:rPr lang="ru-RU" dirty="0"/>
-              <a:t>система контроля версий – </a:t>
-            </a:r>
-            <a:r>
-              <a:rPr lang="en-US" dirty="0"/>
-              <a:t>Git (33,21 %); • IDE – Android Studio (19,91 %); • </a:t>
-            </a:r>
-            <a:r>
-              <a:rPr lang="ru-RU" dirty="0"/>
-              <a:t>сетевое взаимодействие (</a:t>
-            </a:r>
-            <a:r>
-              <a:rPr lang="en-US" dirty="0"/>
-              <a:t>API) – RES</a:t>
-            </a:r>
-            <a:endParaRPr lang="ru-RU" dirty="0"/>
           </a:p>
         </p:txBody>
       </p:sp>
     </p:spTree>
     <p:extLst>
       <p:ext uri="{BB962C8B-B14F-4D97-AF65-F5344CB8AC3E}">
-        <p14:creationId xmlns:p14="http://schemas.microsoft.com/office/powerpoint/2010/main" val="1316099249"/>
+        <p14:creationId xmlns:p14="http://schemas.microsoft.com/office/powerpoint/2010/main" val="531444177"/>
       </p:ext>
     </p:extLst>
   </p:cSld>
@@ -4561,7 +4639,7 @@
           <p:cNvPr id="2" name="Title 1">
             <a:extLst>
               <a:ext uri="{FF2B5EF4-FFF2-40B4-BE49-F238E27FC236}">
-                <a16:creationId xmlns:a16="http://schemas.microsoft.com/office/drawing/2014/main" id="{847D6EE1-6D2F-9E32-9EC1-EE212D09B274}"/>
+                <a16:creationId xmlns:a16="http://schemas.microsoft.com/office/drawing/2014/main" id="{CB8DC19C-5148-0A92-9163-5C2674A8DB3A}"/>
               </a:ext>
             </a:extLst>
           </p:cNvPr>
@@ -4579,40 +4657,47 @@
           <a:p>
             <a:r>
               <a:rPr lang="ru-RU" dirty="0"/>
-              <a:t>Спасибо за внимание</a:t>
-            </a:r>
-          </a:p>
-        </p:txBody>
-      </p:sp>
-      <p:sp>
-        <p:nvSpPr>
-          <p:cNvPr id="3" name="Content Placeholder 2">
-            <a:extLst>
-              <a:ext uri="{FF2B5EF4-FFF2-40B4-BE49-F238E27FC236}">
-                <a16:creationId xmlns:a16="http://schemas.microsoft.com/office/drawing/2014/main" id="{8EAE1704-D6E6-F256-8CE9-6988DC10C741}"/>
-              </a:ext>
-            </a:extLst>
-          </p:cNvPr>
-          <p:cNvSpPr>
-            <a:spLocks noGrp="1"/>
-          </p:cNvSpPr>
+              <a:t>Ответы рецензенту</a:t>
+            </a:r>
+          </a:p>
+        </p:txBody>
+      </p:sp>
+      <p:pic>
+        <p:nvPicPr>
+          <p:cNvPr id="5" name="Content Placeholder 4">
+            <a:extLst>
+              <a:ext uri="{FF2B5EF4-FFF2-40B4-BE49-F238E27FC236}">
+                <a16:creationId xmlns:a16="http://schemas.microsoft.com/office/drawing/2014/main" id="{53AF9B45-1B96-5232-0FA2-29264A75005E}"/>
+              </a:ext>
+            </a:extLst>
+          </p:cNvPr>
+          <p:cNvPicPr>
+            <a:picLocks noGrp="1" noChangeAspect="1"/>
+          </p:cNvPicPr>
           <p:nvPr>
             <p:ph idx="1"/>
           </p:nvPr>
-        </p:nvSpPr>
-        <p:spPr/>
-        <p:txBody>
-          <a:bodyPr/>
-          <a:lstStyle/>
-          <a:p>
-            <a:endParaRPr lang="ru-RU"/>
-          </a:p>
-        </p:txBody>
-      </p:sp>
+        </p:nvPicPr>
+        <p:blipFill>
+          <a:blip r:embed="rId2"/>
+          <a:stretch>
+            <a:fillRect/>
+          </a:stretch>
+        </p:blipFill>
+        <p:spPr>
+          <a:xfrm>
+            <a:off x="490971" y="1690688"/>
+            <a:ext cx="11159010" cy="1904159"/>
+          </a:xfrm>
+          <a:prstGeom prst="rect">
+            <a:avLst/>
+          </a:prstGeom>
+        </p:spPr>
+      </p:pic>
     </p:spTree>
     <p:extLst>
       <p:ext uri="{BB962C8B-B14F-4D97-AF65-F5344CB8AC3E}">
-        <p14:creationId xmlns:p14="http://schemas.microsoft.com/office/powerpoint/2010/main" val="531444177"/>
+        <p14:creationId xmlns:p14="http://schemas.microsoft.com/office/powerpoint/2010/main" val="92624472"/>
       </p:ext>
     </p:extLst>
   </p:cSld>

--- a/Presentations of Bachelor's theses.pptx
+++ b/Presentations of Bachelor's theses.pptx
@@ -4,6 +4,9 @@
   <p:sldMasterIdLst>
     <p:sldMasterId id="2147483648" r:id="rId1"/>
   </p:sldMasterIdLst>
+  <p:notesMasterIdLst>
+    <p:notesMasterId r:id="rId12"/>
+  </p:notesMasterIdLst>
   <p:sldIdLst>
     <p:sldId id="258" r:id="rId2"/>
     <p:sldId id="259" r:id="rId3"/>
@@ -121,6 +124,531 @@
 </p:presentation>
 </file>
 
+<file path=ppt/notesMasters/notesMaster1.xml><?xml version="1.0" encoding="utf-8"?>
+<p:notesMaster xmlns:a="http://schemas.openxmlformats.org/drawingml/2006/main" xmlns:r="http://schemas.openxmlformats.org/officeDocument/2006/relationships" xmlns:p="http://schemas.openxmlformats.org/presentationml/2006/main">
+  <p:cSld>
+    <p:bg>
+      <p:bgRef idx="1001">
+        <a:schemeClr val="bg1"/>
+      </p:bgRef>
+    </p:bg>
+    <p:spTree>
+      <p:nvGrpSpPr>
+        <p:cNvPr id="1" name=""/>
+        <p:cNvGrpSpPr/>
+        <p:nvPr/>
+      </p:nvGrpSpPr>
+      <p:grpSpPr>
+        <a:xfrm>
+          <a:off x="0" y="0"/>
+          <a:ext cx="0" cy="0"/>
+          <a:chOff x="0" y="0"/>
+          <a:chExt cx="0" cy="0"/>
+        </a:xfrm>
+      </p:grpSpPr>
+      <p:sp>
+        <p:nvSpPr>
+          <p:cNvPr id="2" name="Header Placeholder 1"/>
+          <p:cNvSpPr>
+            <a:spLocks noGrp="1"/>
+          </p:cNvSpPr>
+          <p:nvPr>
+            <p:ph type="hdr" sz="quarter"/>
+          </p:nvPr>
+        </p:nvSpPr>
+        <p:spPr>
+          <a:xfrm>
+            <a:off x="0" y="0"/>
+            <a:ext cx="2971800" cy="458788"/>
+          </a:xfrm>
+          <a:prstGeom prst="rect">
+            <a:avLst/>
+          </a:prstGeom>
+        </p:spPr>
+        <p:txBody>
+          <a:bodyPr vert="horz" lIns="91440" tIns="45720" rIns="91440" bIns="45720" rtlCol="0"/>
+          <a:lstStyle>
+            <a:lvl1pPr algn="l">
+              <a:defRPr sz="1200"/>
+            </a:lvl1pPr>
+          </a:lstStyle>
+          <a:p>
+            <a:endParaRPr lang="ru-RU"/>
+          </a:p>
+        </p:txBody>
+      </p:sp>
+      <p:sp>
+        <p:nvSpPr>
+          <p:cNvPr id="3" name="Date Placeholder 2"/>
+          <p:cNvSpPr>
+            <a:spLocks noGrp="1"/>
+          </p:cNvSpPr>
+          <p:nvPr>
+            <p:ph type="dt" idx="1"/>
+          </p:nvPr>
+        </p:nvSpPr>
+        <p:spPr>
+          <a:xfrm>
+            <a:off x="3884613" y="0"/>
+            <a:ext cx="2971800" cy="458788"/>
+          </a:xfrm>
+          <a:prstGeom prst="rect">
+            <a:avLst/>
+          </a:prstGeom>
+        </p:spPr>
+        <p:txBody>
+          <a:bodyPr vert="horz" lIns="91440" tIns="45720" rIns="91440" bIns="45720" rtlCol="0"/>
+          <a:lstStyle>
+            <a:lvl1pPr algn="r">
+              <a:defRPr sz="1200"/>
+            </a:lvl1pPr>
+          </a:lstStyle>
+          <a:p>
+            <a:fld id="{D4779A6A-4B5B-4880-8428-24B39EC00E81}" type="datetimeFigureOut">
+              <a:rPr lang="ru-RU" smtClean="0"/>
+              <a:t>02.12.2025</a:t>
+            </a:fld>
+            <a:endParaRPr lang="ru-RU"/>
+          </a:p>
+        </p:txBody>
+      </p:sp>
+      <p:sp>
+        <p:nvSpPr>
+          <p:cNvPr id="4" name="Slide Image Placeholder 3"/>
+          <p:cNvSpPr>
+            <a:spLocks noGrp="1" noRot="1" noChangeAspect="1"/>
+          </p:cNvSpPr>
+          <p:nvPr>
+            <p:ph type="sldImg" idx="2"/>
+          </p:nvPr>
+        </p:nvSpPr>
+        <p:spPr>
+          <a:xfrm>
+            <a:off x="685800" y="1143000"/>
+            <a:ext cx="5486400" cy="3086100"/>
+          </a:xfrm>
+          <a:prstGeom prst="rect">
+            <a:avLst/>
+          </a:prstGeom>
+          <a:noFill/>
+          <a:ln w="12700">
+            <a:solidFill>
+              <a:prstClr val="black"/>
+            </a:solidFill>
+          </a:ln>
+        </p:spPr>
+        <p:txBody>
+          <a:bodyPr vert="horz" lIns="91440" tIns="45720" rIns="91440" bIns="45720" rtlCol="0" anchor="ctr"/>
+          <a:lstStyle/>
+          <a:p>
+            <a:endParaRPr lang="ru-RU"/>
+          </a:p>
+        </p:txBody>
+      </p:sp>
+      <p:sp>
+        <p:nvSpPr>
+          <p:cNvPr id="5" name="Notes Placeholder 4"/>
+          <p:cNvSpPr>
+            <a:spLocks noGrp="1"/>
+          </p:cNvSpPr>
+          <p:nvPr>
+            <p:ph type="body" sz="quarter" idx="3"/>
+          </p:nvPr>
+        </p:nvSpPr>
+        <p:spPr>
+          <a:xfrm>
+            <a:off x="685800" y="4400550"/>
+            <a:ext cx="5486400" cy="3600450"/>
+          </a:xfrm>
+          <a:prstGeom prst="rect">
+            <a:avLst/>
+          </a:prstGeom>
+        </p:spPr>
+        <p:txBody>
+          <a:bodyPr vert="horz" lIns="91440" tIns="45720" rIns="91440" bIns="45720" rtlCol="0"/>
+          <a:lstStyle/>
+          <a:p>
+            <a:pPr lvl="0"/>
+            <a:r>
+              <a:rPr lang="en-US"/>
+              <a:t>Click to edit Master text styles</a:t>
+            </a:r>
+          </a:p>
+          <a:p>
+            <a:pPr lvl="1"/>
+            <a:r>
+              <a:rPr lang="en-US"/>
+              <a:t>Second level</a:t>
+            </a:r>
+          </a:p>
+          <a:p>
+            <a:pPr lvl="2"/>
+            <a:r>
+              <a:rPr lang="en-US"/>
+              <a:t>Third level</a:t>
+            </a:r>
+          </a:p>
+          <a:p>
+            <a:pPr lvl="3"/>
+            <a:r>
+              <a:rPr lang="en-US"/>
+              <a:t>Fourth level</a:t>
+            </a:r>
+          </a:p>
+          <a:p>
+            <a:pPr lvl="4"/>
+            <a:r>
+              <a:rPr lang="en-US"/>
+              <a:t>Fifth level</a:t>
+            </a:r>
+            <a:endParaRPr lang="ru-RU"/>
+          </a:p>
+        </p:txBody>
+      </p:sp>
+      <p:sp>
+        <p:nvSpPr>
+          <p:cNvPr id="6" name="Footer Placeholder 5"/>
+          <p:cNvSpPr>
+            <a:spLocks noGrp="1"/>
+          </p:cNvSpPr>
+          <p:nvPr>
+            <p:ph type="ftr" sz="quarter" idx="4"/>
+          </p:nvPr>
+        </p:nvSpPr>
+        <p:spPr>
+          <a:xfrm>
+            <a:off x="0" y="8685213"/>
+            <a:ext cx="2971800" cy="458787"/>
+          </a:xfrm>
+          <a:prstGeom prst="rect">
+            <a:avLst/>
+          </a:prstGeom>
+        </p:spPr>
+        <p:txBody>
+          <a:bodyPr vert="horz" lIns="91440" tIns="45720" rIns="91440" bIns="45720" rtlCol="0" anchor="b"/>
+          <a:lstStyle>
+            <a:lvl1pPr algn="l">
+              <a:defRPr sz="1200"/>
+            </a:lvl1pPr>
+          </a:lstStyle>
+          <a:p>
+            <a:endParaRPr lang="ru-RU"/>
+          </a:p>
+        </p:txBody>
+      </p:sp>
+      <p:sp>
+        <p:nvSpPr>
+          <p:cNvPr id="7" name="Slide Number Placeholder 6"/>
+          <p:cNvSpPr>
+            <a:spLocks noGrp="1"/>
+          </p:cNvSpPr>
+          <p:nvPr>
+            <p:ph type="sldNum" sz="quarter" idx="5"/>
+          </p:nvPr>
+        </p:nvSpPr>
+        <p:spPr>
+          <a:xfrm>
+            <a:off x="3884613" y="8685213"/>
+            <a:ext cx="2971800" cy="458787"/>
+          </a:xfrm>
+          <a:prstGeom prst="rect">
+            <a:avLst/>
+          </a:prstGeom>
+        </p:spPr>
+        <p:txBody>
+          <a:bodyPr vert="horz" lIns="91440" tIns="45720" rIns="91440" bIns="45720" rtlCol="0" anchor="b"/>
+          <a:lstStyle>
+            <a:lvl1pPr algn="r">
+              <a:defRPr sz="1200"/>
+            </a:lvl1pPr>
+          </a:lstStyle>
+          <a:p>
+            <a:fld id="{E22A60B0-D09F-4AED-B56C-532287473990}" type="slidenum">
+              <a:rPr lang="ru-RU" smtClean="0"/>
+              <a:t>‹#›</a:t>
+            </a:fld>
+            <a:endParaRPr lang="ru-RU"/>
+          </a:p>
+        </p:txBody>
+      </p:sp>
+    </p:spTree>
+    <p:extLst>
+      <p:ext uri="{BB962C8B-B14F-4D97-AF65-F5344CB8AC3E}">
+        <p14:creationId xmlns:p14="http://schemas.microsoft.com/office/powerpoint/2010/main" val="4113686135"/>
+      </p:ext>
+    </p:extLst>
+  </p:cSld>
+  <p:clrMap bg1="lt1" tx1="dk1" bg2="lt2" tx2="dk2" accent1="accent1" accent2="accent2" accent3="accent3" accent4="accent4" accent5="accent5" accent6="accent6" hlink="hlink" folHlink="folHlink"/>
+  <p:notesStyle>
+    <a:lvl1pPr marL="0" algn="l" defTabSz="914400" rtl="0" eaLnBrk="1" latinLnBrk="0" hangingPunct="1">
+      <a:defRPr sz="1200" kern="1200">
+        <a:solidFill>
+          <a:schemeClr val="tx1"/>
+        </a:solidFill>
+        <a:latin typeface="+mn-lt"/>
+        <a:ea typeface="+mn-ea"/>
+        <a:cs typeface="+mn-cs"/>
+      </a:defRPr>
+    </a:lvl1pPr>
+    <a:lvl2pPr marL="457200" algn="l" defTabSz="914400" rtl="0" eaLnBrk="1" latinLnBrk="0" hangingPunct="1">
+      <a:defRPr sz="1200" kern="1200">
+        <a:solidFill>
+          <a:schemeClr val="tx1"/>
+        </a:solidFill>
+        <a:latin typeface="+mn-lt"/>
+        <a:ea typeface="+mn-ea"/>
+        <a:cs typeface="+mn-cs"/>
+      </a:defRPr>
+    </a:lvl2pPr>
+    <a:lvl3pPr marL="914400" algn="l" defTabSz="914400" rtl="0" eaLnBrk="1" latinLnBrk="0" hangingPunct="1">
+      <a:defRPr sz="1200" kern="1200">
+        <a:solidFill>
+          <a:schemeClr val="tx1"/>
+        </a:solidFill>
+        <a:latin typeface="+mn-lt"/>
+        <a:ea typeface="+mn-ea"/>
+        <a:cs typeface="+mn-cs"/>
+      </a:defRPr>
+    </a:lvl3pPr>
+    <a:lvl4pPr marL="1371600" algn="l" defTabSz="914400" rtl="0" eaLnBrk="1" latinLnBrk="0" hangingPunct="1">
+      <a:defRPr sz="1200" kern="1200">
+        <a:solidFill>
+          <a:schemeClr val="tx1"/>
+        </a:solidFill>
+        <a:latin typeface="+mn-lt"/>
+        <a:ea typeface="+mn-ea"/>
+        <a:cs typeface="+mn-cs"/>
+      </a:defRPr>
+    </a:lvl4pPr>
+    <a:lvl5pPr marL="1828800" algn="l" defTabSz="914400" rtl="0" eaLnBrk="1" latinLnBrk="0" hangingPunct="1">
+      <a:defRPr sz="1200" kern="1200">
+        <a:solidFill>
+          <a:schemeClr val="tx1"/>
+        </a:solidFill>
+        <a:latin typeface="+mn-lt"/>
+        <a:ea typeface="+mn-ea"/>
+        <a:cs typeface="+mn-cs"/>
+      </a:defRPr>
+    </a:lvl5pPr>
+    <a:lvl6pPr marL="2286000" algn="l" defTabSz="914400" rtl="0" eaLnBrk="1" latinLnBrk="0" hangingPunct="1">
+      <a:defRPr sz="1200" kern="1200">
+        <a:solidFill>
+          <a:schemeClr val="tx1"/>
+        </a:solidFill>
+        <a:latin typeface="+mn-lt"/>
+        <a:ea typeface="+mn-ea"/>
+        <a:cs typeface="+mn-cs"/>
+      </a:defRPr>
+    </a:lvl6pPr>
+    <a:lvl7pPr marL="2743200" algn="l" defTabSz="914400" rtl="0" eaLnBrk="1" latinLnBrk="0" hangingPunct="1">
+      <a:defRPr sz="1200" kern="1200">
+        <a:solidFill>
+          <a:schemeClr val="tx1"/>
+        </a:solidFill>
+        <a:latin typeface="+mn-lt"/>
+        <a:ea typeface="+mn-ea"/>
+        <a:cs typeface="+mn-cs"/>
+      </a:defRPr>
+    </a:lvl7pPr>
+    <a:lvl8pPr marL="3200400" algn="l" defTabSz="914400" rtl="0" eaLnBrk="1" latinLnBrk="0" hangingPunct="1">
+      <a:defRPr sz="1200" kern="1200">
+        <a:solidFill>
+          <a:schemeClr val="tx1"/>
+        </a:solidFill>
+        <a:latin typeface="+mn-lt"/>
+        <a:ea typeface="+mn-ea"/>
+        <a:cs typeface="+mn-cs"/>
+      </a:defRPr>
+    </a:lvl8pPr>
+    <a:lvl9pPr marL="3657600" algn="l" defTabSz="914400" rtl="0" eaLnBrk="1" latinLnBrk="0" hangingPunct="1">
+      <a:defRPr sz="1200" kern="1200">
+        <a:solidFill>
+          <a:schemeClr val="tx1"/>
+        </a:solidFill>
+        <a:latin typeface="+mn-lt"/>
+        <a:ea typeface="+mn-ea"/>
+        <a:cs typeface="+mn-cs"/>
+      </a:defRPr>
+    </a:lvl9pPr>
+  </p:notesStyle>
+</p:notesMaster>
+</file>
+
+<file path=ppt/notesSlides/notesSlide1.xml><?xml version="1.0" encoding="utf-8"?>
+<p:notes xmlns:a="http://schemas.openxmlformats.org/drawingml/2006/main" xmlns:r="http://schemas.openxmlformats.org/officeDocument/2006/relationships" xmlns:p="http://schemas.openxmlformats.org/presentationml/2006/main">
+  <p:cSld>
+    <p:spTree>
+      <p:nvGrpSpPr>
+        <p:cNvPr id="1" name=""/>
+        <p:cNvGrpSpPr/>
+        <p:nvPr/>
+      </p:nvGrpSpPr>
+      <p:grpSpPr>
+        <a:xfrm>
+          <a:off x="0" y="0"/>
+          <a:ext cx="0" cy="0"/>
+          <a:chOff x="0" y="0"/>
+          <a:chExt cx="0" cy="0"/>
+        </a:xfrm>
+      </p:grpSpPr>
+      <p:sp>
+        <p:nvSpPr>
+          <p:cNvPr id="2" name="Slide Image Placeholder 1"/>
+          <p:cNvSpPr>
+            <a:spLocks noGrp="1" noRot="1" noChangeAspect="1"/>
+          </p:cNvSpPr>
+          <p:nvPr>
+            <p:ph type="sldImg"/>
+          </p:nvPr>
+        </p:nvSpPr>
+        <p:spPr/>
+        <p:txBody>
+          <a:bodyPr/>
+          <a:lstStyle/>
+          <a:p>
+            <a:endParaRPr lang="ru-RU"/>
+          </a:p>
+        </p:txBody>
+      </p:sp>
+      <p:sp>
+        <p:nvSpPr>
+          <p:cNvPr id="3" name="Notes Placeholder 2"/>
+          <p:cNvSpPr>
+            <a:spLocks noGrp="1"/>
+          </p:cNvSpPr>
+          <p:nvPr>
+            <p:ph type="body" idx="1"/>
+          </p:nvPr>
+        </p:nvSpPr>
+        <p:spPr/>
+        <p:txBody>
+          <a:bodyPr/>
+          <a:lstStyle/>
+          <a:p>
+            <a:endParaRPr lang="ru-RU" dirty="0"/>
+          </a:p>
+        </p:txBody>
+      </p:sp>
+      <p:sp>
+        <p:nvSpPr>
+          <p:cNvPr id="4" name="Slide Number Placeholder 3"/>
+          <p:cNvSpPr>
+            <a:spLocks noGrp="1"/>
+          </p:cNvSpPr>
+          <p:nvPr>
+            <p:ph type="sldNum" sz="quarter" idx="5"/>
+          </p:nvPr>
+        </p:nvSpPr>
+        <p:spPr/>
+        <p:txBody>
+          <a:bodyPr/>
+          <a:lstStyle/>
+          <a:p>
+            <a:fld id="{E22A60B0-D09F-4AED-B56C-532287473990}" type="slidenum">
+              <a:rPr lang="ru-RU" smtClean="0"/>
+              <a:t>3</a:t>
+            </a:fld>
+            <a:endParaRPr lang="ru-RU"/>
+          </a:p>
+        </p:txBody>
+      </p:sp>
+    </p:spTree>
+    <p:extLst>
+      <p:ext uri="{BB962C8B-B14F-4D97-AF65-F5344CB8AC3E}">
+        <p14:creationId xmlns:p14="http://schemas.microsoft.com/office/powerpoint/2010/main" val="666690450"/>
+      </p:ext>
+    </p:extLst>
+  </p:cSld>
+  <p:clrMapOvr>
+    <a:masterClrMapping/>
+  </p:clrMapOvr>
+</p:notes>
+</file>
+
+<file path=ppt/notesSlides/notesSlide2.xml><?xml version="1.0" encoding="utf-8"?>
+<p:notes xmlns:a="http://schemas.openxmlformats.org/drawingml/2006/main" xmlns:r="http://schemas.openxmlformats.org/officeDocument/2006/relationships" xmlns:p="http://schemas.openxmlformats.org/presentationml/2006/main">
+  <p:cSld>
+    <p:spTree>
+      <p:nvGrpSpPr>
+        <p:cNvPr id="1" name=""/>
+        <p:cNvGrpSpPr/>
+        <p:nvPr/>
+      </p:nvGrpSpPr>
+      <p:grpSpPr>
+        <a:xfrm>
+          <a:off x="0" y="0"/>
+          <a:ext cx="0" cy="0"/>
+          <a:chOff x="0" y="0"/>
+          <a:chExt cx="0" cy="0"/>
+        </a:xfrm>
+      </p:grpSpPr>
+      <p:sp>
+        <p:nvSpPr>
+          <p:cNvPr id="2" name="Slide Image Placeholder 1"/>
+          <p:cNvSpPr>
+            <a:spLocks noGrp="1" noRot="1" noChangeAspect="1"/>
+          </p:cNvSpPr>
+          <p:nvPr>
+            <p:ph type="sldImg"/>
+          </p:nvPr>
+        </p:nvSpPr>
+        <p:spPr/>
+      </p:sp>
+      <p:sp>
+        <p:nvSpPr>
+          <p:cNvPr id="3" name="Notes Placeholder 2"/>
+          <p:cNvSpPr>
+            <a:spLocks noGrp="1"/>
+          </p:cNvSpPr>
+          <p:nvPr>
+            <p:ph type="body" idx="1"/>
+          </p:nvPr>
+        </p:nvSpPr>
+        <p:spPr/>
+        <p:txBody>
+          <a:bodyPr/>
+          <a:lstStyle/>
+          <a:p>
+            <a:endParaRPr lang="ru-RU" dirty="0"/>
+          </a:p>
+        </p:txBody>
+      </p:sp>
+      <p:sp>
+        <p:nvSpPr>
+          <p:cNvPr id="4" name="Slide Number Placeholder 3"/>
+          <p:cNvSpPr>
+            <a:spLocks noGrp="1"/>
+          </p:cNvSpPr>
+          <p:nvPr>
+            <p:ph type="sldNum" sz="quarter" idx="5"/>
+          </p:nvPr>
+        </p:nvSpPr>
+        <p:spPr/>
+        <p:txBody>
+          <a:bodyPr/>
+          <a:lstStyle/>
+          <a:p>
+            <a:fld id="{E22A60B0-D09F-4AED-B56C-532287473990}" type="slidenum">
+              <a:rPr lang="ru-RU" smtClean="0"/>
+              <a:t>7</a:t>
+            </a:fld>
+            <a:endParaRPr lang="ru-RU"/>
+          </a:p>
+        </p:txBody>
+      </p:sp>
+    </p:spTree>
+    <p:extLst>
+      <p:ext uri="{BB962C8B-B14F-4D97-AF65-F5344CB8AC3E}">
+        <p14:creationId xmlns:p14="http://schemas.microsoft.com/office/powerpoint/2010/main" val="3785080408"/>
+      </p:ext>
+    </p:extLst>
+  </p:cSld>
+  <p:clrMapOvr>
+    <a:masterClrMapping/>
+  </p:clrMapOvr>
+</p:notes>
+</file>
+
 <file path=ppt/slideLayouts/slideLayout1.xml><?xml version="1.0" encoding="utf-8"?>
 <p:sldLayout xmlns:a="http://schemas.openxmlformats.org/drawingml/2006/main" xmlns:r="http://schemas.openxmlformats.org/officeDocument/2006/relationships" xmlns:p="http://schemas.openxmlformats.org/presentationml/2006/main" type="title" preserve="1">
   <p:cSld name="Title Slide">
@@ -270,7 +798,7 @@
           <a:p>
             <a:fld id="{E9846F43-F1B2-4AEE-B1BF-466D06853D46}" type="datetimeFigureOut">
               <a:rPr lang="ru-RU" smtClean="0"/>
-              <a:t>01.12.2025</a:t>
+              <a:t>02.12.2025</a:t>
             </a:fld>
             <a:endParaRPr lang="ru-RU"/>
           </a:p>
@@ -470,7 +998,7 @@
           <a:p>
             <a:fld id="{E9846F43-F1B2-4AEE-B1BF-466D06853D46}" type="datetimeFigureOut">
               <a:rPr lang="ru-RU" smtClean="0"/>
-              <a:t>01.12.2025</a:t>
+              <a:t>02.12.2025</a:t>
             </a:fld>
             <a:endParaRPr lang="ru-RU"/>
           </a:p>
@@ -680,7 +1208,7 @@
           <a:p>
             <a:fld id="{E9846F43-F1B2-4AEE-B1BF-466D06853D46}" type="datetimeFigureOut">
               <a:rPr lang="ru-RU" smtClean="0"/>
-              <a:t>01.12.2025</a:t>
+              <a:t>02.12.2025</a:t>
             </a:fld>
             <a:endParaRPr lang="ru-RU"/>
           </a:p>
@@ -880,7 +1408,7 @@
           <a:p>
             <a:fld id="{E9846F43-F1B2-4AEE-B1BF-466D06853D46}" type="datetimeFigureOut">
               <a:rPr lang="ru-RU" smtClean="0"/>
-              <a:t>01.12.2025</a:t>
+              <a:t>02.12.2025</a:t>
             </a:fld>
             <a:endParaRPr lang="ru-RU"/>
           </a:p>
@@ -1156,7 +1684,7 @@
           <a:p>
             <a:fld id="{E9846F43-F1B2-4AEE-B1BF-466D06853D46}" type="datetimeFigureOut">
               <a:rPr lang="ru-RU" smtClean="0"/>
-              <a:t>01.12.2025</a:t>
+              <a:t>02.12.2025</a:t>
             </a:fld>
             <a:endParaRPr lang="ru-RU"/>
           </a:p>
@@ -1424,7 +1952,7 @@
           <a:p>
             <a:fld id="{E9846F43-F1B2-4AEE-B1BF-466D06853D46}" type="datetimeFigureOut">
               <a:rPr lang="ru-RU" smtClean="0"/>
-              <a:t>01.12.2025</a:t>
+              <a:t>02.12.2025</a:t>
             </a:fld>
             <a:endParaRPr lang="ru-RU"/>
           </a:p>
@@ -1839,7 +2367,7 @@
           <a:p>
             <a:fld id="{E9846F43-F1B2-4AEE-B1BF-466D06853D46}" type="datetimeFigureOut">
               <a:rPr lang="ru-RU" smtClean="0"/>
-              <a:t>01.12.2025</a:t>
+              <a:t>02.12.2025</a:t>
             </a:fld>
             <a:endParaRPr lang="ru-RU"/>
           </a:p>
@@ -1981,7 +2509,7 @@
           <a:p>
             <a:fld id="{E9846F43-F1B2-4AEE-B1BF-466D06853D46}" type="datetimeFigureOut">
               <a:rPr lang="ru-RU" smtClean="0"/>
-              <a:t>01.12.2025</a:t>
+              <a:t>02.12.2025</a:t>
             </a:fld>
             <a:endParaRPr lang="ru-RU"/>
           </a:p>
@@ -2094,7 +2622,7 @@
           <a:p>
             <a:fld id="{E9846F43-F1B2-4AEE-B1BF-466D06853D46}" type="datetimeFigureOut">
               <a:rPr lang="ru-RU" smtClean="0"/>
-              <a:t>01.12.2025</a:t>
+              <a:t>02.12.2025</a:t>
             </a:fld>
             <a:endParaRPr lang="ru-RU"/>
           </a:p>
@@ -2407,7 +2935,7 @@
           <a:p>
             <a:fld id="{E9846F43-F1B2-4AEE-B1BF-466D06853D46}" type="datetimeFigureOut">
               <a:rPr lang="ru-RU" smtClean="0"/>
-              <a:t>01.12.2025</a:t>
+              <a:t>02.12.2025</a:t>
             </a:fld>
             <a:endParaRPr lang="ru-RU"/>
           </a:p>
@@ -2696,7 +3224,7 @@
           <a:p>
             <a:fld id="{E9846F43-F1B2-4AEE-B1BF-466D06853D46}" type="datetimeFigureOut">
               <a:rPr lang="ru-RU" smtClean="0"/>
-              <a:t>01.12.2025</a:t>
+              <a:t>02.12.2025</a:t>
             </a:fld>
             <a:endParaRPr lang="ru-RU"/>
           </a:p>
@@ -2939,7 +3467,7 @@
           <a:p>
             <a:fld id="{E9846F43-F1B2-4AEE-B1BF-466D06853D46}" type="datetimeFigureOut">
               <a:rPr lang="ru-RU" smtClean="0"/>
-              <a:t>01.12.2025</a:t>
+              <a:t>02.12.2025</a:t>
             </a:fld>
             <a:endParaRPr lang="ru-RU"/>
           </a:p>
@@ -3395,13 +3923,11 @@
             </a:pPr>
             <a:r>
               <a:rPr lang="ru-RU" sz="2000" dirty="0">
-                <a:latin typeface="Times New Roman" panose="02020603050405020304" pitchFamily="18" charset="0"/>
                 <a:cs typeface="Times New Roman" panose="02020603050405020304" pitchFamily="18" charset="0"/>
               </a:rPr>
               <a:t>ЭСТОНСКИЙ УНИВЕРСИТЕТ ПРЕДПРИНИМАТЕЛЬСТВА МАЙНОР</a:t>
             </a:r>
             <a:endParaRPr lang="en-US" sz="2000" dirty="0">
-              <a:latin typeface="Times New Roman" panose="02020603050405020304" pitchFamily="18" charset="0"/>
               <a:cs typeface="Times New Roman" panose="02020603050405020304" pitchFamily="18" charset="0"/>
             </a:endParaRPr>
           </a:p>
@@ -3410,7 +3936,6 @@
               <a:buNone/>
             </a:pPr>
             <a:endParaRPr lang="en-US" sz="100" dirty="0">
-              <a:latin typeface="Times New Roman" panose="02020603050405020304" pitchFamily="18" charset="0"/>
               <a:cs typeface="Times New Roman" panose="02020603050405020304" pitchFamily="18" charset="0"/>
             </a:endParaRPr>
           </a:p>
@@ -3420,13 +3945,11 @@
             </a:pPr>
             <a:r>
               <a:rPr lang="ru-RU" sz="2000" dirty="0">
-                <a:latin typeface="Times New Roman" panose="02020603050405020304" pitchFamily="18" charset="0"/>
                 <a:cs typeface="Times New Roman" panose="02020603050405020304" pitchFamily="18" charset="0"/>
               </a:rPr>
               <a:t>Учебная программа: Веб-дизайн и цифровая графика </a:t>
             </a:r>
             <a:endParaRPr lang="en-US" sz="2000" dirty="0">
-              <a:latin typeface="Times New Roman" panose="02020603050405020304" pitchFamily="18" charset="0"/>
               <a:cs typeface="Times New Roman" panose="02020603050405020304" pitchFamily="18" charset="0"/>
             </a:endParaRPr>
           </a:p>
@@ -3436,13 +3959,11 @@
             </a:pPr>
             <a:r>
               <a:rPr lang="ru-RU" sz="2000" dirty="0">
-                <a:latin typeface="Times New Roman" panose="02020603050405020304" pitchFamily="18" charset="0"/>
                 <a:cs typeface="Times New Roman" panose="02020603050405020304" pitchFamily="18" charset="0"/>
               </a:rPr>
               <a:t>Специализация: Веб-технологии </a:t>
             </a:r>
             <a:endParaRPr lang="en-US" sz="2000" dirty="0">
-              <a:latin typeface="Times New Roman" panose="02020603050405020304" pitchFamily="18" charset="0"/>
               <a:cs typeface="Times New Roman" panose="02020603050405020304" pitchFamily="18" charset="0"/>
             </a:endParaRPr>
           </a:p>
@@ -3451,7 +3972,6 @@
               <a:buNone/>
             </a:pPr>
             <a:endParaRPr lang="en-US" sz="2000" dirty="0">
-              <a:latin typeface="Times New Roman" panose="02020603050405020304" pitchFamily="18" charset="0"/>
               <a:cs typeface="Times New Roman" panose="02020603050405020304" pitchFamily="18" charset="0"/>
             </a:endParaRPr>
           </a:p>
@@ -3460,7 +3980,6 @@
               <a:buNone/>
             </a:pPr>
             <a:endParaRPr lang="en-US" sz="2000" dirty="0">
-              <a:latin typeface="Times New Roman" panose="02020603050405020304" pitchFamily="18" charset="0"/>
               <a:cs typeface="Times New Roman" panose="02020603050405020304" pitchFamily="18" charset="0"/>
             </a:endParaRPr>
           </a:p>
@@ -3470,13 +3989,11 @@
             </a:pPr>
             <a:r>
               <a:rPr lang="ru-RU" sz="2000" dirty="0">
-                <a:latin typeface="Times New Roman" panose="02020603050405020304" pitchFamily="18" charset="0"/>
                 <a:cs typeface="Times New Roman" panose="02020603050405020304" pitchFamily="18" charset="0"/>
               </a:rPr>
               <a:t>Ivan Ireev </a:t>
             </a:r>
             <a:endParaRPr lang="en-US" sz="2000" dirty="0">
-              <a:latin typeface="Times New Roman" panose="02020603050405020304" pitchFamily="18" charset="0"/>
               <a:cs typeface="Times New Roman" panose="02020603050405020304" pitchFamily="18" charset="0"/>
             </a:endParaRPr>
           </a:p>
@@ -3485,7 +4002,6 @@
               <a:buNone/>
             </a:pPr>
             <a:endParaRPr lang="en-US" sz="100" dirty="0">
-              <a:latin typeface="Times New Roman" panose="02020603050405020304" pitchFamily="18" charset="0"/>
               <a:cs typeface="Times New Roman" panose="02020603050405020304" pitchFamily="18" charset="0"/>
             </a:endParaRPr>
           </a:p>
@@ -3495,13 +4011,11 @@
             </a:pPr>
             <a:r>
               <a:rPr lang="ru-RU" sz="2400" b="1" dirty="0">
-                <a:latin typeface="Times New Roman" panose="02020603050405020304" pitchFamily="18" charset="0"/>
                 <a:cs typeface="Times New Roman" panose="02020603050405020304" pitchFamily="18" charset="0"/>
               </a:rPr>
               <a:t>Анализ частоты упоминаний технологий в вакансиях разработчиков iOS и Android в Европе и Северной Америке</a:t>
             </a:r>
             <a:endParaRPr lang="en-US" sz="2400" b="1" dirty="0">
-              <a:latin typeface="Times New Roman" panose="02020603050405020304" pitchFamily="18" charset="0"/>
               <a:cs typeface="Times New Roman" panose="02020603050405020304" pitchFamily="18" charset="0"/>
             </a:endParaRPr>
           </a:p>
@@ -3510,7 +4024,6 @@
               <a:buNone/>
             </a:pPr>
             <a:endParaRPr lang="en-US" sz="100" dirty="0">
-              <a:latin typeface="Times New Roman" panose="02020603050405020304" pitchFamily="18" charset="0"/>
               <a:cs typeface="Times New Roman" panose="02020603050405020304" pitchFamily="18" charset="0"/>
             </a:endParaRPr>
           </a:p>
@@ -3520,13 +4033,11 @@
             </a:pPr>
             <a:r>
               <a:rPr lang="ru-RU" sz="2000" dirty="0">
-                <a:latin typeface="Times New Roman" panose="02020603050405020304" pitchFamily="18" charset="0"/>
                 <a:cs typeface="Times New Roman" panose="02020603050405020304" pitchFamily="18" charset="0"/>
               </a:rPr>
               <a:t>Заключительная работа</a:t>
             </a:r>
             <a:endParaRPr lang="en-US" sz="2000" dirty="0">
-              <a:latin typeface="Times New Roman" panose="02020603050405020304" pitchFamily="18" charset="0"/>
               <a:cs typeface="Times New Roman" panose="02020603050405020304" pitchFamily="18" charset="0"/>
             </a:endParaRPr>
           </a:p>
@@ -3535,7 +4046,6 @@
               <a:buNone/>
             </a:pPr>
             <a:endParaRPr lang="en-US" sz="2000" dirty="0">
-              <a:latin typeface="Times New Roman" panose="02020603050405020304" pitchFamily="18" charset="0"/>
               <a:cs typeface="Times New Roman" panose="02020603050405020304" pitchFamily="18" charset="0"/>
             </a:endParaRPr>
           </a:p>
@@ -3544,7 +4054,6 @@
               <a:buNone/>
             </a:pPr>
             <a:endParaRPr lang="en-US" sz="2000" dirty="0">
-              <a:latin typeface="Times New Roman" panose="02020603050405020304" pitchFamily="18" charset="0"/>
               <a:cs typeface="Times New Roman" panose="02020603050405020304" pitchFamily="18" charset="0"/>
             </a:endParaRPr>
           </a:p>
@@ -3554,13 +4063,11 @@
             </a:pPr>
             <a:r>
               <a:rPr lang="ru-RU" sz="2000" dirty="0">
-                <a:latin typeface="Times New Roman" panose="02020603050405020304" pitchFamily="18" charset="0"/>
                 <a:cs typeface="Times New Roman" panose="02020603050405020304" pitchFamily="18" charset="0"/>
               </a:rPr>
               <a:t>Руководитель: Boris Shvartsman, PhD</a:t>
             </a:r>
             <a:endParaRPr lang="en-US" sz="2000" dirty="0">
-              <a:latin typeface="Times New Roman" panose="02020603050405020304" pitchFamily="18" charset="0"/>
               <a:cs typeface="Times New Roman" panose="02020603050405020304" pitchFamily="18" charset="0"/>
             </a:endParaRPr>
           </a:p>
@@ -3569,7 +4076,6 @@
               <a:buNone/>
             </a:pPr>
             <a:endParaRPr lang="en-US" sz="2000" dirty="0">
-              <a:latin typeface="Times New Roman" panose="02020603050405020304" pitchFamily="18" charset="0"/>
               <a:cs typeface="Times New Roman" panose="02020603050405020304" pitchFamily="18" charset="0"/>
             </a:endParaRPr>
           </a:p>
@@ -3578,7 +4084,6 @@
               <a:buNone/>
             </a:pPr>
             <a:endParaRPr lang="en-US" sz="2000" dirty="0">
-              <a:latin typeface="Times New Roman" panose="02020603050405020304" pitchFamily="18" charset="0"/>
               <a:cs typeface="Times New Roman" panose="02020603050405020304" pitchFamily="18" charset="0"/>
             </a:endParaRPr>
           </a:p>
@@ -3588,13 +4093,11 @@
             </a:pPr>
             <a:r>
               <a:rPr lang="ru-RU" sz="2000" dirty="0">
-                <a:latin typeface="Times New Roman" panose="02020603050405020304" pitchFamily="18" charset="0"/>
                 <a:cs typeface="Times New Roman" panose="02020603050405020304" pitchFamily="18" charset="0"/>
               </a:rPr>
               <a:t>Таллинн 2025</a:t>
             </a:r>
             <a:endParaRPr lang="en-US" sz="2000" dirty="0">
-              <a:latin typeface="Times New Roman" panose="02020603050405020304" pitchFamily="18" charset="0"/>
               <a:cs typeface="Times New Roman" panose="02020603050405020304" pitchFamily="18" charset="0"/>
             </a:endParaRPr>
           </a:p>
@@ -3676,10 +4179,205 @@
         </p:nvSpPr>
         <p:spPr/>
         <p:txBody>
-          <a:bodyPr/>
-          <a:lstStyle/>
-          <a:p>
-            <a:endParaRPr lang="ru-RU" dirty="0"/>
+          <a:bodyPr>
+            <a:normAutofit fontScale="85000" lnSpcReduction="10000"/>
+          </a:bodyPr>
+          <a:lstStyle/>
+          <a:p>
+            <a:r>
+              <a:rPr lang="ru-RU" dirty="0"/>
+              <a:t>unDraw. (n.d.). </a:t>
+            </a:r>
+            <a:r>
+              <a:rPr lang="en-US" dirty="0"/>
+              <a:t>Process </a:t>
+            </a:r>
+            <a:r>
+              <a:rPr lang="ru-RU" dirty="0"/>
+              <a:t>[Иллюстрация]. </a:t>
+            </a:r>
+            <a:r>
+              <a:rPr lang="en-US" dirty="0">
+                <a:hlinkClick r:id="rId2">
+                  <a:extLst>
+                    <a:ext uri="{A12FA001-AC4F-418D-AE19-62706E023703}">
+                      <ahyp:hlinkClr xmlns:ahyp="http://schemas.microsoft.com/office/drawing/2018/hyperlinkcolor" val="tx"/>
+                    </a:ext>
+                  </a:extLst>
+                </a:hlinkClick>
+              </a:rPr>
+              <a:t>https://undraw.co/search/questions</a:t>
+            </a:r>
+            <a:endParaRPr lang="en-US" dirty="0"/>
+          </a:p>
+          <a:p>
+            <a:r>
+              <a:rPr lang="ru-RU" dirty="0"/>
+              <a:t>unDraw. (n.d.). </a:t>
+            </a:r>
+            <a:r>
+              <a:rPr lang="en-US" dirty="0"/>
+              <a:t>Goals </a:t>
+            </a:r>
+            <a:r>
+              <a:rPr lang="ru-RU" dirty="0"/>
+              <a:t>[Иллюстрация].</a:t>
+            </a:r>
+            <a:r>
+              <a:rPr lang="en-US" dirty="0"/>
+              <a:t> </a:t>
+            </a:r>
+            <a:r>
+              <a:rPr lang="en-US" dirty="0">
+                <a:hlinkClick r:id="rId3">
+                  <a:extLst>
+                    <a:ext uri="{A12FA001-AC4F-418D-AE19-62706E023703}">
+                      <ahyp:hlinkClr xmlns:ahyp="http://schemas.microsoft.com/office/drawing/2018/hyperlinkcolor" val="tx"/>
+                    </a:ext>
+                  </a:extLst>
+                </a:hlinkClick>
+              </a:rPr>
+              <a:t>https://undraw.co/search/goals</a:t>
+            </a:r>
+            <a:endParaRPr lang="en-US" dirty="0"/>
+          </a:p>
+          <a:p>
+            <a:r>
+              <a:rPr lang="ru-RU" dirty="0"/>
+              <a:t>unDraw. (n.d.). </a:t>
+            </a:r>
+            <a:r>
+              <a:rPr lang="en-US" dirty="0"/>
+              <a:t>Visual Data </a:t>
+            </a:r>
+            <a:r>
+              <a:rPr lang="ru-RU" dirty="0"/>
+              <a:t>[Иллюстрация].</a:t>
+            </a:r>
+            <a:r>
+              <a:rPr lang="en-US" dirty="0"/>
+              <a:t> </a:t>
+            </a:r>
+            <a:r>
+              <a:rPr lang="en-US" dirty="0">
+                <a:hlinkClick r:id="rId4">
+                  <a:extLst>
+                    <a:ext uri="{A12FA001-AC4F-418D-AE19-62706E023703}">
+                      <ahyp:hlinkClr xmlns:ahyp="http://schemas.microsoft.com/office/drawing/2018/hyperlinkcolor" val="tx"/>
+                    </a:ext>
+                  </a:extLst>
+                </a:hlinkClick>
+              </a:rPr>
+              <a:t>https://undraw.co/search/visual-data</a:t>
+            </a:r>
+            <a:endParaRPr lang="en-US" dirty="0"/>
+          </a:p>
+          <a:p>
+            <a:r>
+              <a:rPr lang="ru-RU" dirty="0"/>
+              <a:t>unDraw. (n.d.). </a:t>
+            </a:r>
+            <a:r>
+              <a:rPr lang="en-US" dirty="0"/>
+              <a:t>Questions </a:t>
+            </a:r>
+            <a:r>
+              <a:rPr lang="ru-RU" dirty="0"/>
+              <a:t>[Иллюстрация].</a:t>
+            </a:r>
+            <a:r>
+              <a:rPr lang="en-US" dirty="0"/>
+              <a:t> </a:t>
+            </a:r>
+            <a:r>
+              <a:rPr lang="en-US" dirty="0">
+                <a:hlinkClick r:id="rId2">
+                  <a:extLst>
+                    <a:ext uri="{A12FA001-AC4F-418D-AE19-62706E023703}">
+                      <ahyp:hlinkClr xmlns:ahyp="http://schemas.microsoft.com/office/drawing/2018/hyperlinkcolor" val="tx"/>
+                    </a:ext>
+                  </a:extLst>
+                </a:hlinkClick>
+              </a:rPr>
+              <a:t>https://undraw.co/search/questions</a:t>
+            </a:r>
+            <a:endParaRPr lang="en-US" dirty="0"/>
+          </a:p>
+          <a:p>
+            <a:endParaRPr lang="en-US" dirty="0"/>
+          </a:p>
+          <a:p>
+            <a:pPr marL="0" indent="0">
+              <a:buNone/>
+            </a:pPr>
+            <a:r>
+              <a:rPr lang="ru-RU" dirty="0"/>
+              <a:t>Авторские материалы: </a:t>
+            </a:r>
+          </a:p>
+          <a:p>
+            <a:pPr marL="514350" indent="-514350">
+              <a:buAutoNum type="arabicPeriod"/>
+            </a:pPr>
+            <a:r>
+              <a:rPr lang="en-US" dirty="0"/>
+              <a:t>Mobile Development Stack Dashboard [</a:t>
+            </a:r>
+            <a:r>
+              <a:rPr lang="en-US" dirty="0" err="1"/>
+              <a:t>Дашборд</a:t>
+            </a:r>
+            <a:r>
+              <a:rPr lang="en-US" dirty="0"/>
+              <a:t> Tableau]. </a:t>
+            </a:r>
+            <a:r>
+              <a:rPr lang="en-US" u="sng" dirty="0">
+                <a:hlinkClick r:id="rId5">
+                  <a:extLst>
+                    <a:ext uri="{A12FA001-AC4F-418D-AE19-62706E023703}">
+                      <ahyp:hlinkClr xmlns:ahyp="http://schemas.microsoft.com/office/drawing/2018/hyperlinkcolor" val="tx"/>
+                    </a:ext>
+                  </a:extLst>
+                </a:hlinkClick>
+              </a:rPr>
+              <a:t>https://public.tableau.com/app/profile/ivan.ireev/viz/mobile_development_stack_dashboard/Dashboard1</a:t>
+            </a:r>
+            <a:endParaRPr lang="en-US" u="sng" dirty="0"/>
+          </a:p>
+          <a:p>
+            <a:pPr marL="514350" indent="-514350">
+              <a:buAutoNum type="arabicPeriod"/>
+            </a:pPr>
+            <a:r>
+              <a:rPr lang="ru-RU" dirty="0"/>
+              <a:t>Методология</a:t>
+            </a:r>
+            <a:r>
+              <a:rPr lang="en-US" dirty="0"/>
+              <a:t> [</a:t>
+            </a:r>
+            <a:r>
+              <a:rPr lang="ru-RU" dirty="0"/>
+              <a:t>Схема </a:t>
+            </a:r>
+            <a:r>
+              <a:rPr lang="en-US" dirty="0"/>
+              <a:t>Miro]. </a:t>
+            </a:r>
+            <a:r>
+              <a:rPr lang="en-US" dirty="0">
+                <a:hlinkClick r:id="rId6">
+                  <a:extLst>
+                    <a:ext uri="{A12FA001-AC4F-418D-AE19-62706E023703}">
+                      <ahyp:hlinkClr xmlns:ahyp="http://schemas.microsoft.com/office/drawing/2018/hyperlinkcolor" val="tx"/>
+                    </a:ext>
+                  </a:extLst>
+                </a:hlinkClick>
+              </a:rPr>
+              <a:t>https://miro.com/app/board/uXjVJjGG9q4=/?share_link_id=748928656338</a:t>
+            </a:r>
+            <a:endParaRPr lang="en-US" dirty="0"/>
           </a:p>
         </p:txBody>
       </p:sp>
@@ -3757,36 +4455,113 @@
             <p:ph idx="1"/>
           </p:nvPr>
         </p:nvSpPr>
-        <p:spPr/>
+        <p:spPr>
+          <a:xfrm>
+            <a:off x="4625788" y="1825625"/>
+            <a:ext cx="6728011" cy="4351338"/>
+          </a:xfrm>
+        </p:spPr>
         <p:txBody>
           <a:bodyPr/>
           <a:lstStyle/>
           <a:p>
             <a:r>
-              <a:rPr lang="ru-RU" dirty="0"/>
+              <a:rPr lang="ru-RU" sz="2400" dirty="0"/>
               <a:t>Рынок мобильных приложений стремительно растёт по пользователям, загрузкам и выручке.</a:t>
             </a:r>
           </a:p>
           <a:p>
             <a:r>
-              <a:rPr lang="ru-RU" dirty="0"/>
+              <a:rPr lang="ru-RU" sz="2400" dirty="0"/>
               <a:t>Генеративный ИИ усилил спрос на мобильных разработчиков и расширил круг их задач.</a:t>
             </a:r>
           </a:p>
           <a:p>
             <a:r>
-              <a:rPr lang="ru-RU" dirty="0"/>
+              <a:rPr lang="ru-RU" sz="2400" dirty="0"/>
               <a:t>Европа и Северная Америка — одни из самых прибыльных рынков с высокой концентрацией разработчиков и растущей конкуренцией за позиции.</a:t>
             </a:r>
           </a:p>
           <a:p>
             <a:r>
-              <a:rPr lang="ru-RU" dirty="0"/>
+              <a:rPr lang="ru-RU" sz="2400" dirty="0"/>
               <a:t>Быстрая смена технологий (iOS/Android, языки, фреймворки) усложняет выбор актуальных инструментов и обновление учебных программ.</a:t>
             </a:r>
           </a:p>
           <a:p>
             <a:endParaRPr lang="ru-RU" dirty="0"/>
+          </a:p>
+        </p:txBody>
+      </p:sp>
+      <p:pic>
+        <p:nvPicPr>
+          <p:cNvPr id="6" name="Picture 5">
+            <a:extLst>
+              <a:ext uri="{FF2B5EF4-FFF2-40B4-BE49-F238E27FC236}">
+                <a16:creationId xmlns:a16="http://schemas.microsoft.com/office/drawing/2014/main" id="{99DC165A-3D18-560E-FBED-71F64A05749F}"/>
+              </a:ext>
+            </a:extLst>
+          </p:cNvPr>
+          <p:cNvPicPr>
+            <a:picLocks noChangeAspect="1"/>
+          </p:cNvPicPr>
+          <p:nvPr/>
+        </p:nvPicPr>
+        <p:blipFill>
+          <a:blip r:embed="rId2"/>
+          <a:stretch>
+            <a:fillRect/>
+          </a:stretch>
+        </p:blipFill>
+        <p:spPr>
+          <a:xfrm>
+            <a:off x="670838" y="1604682"/>
+            <a:ext cx="3968396" cy="4156423"/>
+          </a:xfrm>
+          <a:prstGeom prst="rect">
+            <a:avLst/>
+          </a:prstGeom>
+        </p:spPr>
+      </p:pic>
+      <p:sp>
+        <p:nvSpPr>
+          <p:cNvPr id="4" name="TextBox 3">
+            <a:extLst>
+              <a:ext uri="{FF2B5EF4-FFF2-40B4-BE49-F238E27FC236}">
+                <a16:creationId xmlns:a16="http://schemas.microsoft.com/office/drawing/2014/main" id="{D88626AC-C231-9A5E-2FDC-432EF8534FD7}"/>
+              </a:ext>
+            </a:extLst>
+          </p:cNvPr>
+          <p:cNvSpPr txBox="1"/>
+          <p:nvPr/>
+        </p:nvSpPr>
+        <p:spPr>
+          <a:xfrm>
+            <a:off x="1069041" y="5534262"/>
+            <a:ext cx="3173505" cy="307777"/>
+          </a:xfrm>
+          <a:prstGeom prst="rect">
+            <a:avLst/>
+          </a:prstGeom>
+          <a:noFill/>
+        </p:spPr>
+        <p:txBody>
+          <a:bodyPr wrap="square" rtlCol="0">
+            <a:spAutoFit/>
+          </a:bodyPr>
+          <a:lstStyle/>
+          <a:p>
+            <a:r>
+              <a:rPr lang="ru-RU" sz="1400" dirty="0">
+                <a:solidFill>
+                  <a:schemeClr val="tx1">
+                    <a:lumMod val="50000"/>
+                    <a:lumOff val="50000"/>
+                  </a:schemeClr>
+                </a:solidFill>
+              </a:rPr>
+              <a:t>Рисунок 1. Process (источник: unDraw).</a:t>
+            </a:r>
           </a:p>
         </p:txBody>
       </p:sp>
@@ -3864,7 +4639,12 @@
             <p:ph idx="1"/>
           </p:nvPr>
         </p:nvSpPr>
-        <p:spPr/>
+        <p:spPr>
+          <a:xfrm>
+            <a:off x="5746375" y="1825625"/>
+            <a:ext cx="5607423" cy="4351338"/>
+          </a:xfrm>
+        </p:spPr>
         <p:txBody>
           <a:bodyPr>
             <a:normAutofit/>
@@ -3872,14 +4652,130 @@
           <a:lstStyle/>
           <a:p>
             <a:r>
-              <a:rPr lang="ru-RU" dirty="0"/>
+              <a:rPr lang="ru-RU" sz="2400" dirty="0"/>
               <a:t>Проблема: сложность определения наиболее востребованных навыков и инструментов мобильных разработчиков при быстром обновлении технологий.</a:t>
             </a:r>
           </a:p>
           <a:p>
             <a:r>
-              <a:rPr lang="ru-RU" dirty="0"/>
+              <a:rPr lang="ru-RU" sz="2400" dirty="0"/>
               <a:t>Цель: выявить наиболее часто упоминаемые в вакансиях технологии для iOS- и Android-разработчиков, сравнить требования в Европе и Северной Америке и составить рекомендации по изучению для специалистов и учебных программ.</a:t>
+            </a:r>
+          </a:p>
+        </p:txBody>
+      </p:sp>
+      <p:pic>
+        <p:nvPicPr>
+          <p:cNvPr id="6" name="Picture 5">
+            <a:extLst>
+              <a:ext uri="{FF2B5EF4-FFF2-40B4-BE49-F238E27FC236}">
+                <a16:creationId xmlns:a16="http://schemas.microsoft.com/office/drawing/2014/main" id="{79DA91E0-464F-D5EF-661C-26E975795AC1}"/>
+              </a:ext>
+            </a:extLst>
+          </p:cNvPr>
+          <p:cNvPicPr>
+            <a:picLocks noChangeAspect="1"/>
+          </p:cNvPicPr>
+          <p:nvPr/>
+        </p:nvPicPr>
+        <p:blipFill>
+          <a:blip r:embed="rId3"/>
+          <a:stretch>
+            <a:fillRect/>
+          </a:stretch>
+        </p:blipFill>
+        <p:spPr>
+          <a:xfrm>
+            <a:off x="667871" y="1690688"/>
+            <a:ext cx="4925784" cy="4109477"/>
+          </a:xfrm>
+          <a:prstGeom prst="rect">
+            <a:avLst/>
+          </a:prstGeom>
+        </p:spPr>
+      </p:pic>
+      <p:sp>
+        <p:nvSpPr>
+          <p:cNvPr id="7" name="TextBox 6">
+            <a:extLst>
+              <a:ext uri="{FF2B5EF4-FFF2-40B4-BE49-F238E27FC236}">
+                <a16:creationId xmlns:a16="http://schemas.microsoft.com/office/drawing/2014/main" id="{91B9B0D2-6C6A-BF71-9781-EDD0607715F9}"/>
+              </a:ext>
+            </a:extLst>
+          </p:cNvPr>
+          <p:cNvSpPr txBox="1"/>
+          <p:nvPr/>
+        </p:nvSpPr>
+        <p:spPr>
+          <a:xfrm>
+            <a:off x="1620371" y="5646276"/>
+            <a:ext cx="3173505" cy="307777"/>
+          </a:xfrm>
+          <a:prstGeom prst="rect">
+            <a:avLst/>
+          </a:prstGeom>
+          <a:noFill/>
+        </p:spPr>
+        <p:txBody>
+          <a:bodyPr wrap="square" rtlCol="0">
+            <a:spAutoFit/>
+          </a:bodyPr>
+          <a:lstStyle/>
+          <a:p>
+            <a:r>
+              <a:rPr lang="ru-RU" sz="1400" dirty="0">
+                <a:solidFill>
+                  <a:schemeClr val="tx1">
+                    <a:lumMod val="50000"/>
+                    <a:lumOff val="50000"/>
+                  </a:schemeClr>
+                </a:solidFill>
+              </a:rPr>
+              <a:t>Рисунок </a:t>
+            </a:r>
+            <a:r>
+              <a:rPr lang="en-US" sz="1400" dirty="0">
+                <a:solidFill>
+                  <a:schemeClr val="tx1">
+                    <a:lumMod val="50000"/>
+                    <a:lumOff val="50000"/>
+                  </a:schemeClr>
+                </a:solidFill>
+              </a:rPr>
+              <a:t>2</a:t>
+            </a:r>
+            <a:r>
+              <a:rPr lang="ru-RU" sz="1400" dirty="0">
+                <a:solidFill>
+                  <a:schemeClr val="tx1">
+                    <a:lumMod val="50000"/>
+                    <a:lumOff val="50000"/>
+                  </a:schemeClr>
+                </a:solidFill>
+              </a:rPr>
+              <a:t>. </a:t>
+            </a:r>
+            <a:r>
+              <a:rPr lang="en-US" sz="1400" dirty="0">
+                <a:solidFill>
+                  <a:schemeClr val="tx1">
+                    <a:lumMod val="50000"/>
+                    <a:lumOff val="50000"/>
+                  </a:schemeClr>
+                </a:solidFill>
+              </a:rPr>
+              <a:t>Goals</a:t>
+            </a:r>
+            <a:r>
+              <a:rPr lang="ru-RU" sz="1400" dirty="0">
+                <a:solidFill>
+                  <a:schemeClr val="tx1">
+                    <a:lumMod val="50000"/>
+                    <a:lumOff val="50000"/>
+                  </a:schemeClr>
+                </a:solidFill>
+              </a:rPr>
+              <a:t> (источник: unDraw).</a:t>
             </a:r>
           </a:p>
         </p:txBody>
@@ -3967,14 +4863,78 @@
         </p:blipFill>
         <p:spPr>
           <a:xfrm>
-            <a:off x="657225" y="1374814"/>
-            <a:ext cx="10877550" cy="5118061"/>
+            <a:off x="574067" y="1416680"/>
+            <a:ext cx="11043866" cy="5196315"/>
           </a:xfrm>
           <a:prstGeom prst="rect">
             <a:avLst/>
           </a:prstGeom>
         </p:spPr>
       </p:pic>
+      <p:sp>
+        <p:nvSpPr>
+          <p:cNvPr id="3" name="TextBox 2">
+            <a:extLst>
+              <a:ext uri="{FF2B5EF4-FFF2-40B4-BE49-F238E27FC236}">
+                <a16:creationId xmlns:a16="http://schemas.microsoft.com/office/drawing/2014/main" id="{676DC912-9FF6-0A1B-44A6-F466EC26ED1D}"/>
+              </a:ext>
+            </a:extLst>
+          </p:cNvPr>
+          <p:cNvSpPr txBox="1"/>
+          <p:nvPr/>
+        </p:nvSpPr>
+        <p:spPr>
+          <a:xfrm>
+            <a:off x="574067" y="6459106"/>
+            <a:ext cx="5105400" cy="307777"/>
+          </a:xfrm>
+          <a:prstGeom prst="rect">
+            <a:avLst/>
+          </a:prstGeom>
+          <a:noFill/>
+        </p:spPr>
+        <p:txBody>
+          <a:bodyPr wrap="square" rtlCol="0">
+            <a:spAutoFit/>
+          </a:bodyPr>
+          <a:lstStyle/>
+          <a:p>
+            <a:r>
+              <a:rPr lang="ru-RU" sz="1400" dirty="0">
+                <a:solidFill>
+                  <a:schemeClr val="tx1">
+                    <a:lumMod val="50000"/>
+                    <a:lumOff val="50000"/>
+                  </a:schemeClr>
+                </a:solidFill>
+              </a:rPr>
+              <a:t>Рисунок </a:t>
+            </a:r>
+            <a:r>
+              <a:rPr lang="en-US" sz="1400" dirty="0">
+                <a:solidFill>
+                  <a:schemeClr val="tx1">
+                    <a:lumMod val="50000"/>
+                    <a:lumOff val="50000"/>
+                  </a:schemeClr>
+                </a:solidFill>
+              </a:rPr>
+              <a:t>3</a:t>
+            </a:r>
+            <a:r>
+              <a:rPr lang="ru-RU" sz="1400" dirty="0">
+                <a:solidFill>
+                  <a:schemeClr val="tx1">
+                    <a:lumMod val="50000"/>
+                    <a:lumOff val="50000"/>
+                  </a:schemeClr>
+                </a:solidFill>
+              </a:rPr>
+              <a:t>. Методология (источник: составлено автором).</a:t>
+            </a:r>
+          </a:p>
+        </p:txBody>
+      </p:sp>
     </p:spTree>
     <p:extLst>
       <p:ext uri="{BB962C8B-B14F-4D97-AF65-F5344CB8AC3E}">
@@ -4051,43 +5011,45 @@
         </p:nvSpPr>
         <p:spPr>
           <a:xfrm>
-            <a:off x="5781174" y="1825625"/>
-            <a:ext cx="5867901" cy="4351338"/>
+            <a:off x="6176682" y="1825625"/>
+            <a:ext cx="5472393" cy="4351338"/>
           </a:xfrm>
         </p:spPr>
         <p:txBody>
-          <a:bodyPr/>
-          <a:lstStyle/>
-          <a:p>
-            <a:r>
-              <a:rPr lang="ru-RU" dirty="0"/>
+          <a:bodyPr>
+            <a:normAutofit/>
+          </a:bodyPr>
+          <a:lstStyle/>
+          <a:p>
+            <a:r>
+              <a:rPr lang="ru-RU" sz="2400" dirty="0"/>
               <a:t>2 178 релевантных вакансий iOS/Android (Европа + Северная Америка).</a:t>
             </a:r>
           </a:p>
           <a:p>
             <a:r>
-              <a:rPr lang="pt-BR" dirty="0"/>
+              <a:rPr lang="pt-BR" sz="2400" dirty="0"/>
               <a:t>4 группы: EU+Android, EU+iOS, NA+Android, NA+iOS</a:t>
             </a:r>
             <a:r>
-              <a:rPr lang="ru-RU" dirty="0"/>
+              <a:rPr lang="ru-RU" sz="2400" dirty="0"/>
               <a:t>.</a:t>
             </a:r>
             <a:r>
-              <a:rPr lang="pt-BR" dirty="0"/>
+              <a:rPr lang="pt-BR" sz="2400" dirty="0"/>
               <a:t> </a:t>
             </a:r>
-            <a:endParaRPr lang="ru-RU" dirty="0"/>
-          </a:p>
-          <a:p>
-            <a:r>
-              <a:rPr lang="ru-RU" dirty="0"/>
+            <a:endParaRPr lang="ru-RU" sz="2400" dirty="0"/>
+          </a:p>
+          <a:p>
+            <a:r>
+              <a:rPr lang="ru-RU" sz="2400" dirty="0"/>
               <a:t>213 технологий, сгруппированных в 28 категорий.</a:t>
             </a:r>
           </a:p>
           <a:p>
             <a:r>
-              <a:rPr lang="ru-RU" dirty="0"/>
+              <a:rPr lang="ru-RU" sz="2400" dirty="0"/>
               <a:t>Результаты: таблицы + интерактивный дашборд Tableau с фильтрами.</a:t>
             </a:r>
           </a:p>
@@ -4116,7 +5078,7 @@
         </p:blipFill>
         <p:spPr>
           <a:xfrm>
-            <a:off x="542925" y="1825625"/>
+            <a:off x="832985" y="1825625"/>
             <a:ext cx="5182334" cy="2974975"/>
           </a:xfrm>
           <a:prstGeom prst="rect">
@@ -4124,6 +5086,92 @@
           </a:prstGeom>
         </p:spPr>
       </p:pic>
+      <p:sp>
+        <p:nvSpPr>
+          <p:cNvPr id="5" name="TextBox 4">
+            <a:extLst>
+              <a:ext uri="{FF2B5EF4-FFF2-40B4-BE49-F238E27FC236}">
+                <a16:creationId xmlns:a16="http://schemas.microsoft.com/office/drawing/2014/main" id="{B0004905-1524-51BD-B0CF-F15EF156D722}"/>
+              </a:ext>
+            </a:extLst>
+          </p:cNvPr>
+          <p:cNvSpPr txBox="1"/>
+          <p:nvPr/>
+        </p:nvSpPr>
+        <p:spPr>
+          <a:xfrm>
+            <a:off x="918894" y="4935537"/>
+            <a:ext cx="5010516" cy="307777"/>
+          </a:xfrm>
+          <a:prstGeom prst="rect">
+            <a:avLst/>
+          </a:prstGeom>
+          <a:noFill/>
+        </p:spPr>
+        <p:txBody>
+          <a:bodyPr wrap="square" rtlCol="0">
+            <a:spAutoFit/>
+          </a:bodyPr>
+          <a:lstStyle/>
+          <a:p>
+            <a:r>
+              <a:rPr lang="ru-RU" sz="1400" dirty="0">
+                <a:solidFill>
+                  <a:schemeClr val="tx1">
+                    <a:lumMod val="50000"/>
+                    <a:lumOff val="50000"/>
+                  </a:schemeClr>
+                </a:solidFill>
+              </a:rPr>
+              <a:t>Рисунок </a:t>
+            </a:r>
+            <a:r>
+              <a:rPr lang="en-US" sz="1400" dirty="0">
+                <a:solidFill>
+                  <a:schemeClr val="tx1">
+                    <a:lumMod val="50000"/>
+                    <a:lumOff val="50000"/>
+                  </a:schemeClr>
+                </a:solidFill>
+              </a:rPr>
+              <a:t>4</a:t>
+            </a:r>
+            <a:r>
+              <a:rPr lang="ru-RU" sz="1400" dirty="0">
+                <a:solidFill>
+                  <a:schemeClr val="tx1">
+                    <a:lumMod val="50000"/>
+                    <a:lumOff val="50000"/>
+                  </a:schemeClr>
+                </a:solidFill>
+              </a:rPr>
+              <a:t>. Дашборд в </a:t>
+            </a:r>
+            <a:r>
+              <a:rPr lang="en-US" sz="1400" dirty="0">
+                <a:solidFill>
+                  <a:schemeClr val="tx1">
+                    <a:lumMod val="50000"/>
+                    <a:lumOff val="50000"/>
+                  </a:schemeClr>
+                </a:solidFill>
+              </a:rPr>
+              <a:t>Tableau</a:t>
+            </a:r>
+            <a:r>
+              <a:rPr lang="ru-RU" sz="1400" dirty="0">
+                <a:solidFill>
+                  <a:schemeClr val="tx1">
+                    <a:lumMod val="50000"/>
+                    <a:lumOff val="50000"/>
+                  </a:schemeClr>
+                </a:solidFill>
+              </a:rPr>
+              <a:t> (источник: составлено автором).</a:t>
+            </a:r>
+          </a:p>
+        </p:txBody>
+      </p:sp>
     </p:spTree>
     <p:extLst>
       <p:ext uri="{BB962C8B-B14F-4D97-AF65-F5344CB8AC3E}">
@@ -4293,13 +5341,13 @@
         </p:nvSpPr>
         <p:spPr>
           <a:xfrm>
-            <a:off x="6172200" y="2476499"/>
-            <a:ext cx="5181600" cy="3895726"/>
+            <a:off x="6172199" y="2476499"/>
+            <a:ext cx="5266765" cy="3895726"/>
           </a:xfrm>
         </p:spPr>
         <p:txBody>
           <a:bodyPr>
-            <a:normAutofit fontScale="92500" lnSpcReduction="10000"/>
+            <a:normAutofit fontScale="92500"/>
           </a:bodyPr>
           <a:lstStyle/>
           <a:p>
@@ -4393,7 +5441,7 @@
         <p:spPr>
           <a:xfrm>
             <a:off x="838200" y="1752123"/>
-            <a:ext cx="9058275" cy="800219"/>
+            <a:ext cx="9058275" cy="738664"/>
           </a:xfrm>
           <a:prstGeom prst="rect">
             <a:avLst/>
@@ -4407,7 +5455,7 @@
           <a:lstStyle/>
           <a:p>
             <a:r>
-              <a:rPr lang="ru-RU" sz="2800" dirty="0"/>
+              <a:rPr lang="ru-RU" sz="2400" dirty="0"/>
               <a:t>По обоим платформам повторяется общий каркас стека:</a:t>
             </a:r>
           </a:p>
@@ -4490,31 +5538,154 @@
             <p:ph idx="1"/>
           </p:nvPr>
         </p:nvSpPr>
-        <p:spPr/>
-        <p:txBody>
-          <a:bodyPr/>
-          <a:lstStyle/>
-          <a:p>
-            <a:r>
-              <a:rPr lang="ru-RU" dirty="0"/>
+        <p:spPr>
+          <a:xfrm>
+            <a:off x="5351929" y="1825625"/>
+            <a:ext cx="6001871" cy="4351338"/>
+          </a:xfrm>
+        </p:spPr>
+        <p:txBody>
+          <a:bodyPr>
+            <a:normAutofit/>
+          </a:bodyPr>
+          <a:lstStyle/>
+          <a:p>
+            <a:r>
+              <a:rPr lang="ru-RU" sz="2400" dirty="0"/>
               <a:t>Ключевые выводы: главные требования стабильны как для iOS-, так и для Android-разработчиков, а межрегиональные различия касаются редких/специфичных технологий.</a:t>
             </a:r>
           </a:p>
           <a:p>
             <a:r>
-              <a:rPr lang="ru-RU" dirty="0"/>
+              <a:rPr lang="ru-RU" sz="2400" dirty="0"/>
               <a:t>Результаты исследования согласуются с литературой/прошлыми исследованиями. </a:t>
             </a:r>
           </a:p>
           <a:p>
             <a:r>
-              <a:rPr lang="ru-RU" dirty="0"/>
+              <a:rPr lang="ru-RU" sz="2400" dirty="0"/>
               <a:t>На основе результатов составлены рекомендации по изучению в формате «Основа/Дополнение» для обеих платформ.</a:t>
             </a:r>
-            <a:endParaRPr lang="en-US" dirty="0"/>
-          </a:p>
-          <a:p>
-            <a:endParaRPr lang="ru-RU" dirty="0"/>
+            <a:endParaRPr lang="en-US" sz="2400" dirty="0"/>
+          </a:p>
+          <a:p>
+            <a:endParaRPr lang="ru-RU" sz="2400" dirty="0"/>
+          </a:p>
+        </p:txBody>
+      </p:sp>
+      <p:pic>
+        <p:nvPicPr>
+          <p:cNvPr id="5" name="Picture 4">
+            <a:extLst>
+              <a:ext uri="{FF2B5EF4-FFF2-40B4-BE49-F238E27FC236}">
+                <a16:creationId xmlns:a16="http://schemas.microsoft.com/office/drawing/2014/main" id="{5D2FB450-5937-1F1A-26CD-687F83463C7C}"/>
+              </a:ext>
+            </a:extLst>
+          </p:cNvPr>
+          <p:cNvPicPr>
+            <a:picLocks noChangeAspect="1"/>
+          </p:cNvPicPr>
+          <p:nvPr/>
+        </p:nvPicPr>
+        <p:blipFill>
+          <a:blip r:embed="rId3"/>
+          <a:stretch>
+            <a:fillRect/>
+          </a:stretch>
+        </p:blipFill>
+        <p:spPr>
+          <a:xfrm>
+            <a:off x="580763" y="1687478"/>
+            <a:ext cx="4694965" cy="3932032"/>
+          </a:xfrm>
+          <a:prstGeom prst="rect">
+            <a:avLst/>
+          </a:prstGeom>
+        </p:spPr>
+      </p:pic>
+      <p:sp>
+        <p:nvSpPr>
+          <p:cNvPr id="8" name="TextBox 7">
+            <a:extLst>
+              <a:ext uri="{FF2B5EF4-FFF2-40B4-BE49-F238E27FC236}">
+                <a16:creationId xmlns:a16="http://schemas.microsoft.com/office/drawing/2014/main" id="{C5A2F7D2-F857-8123-1CDB-C7F9F754E351}"/>
+              </a:ext>
+            </a:extLst>
+          </p:cNvPr>
+          <p:cNvSpPr txBox="1"/>
+          <p:nvPr/>
+        </p:nvSpPr>
+        <p:spPr>
+          <a:xfrm>
+            <a:off x="1190212" y="5465621"/>
+            <a:ext cx="3476065" cy="307777"/>
+          </a:xfrm>
+          <a:prstGeom prst="rect">
+            <a:avLst/>
+          </a:prstGeom>
+          <a:noFill/>
+        </p:spPr>
+        <p:txBody>
+          <a:bodyPr wrap="square" rtlCol="0">
+            <a:spAutoFit/>
+          </a:bodyPr>
+          <a:lstStyle/>
+          <a:p>
+            <a:r>
+              <a:rPr lang="ru-RU" sz="1400" dirty="0">
+                <a:solidFill>
+                  <a:schemeClr val="tx1">
+                    <a:lumMod val="50000"/>
+                    <a:lumOff val="50000"/>
+                  </a:schemeClr>
+                </a:solidFill>
+              </a:rPr>
+              <a:t>Рисунок </a:t>
+            </a:r>
+            <a:r>
+              <a:rPr lang="en-US" sz="1400" dirty="0">
+                <a:solidFill>
+                  <a:schemeClr val="tx1">
+                    <a:lumMod val="50000"/>
+                    <a:lumOff val="50000"/>
+                  </a:schemeClr>
+                </a:solidFill>
+              </a:rPr>
+              <a:t>5</a:t>
+            </a:r>
+            <a:r>
+              <a:rPr lang="ru-RU" sz="1400" dirty="0">
+                <a:solidFill>
+                  <a:schemeClr val="tx1">
+                    <a:lumMod val="50000"/>
+                    <a:lumOff val="50000"/>
+                  </a:schemeClr>
+                </a:solidFill>
+              </a:rPr>
+              <a:t>. </a:t>
+            </a:r>
+            <a:r>
+              <a:rPr lang="en-US" sz="1400" dirty="0">
+                <a:solidFill>
+                  <a:schemeClr val="tx1">
+                    <a:lumMod val="50000"/>
+                    <a:lumOff val="50000"/>
+                  </a:schemeClr>
+                </a:solidFill>
+              </a:rPr>
+              <a:t>Visual Data</a:t>
+            </a:r>
+            <a:r>
+              <a:rPr lang="ru-RU" sz="1400" dirty="0">
+                <a:solidFill>
+                  <a:schemeClr val="tx1">
+                    <a:lumMod val="50000"/>
+                    <a:lumOff val="50000"/>
+                  </a:schemeClr>
+                </a:solidFill>
+              </a:rPr>
+              <a:t> (источник: unDraw).</a:t>
+            </a:r>
           </a:p>
         </p:txBody>
       </p:sp>
@@ -4662,21 +5833,273 @@
           </a:p>
         </p:txBody>
       </p:sp>
+      <p:sp>
+        <p:nvSpPr>
+          <p:cNvPr id="9" name="Content Placeholder 8">
+            <a:extLst>
+              <a:ext uri="{FF2B5EF4-FFF2-40B4-BE49-F238E27FC236}">
+                <a16:creationId xmlns:a16="http://schemas.microsoft.com/office/drawing/2014/main" id="{C109ADB3-8318-D911-588A-B7DA9CF4DA40}"/>
+              </a:ext>
+            </a:extLst>
+          </p:cNvPr>
+          <p:cNvSpPr>
+            <a:spLocks noGrp="1"/>
+          </p:cNvSpPr>
+          <p:nvPr>
+            <p:ph idx="1"/>
+          </p:nvPr>
+        </p:nvSpPr>
+        <p:spPr>
+          <a:xfrm>
+            <a:off x="6096000" y="1690688"/>
+            <a:ext cx="5025830" cy="4351338"/>
+          </a:xfrm>
+        </p:spPr>
+        <p:txBody>
+          <a:bodyPr/>
+          <a:lstStyle/>
+          <a:p>
+            <a:r>
+              <a:rPr lang="ru-RU" sz="2400" dirty="0"/>
+              <a:t>1. “Собрать корпус вакансий (Google Jobs через SerpApi)“,</a:t>
+            </a:r>
+          </a:p>
+          <a:p>
+            <a:pPr marL="914400" lvl="1" indent="-457200">
+              <a:buFont typeface="+mj-lt"/>
+              <a:buAutoNum type="alphaLcParenR"/>
+            </a:pPr>
+            <a:r>
+              <a:rPr lang="ru-RU" dirty="0" err="1"/>
+              <a:t>are</a:t>
+            </a:r>
+            <a:r>
+              <a:rPr lang="ru-RU" dirty="0"/>
+              <a:t> </a:t>
+            </a:r>
+            <a:r>
+              <a:rPr lang="ru-RU" dirty="0" err="1"/>
+              <a:t>here</a:t>
+            </a:r>
+            <a:r>
+              <a:rPr lang="ru-RU" dirty="0"/>
+              <a:t> </a:t>
+            </a:r>
+            <a:r>
+              <a:rPr lang="ru-RU" dirty="0" err="1"/>
+              <a:t>other</a:t>
+            </a:r>
+            <a:r>
+              <a:rPr lang="ru-RU" dirty="0"/>
+              <a:t> </a:t>
+            </a:r>
+            <a:r>
+              <a:rPr lang="ru-RU" dirty="0" err="1"/>
+              <a:t>options</a:t>
+            </a:r>
+            <a:r>
+              <a:rPr lang="ru-RU" dirty="0"/>
+              <a:t> </a:t>
+            </a:r>
+            <a:r>
+              <a:rPr lang="ru-RU" dirty="0" err="1"/>
+              <a:t>available</a:t>
+            </a:r>
+            <a:r>
+              <a:rPr lang="ru-RU" dirty="0"/>
+              <a:t> ?</a:t>
+            </a:r>
+          </a:p>
+          <a:p>
+            <a:pPr marL="914400" lvl="1" indent="-457200">
+              <a:buFont typeface="+mj-lt"/>
+              <a:buAutoNum type="alphaLcParenR"/>
+            </a:pPr>
+            <a:r>
+              <a:rPr lang="ru-RU" dirty="0" err="1"/>
+              <a:t>how</a:t>
+            </a:r>
+            <a:r>
+              <a:rPr lang="ru-RU" dirty="0"/>
+              <a:t> </a:t>
+            </a:r>
+            <a:r>
+              <a:rPr lang="ru-RU" dirty="0" err="1"/>
+              <a:t>well</a:t>
+            </a:r>
+            <a:r>
+              <a:rPr lang="ru-RU" dirty="0"/>
+              <a:t> </a:t>
+            </a:r>
+            <a:r>
+              <a:rPr lang="ru-RU" dirty="0" err="1"/>
+              <a:t>this</a:t>
+            </a:r>
+            <a:r>
+              <a:rPr lang="ru-RU" dirty="0"/>
+              <a:t> </a:t>
+            </a:r>
+            <a:r>
+              <a:rPr lang="ru-RU" dirty="0" err="1"/>
+              <a:t>search</a:t>
+            </a:r>
+            <a:r>
+              <a:rPr lang="ru-RU" dirty="0"/>
+              <a:t> </a:t>
+            </a:r>
+            <a:r>
+              <a:rPr lang="ru-RU" dirty="0" err="1"/>
+              <a:t>cover</a:t>
+            </a:r>
+            <a:r>
+              <a:rPr lang="ru-RU" dirty="0"/>
+              <a:t> </a:t>
+            </a:r>
+            <a:r>
+              <a:rPr lang="ru-RU" dirty="0" err="1"/>
+              <a:t>real</a:t>
+            </a:r>
+            <a:r>
+              <a:rPr lang="ru-RU" dirty="0"/>
+              <a:t> </a:t>
+            </a:r>
+            <a:r>
+              <a:rPr lang="ru-RU" dirty="0" err="1"/>
+              <a:t>vacancies</a:t>
+            </a:r>
+            <a:r>
+              <a:rPr lang="ru-RU" dirty="0"/>
+              <a:t>?</a:t>
+            </a:r>
+          </a:p>
+          <a:p>
+            <a:r>
+              <a:rPr lang="ru-RU" sz="2400" dirty="0"/>
+              <a:t>2. </a:t>
+            </a:r>
+            <a:r>
+              <a:rPr lang="ru-RU" sz="2400" dirty="0" err="1"/>
+              <a:t>Proceeding</a:t>
+            </a:r>
+            <a:r>
+              <a:rPr lang="ru-RU" sz="2400" dirty="0"/>
+              <a:t> from </a:t>
+            </a:r>
+            <a:r>
+              <a:rPr lang="ru-RU" sz="2400" dirty="0" err="1"/>
+              <a:t>jobs</a:t>
+            </a:r>
+            <a:r>
+              <a:rPr lang="ru-RU" sz="2400" dirty="0"/>
+              <a:t> </a:t>
+            </a:r>
+            <a:r>
+              <a:rPr lang="ru-RU" sz="2400" dirty="0" err="1"/>
+              <a:t>found</a:t>
+            </a:r>
+            <a:r>
+              <a:rPr lang="ru-RU" sz="2400" dirty="0"/>
+              <a:t>, </a:t>
+            </a:r>
+            <a:r>
+              <a:rPr lang="ru-RU" sz="2400" dirty="0" err="1"/>
+              <a:t>is</a:t>
+            </a:r>
+            <a:r>
+              <a:rPr lang="ru-RU" sz="2400" dirty="0"/>
+              <a:t> </a:t>
+            </a:r>
+            <a:r>
+              <a:rPr lang="ru-RU" sz="2400" dirty="0" err="1"/>
+              <a:t>here</a:t>
+            </a:r>
+            <a:r>
+              <a:rPr lang="ru-RU" sz="2400" dirty="0"/>
+              <a:t> </a:t>
+            </a:r>
+            <a:r>
+              <a:rPr lang="ru-RU" sz="2400" dirty="0" err="1"/>
+              <a:t>possible</a:t>
+            </a:r>
+            <a:r>
+              <a:rPr lang="ru-RU" sz="2400" dirty="0"/>
+              <a:t> </a:t>
+            </a:r>
+            <a:r>
+              <a:rPr lang="ru-RU" sz="2400" dirty="0" err="1"/>
+              <a:t>do</a:t>
+            </a:r>
+            <a:r>
+              <a:rPr lang="ru-RU" sz="2400" dirty="0"/>
+              <a:t> </a:t>
+            </a:r>
+            <a:r>
+              <a:rPr lang="ru-RU" sz="2400" dirty="0" err="1"/>
+              <a:t>distinguish</a:t>
+            </a:r>
+            <a:r>
+              <a:rPr lang="ru-RU" sz="2400" dirty="0"/>
+              <a:t> </a:t>
+            </a:r>
+            <a:r>
+              <a:rPr lang="ru-RU" sz="2400" dirty="0" err="1"/>
+              <a:t>online</a:t>
+            </a:r>
+            <a:r>
+              <a:rPr lang="ru-RU" sz="2400" dirty="0"/>
+              <a:t>/</a:t>
+            </a:r>
+            <a:r>
+              <a:rPr lang="ru-RU" sz="2400" dirty="0" err="1"/>
+              <a:t>office</a:t>
+            </a:r>
+            <a:r>
+              <a:rPr lang="ru-RU" sz="2400" dirty="0"/>
+              <a:t>/</a:t>
+            </a:r>
+            <a:r>
+              <a:rPr lang="ru-RU" sz="2400" dirty="0" err="1"/>
+              <a:t>partially</a:t>
+            </a:r>
+            <a:r>
+              <a:rPr lang="ru-RU" sz="2400" dirty="0"/>
+              <a:t> </a:t>
+            </a:r>
+            <a:r>
+              <a:rPr lang="ru-RU" sz="2400" dirty="0" err="1"/>
+              <a:t>office</a:t>
+            </a:r>
+            <a:r>
+              <a:rPr lang="ru-RU" sz="2400" dirty="0"/>
+              <a:t> </a:t>
+            </a:r>
+            <a:r>
+              <a:rPr lang="ru-RU" sz="2400" dirty="0" err="1"/>
+              <a:t>positions</a:t>
+            </a:r>
+            <a:r>
+              <a:rPr lang="ru-RU" sz="2400" dirty="0"/>
+              <a:t> ?</a:t>
+            </a:r>
+          </a:p>
+          <a:p>
+            <a:endParaRPr lang="ru-RU" dirty="0"/>
+          </a:p>
+        </p:txBody>
+      </p:sp>
       <p:pic>
         <p:nvPicPr>
-          <p:cNvPr id="5" name="Content Placeholder 4">
-            <a:extLst>
-              <a:ext uri="{FF2B5EF4-FFF2-40B4-BE49-F238E27FC236}">
-                <a16:creationId xmlns:a16="http://schemas.microsoft.com/office/drawing/2014/main" id="{53AF9B45-1B96-5232-0FA2-29264A75005E}"/>
+          <p:cNvPr id="13" name="Picture 12">
+            <a:extLst>
+              <a:ext uri="{FF2B5EF4-FFF2-40B4-BE49-F238E27FC236}">
+                <a16:creationId xmlns:a16="http://schemas.microsoft.com/office/drawing/2014/main" id="{DB2A9960-D7B4-8693-1084-55D37FF5A33B}"/>
               </a:ext>
             </a:extLst>
           </p:cNvPr>
           <p:cNvPicPr>
-            <a:picLocks noGrp="1" noChangeAspect="1"/>
+            <a:picLocks noChangeAspect="1"/>
           </p:cNvPicPr>
-          <p:nvPr>
-            <p:ph idx="1"/>
-          </p:nvPr>
+          <p:nvPr/>
         </p:nvPicPr>
         <p:blipFill>
           <a:blip r:embed="rId2"/>
@@ -4686,14 +6109,100 @@
         </p:blipFill>
         <p:spPr>
           <a:xfrm>
-            <a:off x="490971" y="1690688"/>
-            <a:ext cx="11159010" cy="1904159"/>
+            <a:off x="838200" y="1690688"/>
+            <a:ext cx="5298293" cy="3732959"/>
           </a:xfrm>
           <a:prstGeom prst="rect">
             <a:avLst/>
           </a:prstGeom>
         </p:spPr>
       </p:pic>
+      <p:sp>
+        <p:nvSpPr>
+          <p:cNvPr id="14" name="TextBox 13">
+            <a:extLst>
+              <a:ext uri="{FF2B5EF4-FFF2-40B4-BE49-F238E27FC236}">
+                <a16:creationId xmlns:a16="http://schemas.microsoft.com/office/drawing/2014/main" id="{12440992-BC59-EC30-EB5E-AA67848847BC}"/>
+              </a:ext>
+            </a:extLst>
+          </p:cNvPr>
+          <p:cNvSpPr txBox="1"/>
+          <p:nvPr/>
+        </p:nvSpPr>
+        <p:spPr>
+          <a:xfrm>
+            <a:off x="1749313" y="5271171"/>
+            <a:ext cx="3476065" cy="307777"/>
+          </a:xfrm>
+          <a:prstGeom prst="rect">
+            <a:avLst/>
+          </a:prstGeom>
+          <a:noFill/>
+        </p:spPr>
+        <p:txBody>
+          <a:bodyPr wrap="square" rtlCol="0">
+            <a:spAutoFit/>
+          </a:bodyPr>
+          <a:lstStyle/>
+          <a:p>
+            <a:r>
+              <a:rPr lang="ru-RU" sz="1400" dirty="0">
+                <a:solidFill>
+                  <a:schemeClr val="tx1">
+                    <a:lumMod val="50000"/>
+                    <a:lumOff val="50000"/>
+                  </a:schemeClr>
+                </a:solidFill>
+              </a:rPr>
+              <a:t>Рисунок </a:t>
+            </a:r>
+            <a:r>
+              <a:rPr lang="en-US" sz="1400" dirty="0">
+                <a:solidFill>
+                  <a:schemeClr val="tx1">
+                    <a:lumMod val="50000"/>
+                    <a:lumOff val="50000"/>
+                  </a:schemeClr>
+                </a:solidFill>
+              </a:rPr>
+              <a:t>6</a:t>
+            </a:r>
+            <a:r>
+              <a:rPr lang="ru-RU" sz="1400" dirty="0">
+                <a:solidFill>
+                  <a:schemeClr val="tx1">
+                    <a:lumMod val="50000"/>
+                    <a:lumOff val="50000"/>
+                  </a:schemeClr>
+                </a:solidFill>
+              </a:rPr>
+              <a:t>. </a:t>
+            </a:r>
+            <a:r>
+              <a:rPr lang="en-US" sz="1400" dirty="0">
+                <a:solidFill>
+                  <a:schemeClr val="tx1">
+                    <a:lumMod val="50000"/>
+                    <a:lumOff val="50000"/>
+                  </a:schemeClr>
+                </a:solidFill>
+              </a:rPr>
+              <a:t>Questions </a:t>
+            </a:r>
+            <a:r>
+              <a:rPr lang="ru-RU" sz="1400" dirty="0">
+                <a:solidFill>
+                  <a:schemeClr val="tx1">
+                    <a:lumMod val="50000"/>
+                    <a:lumOff val="50000"/>
+                  </a:schemeClr>
+                </a:solidFill>
+              </a:rPr>
+              <a:t>(источник: unDraw).</a:t>
+            </a:r>
+          </a:p>
+        </p:txBody>
+      </p:sp>
     </p:spTree>
     <p:extLst>
       <p:ext uri="{BB962C8B-B14F-4D97-AF65-F5344CB8AC3E}">
@@ -5000,4 +6509,299 @@
     </a:ext>
   </a:extLst>
 </a:theme>
+</file>
+
+<file path=ppt/theme/theme2.xml><?xml version="1.0" encoding="utf-8"?>
+<a:theme xmlns:a="http://schemas.openxmlformats.org/drawingml/2006/main" name="Office Theme">
+  <a:themeElements>
+    <a:clrScheme name="Office">
+      <a:dk1>
+        <a:sysClr val="windowText" lastClr="000000"/>
+      </a:dk1>
+      <a:lt1>
+        <a:sysClr val="window" lastClr="FFFFFF"/>
+      </a:lt1>
+      <a:dk2>
+        <a:srgbClr val="44546A"/>
+      </a:dk2>
+      <a:lt2>
+        <a:srgbClr val="E7E6E6"/>
+      </a:lt2>
+      <a:accent1>
+        <a:srgbClr val="4472C4"/>
+      </a:accent1>
+      <a:accent2>
+        <a:srgbClr val="ED7D31"/>
+      </a:accent2>
+      <a:accent3>
+        <a:srgbClr val="A5A5A5"/>
+      </a:accent3>
+      <a:accent4>
+        <a:srgbClr val="FFC000"/>
+      </a:accent4>
+      <a:accent5>
+        <a:srgbClr val="5B9BD5"/>
+      </a:accent5>
+      <a:accent6>
+        <a:srgbClr val="70AD47"/>
+      </a:accent6>
+      <a:hlink>
+        <a:srgbClr val="0563C1"/>
+      </a:hlink>
+      <a:folHlink>
+        <a:srgbClr val="954F72"/>
+      </a:folHlink>
+    </a:clrScheme>
+    <a:fontScheme name="Office">
+      <a:majorFont>
+        <a:latin typeface="Calibri Light" panose="020F0302020204030204"/>
+        <a:ea typeface=""/>
+        <a:cs typeface=""/>
+        <a:font script="Jpan" typeface="游ゴシック Light"/>
+        <a:font script="Hang" typeface="맑은 고딕"/>
+        <a:font script="Hans" typeface="等线 Light"/>
+        <a:font script="Hant" typeface="新細明體"/>
+        <a:font script="Arab" typeface="Times New Roman"/>
+        <a:font script="Hebr" typeface="Times New Roman"/>
+        <a:font script="Thai" typeface="Angsana New"/>
+        <a:font script="Ethi" typeface="Nyala"/>
+        <a:font script="Beng" typeface="Vrinda"/>
+        <a:font script="Gujr" typeface="Shruti"/>
+        <a:font script="Khmr" typeface="MoolBoran"/>
+        <a:font script="Knda" typeface="Tunga"/>
+        <a:font script="Guru" typeface="Raavi"/>
+        <a:font script="Cans" typeface="Euphemia"/>
+        <a:font script="Cher" typeface="Plantagenet Cherokee"/>
+        <a:font script="Yiii" typeface="Microsoft Yi Baiti"/>
+        <a:font script="Tibt" typeface="Microsoft Himalaya"/>
+        <a:font script="Thaa" typeface="MV Boli"/>
+        <a:font script="Deva" typeface="Mangal"/>
+        <a:font script="Telu" typeface="Gautami"/>
+        <a:font script="Taml" typeface="Latha"/>
+        <a:font script="Syrc" typeface="Estrangelo Edessa"/>
+        <a:font script="Orya" typeface="Kalinga"/>
+        <a:font script="Mlym" typeface="Kartika"/>
+        <a:font script="Laoo" typeface="DokChampa"/>
+        <a:font script="Sinh" typeface="Iskoola Pota"/>
+        <a:font script="Mong" typeface="Mongolian Baiti"/>
+        <a:font script="Viet" typeface="Times New Roman"/>
+        <a:font script="Uigh" typeface="Microsoft Uighur"/>
+        <a:font script="Geor" typeface="Sylfaen"/>
+        <a:font script="Armn" typeface="Arial"/>
+        <a:font script="Bugi" typeface="Leelawadee UI"/>
+        <a:font script="Bopo" typeface="Microsoft JhengHei"/>
+        <a:font script="Java" typeface="Javanese Text"/>
+        <a:font script="Lisu" typeface="Segoe UI"/>
+        <a:font script="Mymr" typeface="Myanmar Text"/>
+        <a:font script="Nkoo" typeface="Ebrima"/>
+        <a:font script="Olck" typeface="Nirmala UI"/>
+        <a:font script="Osma" typeface="Ebrima"/>
+        <a:font script="Phag" typeface="Phagspa"/>
+        <a:font script="Syrn" typeface="Estrangelo Edessa"/>
+        <a:font script="Syrj" typeface="Estrangelo Edessa"/>
+        <a:font script="Syre" typeface="Estrangelo Edessa"/>
+        <a:font script="Sora" typeface="Nirmala UI"/>
+        <a:font script="Tale" typeface="Microsoft Tai Le"/>
+        <a:font script="Talu" typeface="Microsoft New Tai Lue"/>
+        <a:font script="Tfng" typeface="Ebrima"/>
+      </a:majorFont>
+      <a:minorFont>
+        <a:latin typeface="Calibri" panose="020F0502020204030204"/>
+        <a:ea typeface=""/>
+        <a:cs typeface=""/>
+        <a:font script="Jpan" typeface="游ゴシック"/>
+        <a:font script="Hang" typeface="맑은 고딕"/>
+        <a:font script="Hans" typeface="等线"/>
+        <a:font script="Hant" typeface="新細明體"/>
+        <a:font script="Arab" typeface="Arial"/>
+        <a:font script="Hebr" typeface="Arial"/>
+        <a:font script="Thai" typeface="Cordia New"/>
+        <a:font script="Ethi" typeface="Nyala"/>
+        <a:font script="Beng" typeface="Vrinda"/>
+        <a:font script="Gujr" typeface="Shruti"/>
+        <a:font script="Khmr" typeface="DaunPenh"/>
+        <a:font script="Knda" typeface="Tunga"/>
+        <a:font script="Guru" typeface="Raavi"/>
+        <a:font script="Cans" typeface="Euphemia"/>
+        <a:font script="Cher" typeface="Plantagenet Cherokee"/>
+        <a:font script="Yiii" typeface="Microsoft Yi Baiti"/>
+        <a:font script="Tibt" typeface="Microsoft Himalaya"/>
+        <a:font script="Thaa" typeface="MV Boli"/>
+        <a:font script="Deva" typeface="Mangal"/>
+        <a:font script="Telu" typeface="Gautami"/>
+        <a:font script="Taml" typeface="Latha"/>
+        <a:font script="Syrc" typeface="Estrangelo Edessa"/>
+        <a:font script="Orya" typeface="Kalinga"/>
+        <a:font script="Mlym" typeface="Kartika"/>
+        <a:font script="Laoo" typeface="DokChampa"/>
+        <a:font script="Sinh" typeface="Iskoola Pota"/>
+        <a:font script="Mong" typeface="Mongolian Baiti"/>
+        <a:font script="Viet" typeface="Arial"/>
+        <a:font script="Uigh" typeface="Microsoft Uighur"/>
+        <a:font script="Geor" typeface="Sylfaen"/>
+        <a:font script="Armn" typeface="Arial"/>
+        <a:font script="Bugi" typeface="Leelawadee UI"/>
+        <a:font script="Bopo" typeface="Microsoft JhengHei"/>
+        <a:font script="Java" typeface="Javanese Text"/>
+        <a:font script="Lisu" typeface="Segoe UI"/>
+        <a:font script="Mymr" typeface="Myanmar Text"/>
+        <a:font script="Nkoo" typeface="Ebrima"/>
+        <a:font script="Olck" typeface="Nirmala UI"/>
+        <a:font script="Osma" typeface="Ebrima"/>
+        <a:font script="Phag" typeface="Phagspa"/>
+        <a:font script="Syrn" typeface="Estrangelo Edessa"/>
+        <a:font script="Syrj" typeface="Estrangelo Edessa"/>
+        <a:font script="Syre" typeface="Estrangelo Edessa"/>
+        <a:font script="Sora" typeface="Nirmala UI"/>
+        <a:font script="Tale" typeface="Microsoft Tai Le"/>
+        <a:font script="Talu" typeface="Microsoft New Tai Lue"/>
+        <a:font script="Tfng" typeface="Ebrima"/>
+      </a:minorFont>
+    </a:fontScheme>
+    <a:fmtScheme name="Office">
+      <a:fillStyleLst>
+        <a:solidFill>
+          <a:schemeClr val="phClr"/>
+        </a:solidFill>
+        <a:gradFill rotWithShape="1">
+          <a:gsLst>
+            <a:gs pos="0">
+              <a:schemeClr val="phClr">
+                <a:lumMod val="110000"/>
+                <a:satMod val="105000"/>
+                <a:tint val="67000"/>
+              </a:schemeClr>
+            </a:gs>
+            <a:gs pos="50000">
+              <a:schemeClr val="phClr">
+                <a:lumMod val="105000"/>
+                <a:satMod val="103000"/>
+                <a:tint val="73000"/>
+              </a:schemeClr>
+            </a:gs>
+            <a:gs pos="100000">
+              <a:schemeClr val="phClr">
+                <a:lumMod val="105000"/>
+                <a:satMod val="109000"/>
+                <a:tint val="81000"/>
+              </a:schemeClr>
+            </a:gs>
+          </a:gsLst>
+          <a:lin ang="5400000" scaled="0"/>
+        </a:gradFill>
+        <a:gradFill rotWithShape="1">
+          <a:gsLst>
+            <a:gs pos="0">
+              <a:schemeClr val="phClr">
+                <a:satMod val="103000"/>
+                <a:lumMod val="102000"/>
+                <a:tint val="94000"/>
+              </a:schemeClr>
+            </a:gs>
+            <a:gs pos="50000">
+              <a:schemeClr val="phClr">
+                <a:satMod val="110000"/>
+                <a:lumMod val="100000"/>
+                <a:shade val="100000"/>
+              </a:schemeClr>
+            </a:gs>
+            <a:gs pos="100000">
+              <a:schemeClr val="phClr">
+                <a:lumMod val="99000"/>
+                <a:satMod val="120000"/>
+                <a:shade val="78000"/>
+              </a:schemeClr>
+            </a:gs>
+          </a:gsLst>
+          <a:lin ang="5400000" scaled="0"/>
+        </a:gradFill>
+      </a:fillStyleLst>
+      <a:lnStyleLst>
+        <a:ln w="6350" cap="flat" cmpd="sng" algn="ctr">
+          <a:solidFill>
+            <a:schemeClr val="phClr"/>
+          </a:solidFill>
+          <a:prstDash val="solid"/>
+          <a:miter lim="800000"/>
+        </a:ln>
+        <a:ln w="12700" cap="flat" cmpd="sng" algn="ctr">
+          <a:solidFill>
+            <a:schemeClr val="phClr"/>
+          </a:solidFill>
+          <a:prstDash val="solid"/>
+          <a:miter lim="800000"/>
+        </a:ln>
+        <a:ln w="19050" cap="flat" cmpd="sng" algn="ctr">
+          <a:solidFill>
+            <a:schemeClr val="phClr"/>
+          </a:solidFill>
+          <a:prstDash val="solid"/>
+          <a:miter lim="800000"/>
+        </a:ln>
+      </a:lnStyleLst>
+      <a:effectStyleLst>
+        <a:effectStyle>
+          <a:effectLst/>
+        </a:effectStyle>
+        <a:effectStyle>
+          <a:effectLst/>
+        </a:effectStyle>
+        <a:effectStyle>
+          <a:effectLst>
+            <a:outerShdw blurRad="57150" dist="19050" dir="5400000" algn="ctr" rotWithShape="0">
+              <a:srgbClr val="000000">
+                <a:alpha val="63000"/>
+              </a:srgbClr>
+            </a:outerShdw>
+          </a:effectLst>
+        </a:effectStyle>
+      </a:effectStyleLst>
+      <a:bgFillStyleLst>
+        <a:solidFill>
+          <a:schemeClr val="phClr"/>
+        </a:solidFill>
+        <a:solidFill>
+          <a:schemeClr val="phClr">
+            <a:tint val="95000"/>
+            <a:satMod val="170000"/>
+          </a:schemeClr>
+        </a:solidFill>
+        <a:gradFill rotWithShape="1">
+          <a:gsLst>
+            <a:gs pos="0">
+              <a:schemeClr val="phClr">
+                <a:tint val="93000"/>
+                <a:satMod val="150000"/>
+                <a:shade val="98000"/>
+                <a:lumMod val="102000"/>
+              </a:schemeClr>
+            </a:gs>
+            <a:gs pos="50000">
+              <a:schemeClr val="phClr">
+                <a:tint val="98000"/>
+                <a:satMod val="130000"/>
+                <a:shade val="90000"/>
+                <a:lumMod val="103000"/>
+              </a:schemeClr>
+            </a:gs>
+            <a:gs pos="100000">
+              <a:schemeClr val="phClr">
+                <a:shade val="63000"/>
+                <a:satMod val="120000"/>
+              </a:schemeClr>
+            </a:gs>
+          </a:gsLst>
+          <a:lin ang="5400000" scaled="0"/>
+        </a:gradFill>
+      </a:bgFillStyleLst>
+    </a:fmtScheme>
+  </a:themeElements>
+  <a:objectDefaults/>
+  <a:extraClrSchemeLst/>
+  <a:extLst>
+    <a:ext uri="{05A4C25C-085E-4340-85A3-A5531E510DB2}">
+      <thm15:themeFamily xmlns:thm15="http://schemas.microsoft.com/office/thememl/2012/main" name="Office Theme" id="{62F939B6-93AF-4DB8-9C6B-D6C7DFDC589F}" vid="{4A3C46E8-61CC-4603-A589-7422A47A8E4A}"/>
+    </a:ext>
+  </a:extLst>
+</a:theme>
 </file>
--- a/Presentations of Bachelor's theses.pptx
+++ b/Presentations of Bachelor's theses.pptx
@@ -4184,17 +4184,28 @@
           </a:bodyPr>
           <a:lstStyle/>
           <a:p>
+            <a:pPr marL="0" indent="0">
+              <a:buNone/>
+            </a:pPr>
             <a:r>
               <a:rPr lang="ru-RU" dirty="0"/>
               <a:t>unDraw. (n.d.). </a:t>
             </a:r>
             <a:r>
+              <a:rPr lang="en-US" i="1" dirty="0"/>
+              <a:t>Goals</a:t>
+            </a:r>
+            <a:r>
               <a:rPr lang="en-US" dirty="0"/>
-              <a:t>Process </a:t>
+              <a:t> </a:t>
             </a:r>
             <a:r>
               <a:rPr lang="ru-RU" dirty="0"/>
-              <a:t>[Иллюстрация]. </a:t>
+              <a:t>[Иллюстрация].</a:t>
+            </a:r>
+            <a:r>
+              <a:rPr lang="en-US" dirty="0"/>
+              <a:t> </a:t>
             </a:r>
             <a:r>
               <a:rPr lang="en-US" dirty="0">
@@ -4206,26 +4217,29 @@
                   </a:extLst>
                 </a:hlinkClick>
               </a:rPr>
-              <a:t>https://undraw.co/search/questions</a:t>
+              <a:t>https://undraw.co/search/goals</a:t>
             </a:r>
             <a:endParaRPr lang="en-US" dirty="0"/>
           </a:p>
           <a:p>
+            <a:pPr marL="0" indent="0">
+              <a:buNone/>
+            </a:pPr>
             <a:r>
               <a:rPr lang="ru-RU" dirty="0"/>
               <a:t>unDraw. (n.d.). </a:t>
             </a:r>
             <a:r>
-              <a:rPr lang="en-US" dirty="0"/>
-              <a:t>Goals </a:t>
-            </a:r>
-            <a:r>
-              <a:rPr lang="ru-RU" dirty="0"/>
-              <a:t>[Иллюстрация].</a:t>
+              <a:rPr lang="en-US" i="1" dirty="0"/>
+              <a:t>Process</a:t>
             </a:r>
             <a:r>
               <a:rPr lang="en-US" dirty="0"/>
               <a:t> </a:t>
+            </a:r>
+            <a:r>
+              <a:rPr lang="ru-RU" dirty="0"/>
+              <a:t>[Иллюстрация]. </a:t>
             </a:r>
             <a:r>
               <a:rPr lang="en-US" dirty="0">
@@ -4237,18 +4251,71 @@
                   </a:extLst>
                 </a:hlinkClick>
               </a:rPr>
-              <a:t>https://undraw.co/search/goals</a:t>
+              <a:t>https://undraw.co/search/questions</a:t>
             </a:r>
             <a:endParaRPr lang="en-US" dirty="0"/>
           </a:p>
           <a:p>
+            <a:pPr marL="0" indent="0">
+              <a:buNone/>
+            </a:pPr>
             <a:r>
               <a:rPr lang="ru-RU" dirty="0"/>
               <a:t>unDraw. (n.d.). </a:t>
             </a:r>
             <a:r>
+              <a:rPr lang="en-US" i="1" dirty="0"/>
+              <a:t>Questions</a:t>
+            </a:r>
+            <a:r>
               <a:rPr lang="en-US" dirty="0"/>
-              <a:t>Visual Data </a:t>
+              <a:t> </a:t>
+            </a:r>
+            <a:r>
+              <a:rPr lang="ru-RU" dirty="0"/>
+              <a:t>[Иллюстрация].</a:t>
+            </a:r>
+            <a:r>
+              <a:rPr lang="en-US" dirty="0"/>
+              <a:t> </a:t>
+            </a:r>
+            <a:r>
+              <a:rPr lang="en-US" dirty="0">
+                <a:hlinkClick r:id="rId3">
+                  <a:extLst>
+                    <a:ext uri="{A12FA001-AC4F-418D-AE19-62706E023703}">
+                      <ahyp:hlinkClr xmlns:ahyp="http://schemas.microsoft.com/office/drawing/2018/hyperlinkcolor" val="tx"/>
+                    </a:ext>
+                  </a:extLst>
+                </a:hlinkClick>
+              </a:rPr>
+              <a:t>https://undraw.co/search/questions</a:t>
+            </a:r>
+            <a:endParaRPr lang="en-US" dirty="0"/>
+          </a:p>
+          <a:p>
+            <a:pPr marL="0" indent="0">
+              <a:buNone/>
+            </a:pPr>
+            <a:r>
+              <a:rPr lang="ru-RU" dirty="0"/>
+              <a:t>unDraw. (n.d.). </a:t>
+            </a:r>
+            <a:r>
+              <a:rPr lang="en-US" i="1" dirty="0"/>
+              <a:t>Visual</a:t>
+            </a:r>
+            <a:r>
+              <a:rPr lang="en-US" dirty="0"/>
+              <a:t> </a:t>
+            </a:r>
+            <a:r>
+              <a:rPr lang="en-US" i="1" dirty="0"/>
+              <a:t>Data</a:t>
+            </a:r>
+            <a:r>
+              <a:rPr lang="en-US" dirty="0"/>
+              <a:t> </a:t>
             </a:r>
             <a:r>
               <a:rPr lang="ru-RU" dirty="0"/>
@@ -4273,55 +4340,52 @@
             <a:endParaRPr lang="en-US" dirty="0"/>
           </a:p>
           <a:p>
+            <a:endParaRPr lang="en-US" dirty="0"/>
+          </a:p>
+          <a:p>
+            <a:pPr marL="0" indent="0">
+              <a:buNone/>
+            </a:pPr>
             <a:r>
               <a:rPr lang="ru-RU" dirty="0"/>
-              <a:t>unDraw. (n.d.). </a:t>
-            </a:r>
-            <a:r>
-              <a:rPr lang="en-US" dirty="0"/>
-              <a:t>Questions </a:t>
-            </a:r>
-            <a:r>
-              <a:rPr lang="ru-RU" dirty="0"/>
-              <a:t>[Иллюстрация].</a:t>
+              <a:t>Авторские материалы: </a:t>
+            </a:r>
+          </a:p>
+          <a:p>
+            <a:pPr marL="0" indent="0">
+              <a:buNone/>
+            </a:pPr>
+            <a:r>
+              <a:rPr lang="en-US" i="1" dirty="0"/>
+              <a:t>Mobile</a:t>
             </a:r>
             <a:r>
               <a:rPr lang="en-US" dirty="0"/>
               <a:t> </a:t>
             </a:r>
             <a:r>
-              <a:rPr lang="en-US" dirty="0">
-                <a:hlinkClick r:id="rId2">
-                  <a:extLst>
-                    <a:ext uri="{A12FA001-AC4F-418D-AE19-62706E023703}">
-                      <ahyp:hlinkClr xmlns:ahyp="http://schemas.microsoft.com/office/drawing/2018/hyperlinkcolor" val="tx"/>
-                    </a:ext>
-                  </a:extLst>
-                </a:hlinkClick>
-              </a:rPr>
-              <a:t>https://undraw.co/search/questions</a:t>
-            </a:r>
-            <a:endParaRPr lang="en-US" dirty="0"/>
-          </a:p>
-          <a:p>
-            <a:endParaRPr lang="en-US" dirty="0"/>
-          </a:p>
-          <a:p>
-            <a:pPr marL="0" indent="0">
-              <a:buNone/>
-            </a:pPr>
-            <a:r>
-              <a:rPr lang="ru-RU" dirty="0"/>
-              <a:t>Авторские материалы: </a:t>
-            </a:r>
-          </a:p>
-          <a:p>
-            <a:pPr marL="514350" indent="-514350">
-              <a:buAutoNum type="arabicPeriod"/>
-            </a:pPr>
+              <a:rPr lang="en-US" i="1" dirty="0"/>
+              <a:t>Development</a:t>
+            </a:r>
             <a:r>
               <a:rPr lang="en-US" dirty="0"/>
-              <a:t>Mobile Development Stack Dashboard [</a:t>
+              <a:t> </a:t>
+            </a:r>
+            <a:r>
+              <a:rPr lang="en-US" i="1" dirty="0"/>
+              <a:t>Stack</a:t>
+            </a:r>
+            <a:r>
+              <a:rPr lang="en-US" dirty="0"/>
+              <a:t> </a:t>
+            </a:r>
+            <a:r>
+              <a:rPr lang="en-US" i="1" dirty="0"/>
+              <a:t>Dashboard</a:t>
+            </a:r>
+            <a:r>
+              <a:rPr lang="en-US" dirty="0"/>
+              <a:t> [</a:t>
             </a:r>
             <a:r>
               <a:rPr lang="en-US" dirty="0" err="1"/>
@@ -4346,11 +4410,11 @@
             <a:endParaRPr lang="en-US" u="sng" dirty="0"/>
           </a:p>
           <a:p>
-            <a:pPr marL="514350" indent="-514350">
-              <a:buAutoNum type="arabicPeriod"/>
+            <a:pPr marL="0" indent="0">
+              <a:buNone/>
             </a:pPr>
             <a:r>
-              <a:rPr lang="ru-RU" dirty="0"/>
+              <a:rPr lang="ru-RU" i="1" dirty="0"/>
               <a:t>Методология</a:t>
             </a:r>
             <a:r>

--- a/Presentations of Bachelor's theses.pptx
+++ b/Presentations of Bachelor's theses.pptx
@@ -5,19 +5,20 @@
     <p:sldMasterId id="2147483648" r:id="rId1"/>
   </p:sldMasterIdLst>
   <p:notesMasterIdLst>
-    <p:notesMasterId r:id="rId12"/>
+    <p:notesMasterId r:id="rId13"/>
   </p:notesMasterIdLst>
   <p:sldIdLst>
     <p:sldId id="258" r:id="rId2"/>
     <p:sldId id="259" r:id="rId3"/>
     <p:sldId id="257" r:id="rId4"/>
-    <p:sldId id="260" r:id="rId5"/>
-    <p:sldId id="267" r:id="rId6"/>
-    <p:sldId id="262" r:id="rId7"/>
-    <p:sldId id="264" r:id="rId8"/>
-    <p:sldId id="266" r:id="rId9"/>
-    <p:sldId id="265" r:id="rId10"/>
-    <p:sldId id="268" r:id="rId11"/>
+    <p:sldId id="270" r:id="rId5"/>
+    <p:sldId id="260" r:id="rId6"/>
+    <p:sldId id="267" r:id="rId7"/>
+    <p:sldId id="262" r:id="rId8"/>
+    <p:sldId id="264" r:id="rId9"/>
+    <p:sldId id="268" r:id="rId10"/>
+    <p:sldId id="266" r:id="rId11"/>
+    <p:sldId id="265" r:id="rId12"/>
   </p:sldIdLst>
   <p:sldSz cx="12192000" cy="6858000"/>
   <p:notesSz cx="6858000" cy="9144000"/>
@@ -206,7 +207,7 @@
           <a:p>
             <a:fld id="{D4779A6A-4B5B-4880-8428-24B39EC00E81}" type="datetimeFigureOut">
               <a:rPr lang="ru-RU" smtClean="0"/>
-              <a:t>02.12.2025</a:t>
+              <a:t>09.12.2025</a:t>
             </a:fld>
             <a:endParaRPr lang="ru-RU"/>
           </a:p>
@@ -630,7 +631,7 @@
           <a:p>
             <a:fld id="{E22A60B0-D09F-4AED-B56C-532287473990}" type="slidenum">
               <a:rPr lang="ru-RU" smtClean="0"/>
-              <a:t>7</a:t>
+              <a:t>8</a:t>
             </a:fld>
             <a:endParaRPr lang="ru-RU"/>
           </a:p>
@@ -798,7 +799,7 @@
           <a:p>
             <a:fld id="{E9846F43-F1B2-4AEE-B1BF-466D06853D46}" type="datetimeFigureOut">
               <a:rPr lang="ru-RU" smtClean="0"/>
-              <a:t>02.12.2025</a:t>
+              <a:t>09.12.2025</a:t>
             </a:fld>
             <a:endParaRPr lang="ru-RU"/>
           </a:p>
@@ -998,7 +999,7 @@
           <a:p>
             <a:fld id="{E9846F43-F1B2-4AEE-B1BF-466D06853D46}" type="datetimeFigureOut">
               <a:rPr lang="ru-RU" smtClean="0"/>
-              <a:t>02.12.2025</a:t>
+              <a:t>09.12.2025</a:t>
             </a:fld>
             <a:endParaRPr lang="ru-RU"/>
           </a:p>
@@ -1208,7 +1209,7 @@
           <a:p>
             <a:fld id="{E9846F43-F1B2-4AEE-B1BF-466D06853D46}" type="datetimeFigureOut">
               <a:rPr lang="ru-RU" smtClean="0"/>
-              <a:t>02.12.2025</a:t>
+              <a:t>09.12.2025</a:t>
             </a:fld>
             <a:endParaRPr lang="ru-RU"/>
           </a:p>
@@ -1408,7 +1409,7 @@
           <a:p>
             <a:fld id="{E9846F43-F1B2-4AEE-B1BF-466D06853D46}" type="datetimeFigureOut">
               <a:rPr lang="ru-RU" smtClean="0"/>
-              <a:t>02.12.2025</a:t>
+              <a:t>09.12.2025</a:t>
             </a:fld>
             <a:endParaRPr lang="ru-RU"/>
           </a:p>
@@ -1684,7 +1685,7 @@
           <a:p>
             <a:fld id="{E9846F43-F1B2-4AEE-B1BF-466D06853D46}" type="datetimeFigureOut">
               <a:rPr lang="ru-RU" smtClean="0"/>
-              <a:t>02.12.2025</a:t>
+              <a:t>09.12.2025</a:t>
             </a:fld>
             <a:endParaRPr lang="ru-RU"/>
           </a:p>
@@ -1952,7 +1953,7 @@
           <a:p>
             <a:fld id="{E9846F43-F1B2-4AEE-B1BF-466D06853D46}" type="datetimeFigureOut">
               <a:rPr lang="ru-RU" smtClean="0"/>
-              <a:t>02.12.2025</a:t>
+              <a:t>09.12.2025</a:t>
             </a:fld>
             <a:endParaRPr lang="ru-RU"/>
           </a:p>
@@ -2367,7 +2368,7 @@
           <a:p>
             <a:fld id="{E9846F43-F1B2-4AEE-B1BF-466D06853D46}" type="datetimeFigureOut">
               <a:rPr lang="ru-RU" smtClean="0"/>
-              <a:t>02.12.2025</a:t>
+              <a:t>09.12.2025</a:t>
             </a:fld>
             <a:endParaRPr lang="ru-RU"/>
           </a:p>
@@ -2509,7 +2510,7 @@
           <a:p>
             <a:fld id="{E9846F43-F1B2-4AEE-B1BF-466D06853D46}" type="datetimeFigureOut">
               <a:rPr lang="ru-RU" smtClean="0"/>
-              <a:t>02.12.2025</a:t>
+              <a:t>09.12.2025</a:t>
             </a:fld>
             <a:endParaRPr lang="ru-RU"/>
           </a:p>
@@ -2622,7 +2623,7 @@
           <a:p>
             <a:fld id="{E9846F43-F1B2-4AEE-B1BF-466D06853D46}" type="datetimeFigureOut">
               <a:rPr lang="ru-RU" smtClean="0"/>
-              <a:t>02.12.2025</a:t>
+              <a:t>09.12.2025</a:t>
             </a:fld>
             <a:endParaRPr lang="ru-RU"/>
           </a:p>
@@ -2935,7 +2936,7 @@
           <a:p>
             <a:fld id="{E9846F43-F1B2-4AEE-B1BF-466D06853D46}" type="datetimeFigureOut">
               <a:rPr lang="ru-RU" smtClean="0"/>
-              <a:t>02.12.2025</a:t>
+              <a:t>09.12.2025</a:t>
             </a:fld>
             <a:endParaRPr lang="ru-RU"/>
           </a:p>
@@ -3224,7 +3225,7 @@
           <a:p>
             <a:fld id="{E9846F43-F1B2-4AEE-B1BF-466D06853D46}" type="datetimeFigureOut">
               <a:rPr lang="ru-RU" smtClean="0"/>
-              <a:t>02.12.2025</a:t>
+              <a:t>09.12.2025</a:t>
             </a:fld>
             <a:endParaRPr lang="ru-RU"/>
           </a:p>
@@ -3467,7 +3468,7 @@
           <a:p>
             <a:fld id="{E9846F43-F1B2-4AEE-B1BF-466D06853D46}" type="datetimeFigureOut">
               <a:rPr lang="ru-RU" smtClean="0"/>
-              <a:t>02.12.2025</a:t>
+              <a:t>09.12.2025</a:t>
             </a:fld>
             <a:endParaRPr lang="ru-RU"/>
           </a:p>
@@ -4138,15 +4139,15 @@
           <p:cNvPr id="2" name="Title 1">
             <a:extLst>
               <a:ext uri="{FF2B5EF4-FFF2-40B4-BE49-F238E27FC236}">
-                <a16:creationId xmlns:a16="http://schemas.microsoft.com/office/drawing/2014/main" id="{C310D019-DF5D-FE77-908B-6B425EFCDDE0}"/>
-              </a:ext>
-            </a:extLst>
-          </p:cNvPr>
-          <p:cNvSpPr>
-            <a:spLocks noGrp="1"/>
-          </p:cNvSpPr>
-          <p:nvPr>
-            <p:ph type="title"/>
+                <a16:creationId xmlns:a16="http://schemas.microsoft.com/office/drawing/2014/main" id="{847D6EE1-6D2F-9E32-9EC1-EE212D09B274}"/>
+              </a:ext>
+            </a:extLst>
+          </p:cNvPr>
+          <p:cNvSpPr>
+            <a:spLocks noGrp="1"/>
+          </p:cNvSpPr>
+          <p:nvPr>
+            <p:ph type="ctrTitle"/>
           </p:nvPr>
         </p:nvSpPr>
         <p:spPr/>
@@ -4156,299 +4157,493 @@
           <a:p>
             <a:r>
               <a:rPr lang="ru-RU" dirty="0"/>
-              <a:t>Ссылки на источники</a:t>
-            </a:r>
-          </a:p>
-        </p:txBody>
-      </p:sp>
-      <p:sp>
-        <p:nvSpPr>
-          <p:cNvPr id="3" name="Content Placeholder 2">
-            <a:extLst>
-              <a:ext uri="{FF2B5EF4-FFF2-40B4-BE49-F238E27FC236}">
-                <a16:creationId xmlns:a16="http://schemas.microsoft.com/office/drawing/2014/main" id="{2FD37D67-1AEE-44BD-42A0-2D3EC9B15E33}"/>
-              </a:ext>
-            </a:extLst>
-          </p:cNvPr>
-          <p:cNvSpPr>
-            <a:spLocks noGrp="1"/>
-          </p:cNvSpPr>
-          <p:nvPr>
-            <p:ph idx="1"/>
+              <a:t>Спасибо за внимание</a:t>
+            </a:r>
+          </a:p>
+        </p:txBody>
+      </p:sp>
+      <p:sp>
+        <p:nvSpPr>
+          <p:cNvPr id="4" name="Subtitle 3">
+            <a:extLst>
+              <a:ext uri="{FF2B5EF4-FFF2-40B4-BE49-F238E27FC236}">
+                <a16:creationId xmlns:a16="http://schemas.microsoft.com/office/drawing/2014/main" id="{9C58F630-B371-2B29-97B2-5932BEE916D2}"/>
+              </a:ext>
+            </a:extLst>
+          </p:cNvPr>
+          <p:cNvSpPr>
+            <a:spLocks noGrp="1"/>
+          </p:cNvSpPr>
+          <p:nvPr>
+            <p:ph type="subTitle" idx="1"/>
           </p:nvPr>
         </p:nvSpPr>
         <p:spPr/>
         <p:txBody>
-          <a:bodyPr>
-            <a:normAutofit fontScale="85000" lnSpcReduction="10000"/>
-          </a:bodyPr>
-          <a:lstStyle/>
-          <a:p>
-            <a:pPr marL="0" indent="0">
-              <a:buNone/>
-            </a:pPr>
+          <a:bodyPr/>
+          <a:lstStyle/>
+          <a:p>
             <a:r>
               <a:rPr lang="ru-RU" dirty="0"/>
-              <a:t>unDraw. (n.d.). </a:t>
-            </a:r>
-            <a:r>
-              <a:rPr lang="en-US" i="1" dirty="0"/>
-              <a:t>Goals</a:t>
-            </a:r>
-            <a:r>
-              <a:rPr lang="en-US" dirty="0"/>
               <a:t> </a:t>
             </a:r>
-            <a:r>
-              <a:rPr lang="ru-RU" dirty="0"/>
-              <a:t>[Иллюстрация].</a:t>
-            </a:r>
-            <a:r>
-              <a:rPr lang="en-US" dirty="0"/>
-              <a:t> </a:t>
-            </a:r>
-            <a:r>
-              <a:rPr lang="en-US" dirty="0">
-                <a:hlinkClick r:id="rId2">
-                  <a:extLst>
-                    <a:ext uri="{A12FA001-AC4F-418D-AE19-62706E023703}">
-                      <ahyp:hlinkClr xmlns:ahyp="http://schemas.microsoft.com/office/drawing/2018/hyperlinkcolor" val="tx"/>
-                    </a:ext>
-                  </a:extLst>
-                </a:hlinkClick>
-              </a:rPr>
-              <a:t>https://undraw.co/search/goals</a:t>
-            </a:r>
-            <a:endParaRPr lang="en-US" dirty="0"/>
-          </a:p>
-          <a:p>
-            <a:pPr marL="0" indent="0">
-              <a:buNone/>
-            </a:pPr>
-            <a:r>
-              <a:rPr lang="ru-RU" dirty="0"/>
-              <a:t>unDraw. (n.d.). </a:t>
-            </a:r>
-            <a:r>
-              <a:rPr lang="en-US" i="1" dirty="0"/>
-              <a:t>Process</a:t>
-            </a:r>
-            <a:r>
-              <a:rPr lang="en-US" dirty="0"/>
-              <a:t> </a:t>
-            </a:r>
-            <a:r>
-              <a:rPr lang="ru-RU" dirty="0"/>
-              <a:t>[Иллюстрация]. </a:t>
-            </a:r>
-            <a:r>
-              <a:rPr lang="en-US" dirty="0">
-                <a:hlinkClick r:id="rId3">
-                  <a:extLst>
-                    <a:ext uri="{A12FA001-AC4F-418D-AE19-62706E023703}">
-                      <ahyp:hlinkClr xmlns:ahyp="http://schemas.microsoft.com/office/drawing/2018/hyperlinkcolor" val="tx"/>
-                    </a:ext>
-                  </a:extLst>
-                </a:hlinkClick>
-              </a:rPr>
-              <a:t>https://undraw.co/search/questions</a:t>
-            </a:r>
-            <a:endParaRPr lang="en-US" dirty="0"/>
-          </a:p>
-          <a:p>
-            <a:pPr marL="0" indent="0">
-              <a:buNone/>
-            </a:pPr>
-            <a:r>
-              <a:rPr lang="ru-RU" dirty="0"/>
-              <a:t>unDraw. (n.d.). </a:t>
-            </a:r>
-            <a:r>
-              <a:rPr lang="en-US" i="1" dirty="0"/>
-              <a:t>Questions</a:t>
-            </a:r>
-            <a:r>
-              <a:rPr lang="en-US" dirty="0"/>
-              <a:t> </a:t>
-            </a:r>
-            <a:r>
-              <a:rPr lang="ru-RU" dirty="0"/>
-              <a:t>[Иллюстрация].</a:t>
-            </a:r>
-            <a:r>
-              <a:rPr lang="en-US" dirty="0"/>
-              <a:t> </a:t>
-            </a:r>
-            <a:r>
-              <a:rPr lang="en-US" dirty="0">
-                <a:hlinkClick r:id="rId3">
-                  <a:extLst>
-                    <a:ext uri="{A12FA001-AC4F-418D-AE19-62706E023703}">
-                      <ahyp:hlinkClr xmlns:ahyp="http://schemas.microsoft.com/office/drawing/2018/hyperlinkcolor" val="tx"/>
-                    </a:ext>
-                  </a:extLst>
-                </a:hlinkClick>
-              </a:rPr>
-              <a:t>https://undraw.co/search/questions</a:t>
-            </a:r>
-            <a:endParaRPr lang="en-US" dirty="0"/>
-          </a:p>
-          <a:p>
-            <a:pPr marL="0" indent="0">
-              <a:buNone/>
-            </a:pPr>
-            <a:r>
-              <a:rPr lang="ru-RU" dirty="0"/>
-              <a:t>unDraw. (n.d.). </a:t>
-            </a:r>
-            <a:r>
-              <a:rPr lang="en-US" i="1" dirty="0"/>
-              <a:t>Visual</a:t>
-            </a:r>
-            <a:r>
-              <a:rPr lang="en-US" dirty="0"/>
-              <a:t> </a:t>
-            </a:r>
-            <a:r>
-              <a:rPr lang="en-US" i="1" dirty="0"/>
-              <a:t>Data</a:t>
-            </a:r>
-            <a:r>
-              <a:rPr lang="en-US" dirty="0"/>
-              <a:t> </a:t>
-            </a:r>
-            <a:r>
-              <a:rPr lang="ru-RU" dirty="0"/>
-              <a:t>[Иллюстрация].</a:t>
-            </a:r>
-            <a:r>
-              <a:rPr lang="en-US" dirty="0"/>
-              <a:t> </a:t>
-            </a:r>
-            <a:r>
-              <a:rPr lang="en-US" dirty="0">
-                <a:hlinkClick r:id="rId4">
-                  <a:extLst>
-                    <a:ext uri="{A12FA001-AC4F-418D-AE19-62706E023703}">
-                      <ahyp:hlinkClr xmlns:ahyp="http://schemas.microsoft.com/office/drawing/2018/hyperlinkcolor" val="tx"/>
-                    </a:ext>
-                  </a:extLst>
-                </a:hlinkClick>
-              </a:rPr>
-              <a:t>https://undraw.co/search/visual-data</a:t>
-            </a:r>
-            <a:endParaRPr lang="en-US" dirty="0"/>
-          </a:p>
-          <a:p>
-            <a:endParaRPr lang="en-US" dirty="0"/>
-          </a:p>
-          <a:p>
-            <a:pPr marL="0" indent="0">
-              <a:buNone/>
-            </a:pPr>
-            <a:r>
-              <a:rPr lang="ru-RU" dirty="0"/>
-              <a:t>Авторские материалы: </a:t>
-            </a:r>
-          </a:p>
-          <a:p>
-            <a:pPr marL="0" indent="0">
-              <a:buNone/>
-            </a:pPr>
-            <a:r>
-              <a:rPr lang="en-US" i="1" dirty="0"/>
-              <a:t>Mobile</a:t>
-            </a:r>
-            <a:r>
-              <a:rPr lang="en-US" dirty="0"/>
-              <a:t> </a:t>
-            </a:r>
-            <a:r>
-              <a:rPr lang="en-US" i="1" dirty="0"/>
-              <a:t>Development</a:t>
-            </a:r>
-            <a:r>
-              <a:rPr lang="en-US" dirty="0"/>
-              <a:t> </a:t>
-            </a:r>
-            <a:r>
-              <a:rPr lang="en-US" i="1" dirty="0"/>
-              <a:t>Stack</a:t>
-            </a:r>
-            <a:r>
-              <a:rPr lang="en-US" dirty="0"/>
-              <a:t> </a:t>
-            </a:r>
-            <a:r>
-              <a:rPr lang="en-US" i="1" dirty="0"/>
-              <a:t>Dashboard</a:t>
-            </a:r>
-            <a:r>
-              <a:rPr lang="en-US" dirty="0"/>
-              <a:t> [</a:t>
-            </a:r>
-            <a:r>
-              <a:rPr lang="en-US" dirty="0" err="1"/>
-              <a:t>Дашборд</a:t>
-            </a:r>
-            <a:r>
-              <a:rPr lang="en-US" dirty="0"/>
-              <a:t> Tableau]. </a:t>
-            </a:r>
-            <a:r>
-              <a:rPr lang="en-US" u="sng" dirty="0">
-                <a:hlinkClick r:id="rId5">
-                  <a:extLst>
-                    <a:ext uri="{A12FA001-AC4F-418D-AE19-62706E023703}">
-                      <ahyp:hlinkClr xmlns:ahyp="http://schemas.microsoft.com/office/drawing/2018/hyperlinkcolor" val="tx"/>
-                    </a:ext>
-                  </a:extLst>
-                </a:hlinkClick>
-              </a:rPr>
-              <a:t>https://public.tableau.com/app/profile/ivan.ireev/viz/mobile_development_stack_dashboard/Dashboard1</a:t>
-            </a:r>
-            <a:endParaRPr lang="en-US" u="sng" dirty="0"/>
-          </a:p>
-          <a:p>
-            <a:pPr marL="0" indent="0">
-              <a:buNone/>
-            </a:pPr>
-            <a:r>
-              <a:rPr lang="ru-RU" i="1" dirty="0"/>
-              <a:t>Методология</a:t>
-            </a:r>
-            <a:r>
-              <a:rPr lang="en-US" dirty="0"/>
-              <a:t> [</a:t>
-            </a:r>
-            <a:r>
-              <a:rPr lang="ru-RU" dirty="0"/>
-              <a:t>Схема </a:t>
-            </a:r>
-            <a:r>
-              <a:rPr lang="en-US" dirty="0"/>
-              <a:t>Miro]. </a:t>
-            </a:r>
-            <a:r>
-              <a:rPr lang="en-US" dirty="0">
-                <a:hlinkClick r:id="rId6">
-                  <a:extLst>
-                    <a:ext uri="{A12FA001-AC4F-418D-AE19-62706E023703}">
-                      <ahyp:hlinkClr xmlns:ahyp="http://schemas.microsoft.com/office/drawing/2018/hyperlinkcolor" val="tx"/>
-                    </a:ext>
-                  </a:extLst>
-                </a:hlinkClick>
-              </a:rPr>
-              <a:t>https://miro.com/app/board/uXjVJjGG9q4=/?share_link_id=748928656338</a:t>
-            </a:r>
-            <a:endParaRPr lang="en-US" dirty="0"/>
           </a:p>
         </p:txBody>
       </p:sp>
     </p:spTree>
     <p:extLst>
       <p:ext uri="{BB962C8B-B14F-4D97-AF65-F5344CB8AC3E}">
-        <p14:creationId xmlns:p14="http://schemas.microsoft.com/office/powerpoint/2010/main" val="365788303"/>
+        <p14:creationId xmlns:p14="http://schemas.microsoft.com/office/powerpoint/2010/main" val="531444177"/>
+      </p:ext>
+    </p:extLst>
+  </p:cSld>
+  <p:clrMapOvr>
+    <a:masterClrMapping/>
+  </p:clrMapOvr>
+</p:sld>
+</file>
+
+<file path=ppt/slides/slide11.xml><?xml version="1.0" encoding="utf-8"?>
+<p:sld xmlns:a="http://schemas.openxmlformats.org/drawingml/2006/main" xmlns:r="http://schemas.openxmlformats.org/officeDocument/2006/relationships" xmlns:p="http://schemas.openxmlformats.org/presentationml/2006/main">
+  <p:cSld>
+    <p:spTree>
+      <p:nvGrpSpPr>
+        <p:cNvPr id="1" name=""/>
+        <p:cNvGrpSpPr/>
+        <p:nvPr/>
+      </p:nvGrpSpPr>
+      <p:grpSpPr>
+        <a:xfrm>
+          <a:off x="0" y="0"/>
+          <a:ext cx="0" cy="0"/>
+          <a:chOff x="0" y="0"/>
+          <a:chExt cx="0" cy="0"/>
+        </a:xfrm>
+      </p:grpSpPr>
+      <p:sp>
+        <p:nvSpPr>
+          <p:cNvPr id="2" name="Title 1">
+            <a:extLst>
+              <a:ext uri="{FF2B5EF4-FFF2-40B4-BE49-F238E27FC236}">
+                <a16:creationId xmlns:a16="http://schemas.microsoft.com/office/drawing/2014/main" id="{CB8DC19C-5148-0A92-9163-5C2674A8DB3A}"/>
+              </a:ext>
+            </a:extLst>
+          </p:cNvPr>
+          <p:cNvSpPr>
+            <a:spLocks noGrp="1"/>
+          </p:cNvSpPr>
+          <p:nvPr>
+            <p:ph type="title"/>
+          </p:nvPr>
+        </p:nvSpPr>
+        <p:spPr/>
+        <p:txBody>
+          <a:bodyPr/>
+          <a:lstStyle/>
+          <a:p>
+            <a:r>
+              <a:rPr lang="ru-RU" dirty="0"/>
+              <a:t>Ответы рецензенту</a:t>
+            </a:r>
+          </a:p>
+        </p:txBody>
+      </p:sp>
+      <p:sp>
+        <p:nvSpPr>
+          <p:cNvPr id="9" name="Content Placeholder 8">
+            <a:extLst>
+              <a:ext uri="{FF2B5EF4-FFF2-40B4-BE49-F238E27FC236}">
+                <a16:creationId xmlns:a16="http://schemas.microsoft.com/office/drawing/2014/main" id="{C109ADB3-8318-D911-588A-B7DA9CF4DA40}"/>
+              </a:ext>
+            </a:extLst>
+          </p:cNvPr>
+          <p:cNvSpPr>
+            <a:spLocks noGrp="1"/>
+          </p:cNvSpPr>
+          <p:nvPr>
+            <p:ph idx="1"/>
+          </p:nvPr>
+        </p:nvSpPr>
+        <p:spPr>
+          <a:xfrm>
+            <a:off x="6096000" y="1690688"/>
+            <a:ext cx="5025830" cy="4351338"/>
+          </a:xfrm>
+        </p:spPr>
+        <p:txBody>
+          <a:bodyPr/>
+          <a:lstStyle/>
+          <a:p>
+            <a:r>
+              <a:rPr lang="ru-RU" sz="2400" dirty="0"/>
+              <a:t>1. “Собрать корпус вакансий (Google Jobs через SerpApi)“,</a:t>
+            </a:r>
+          </a:p>
+          <a:p>
+            <a:pPr marL="914400" lvl="1" indent="-457200">
+              <a:buFont typeface="+mj-lt"/>
+              <a:buAutoNum type="alphaLcParenR"/>
+            </a:pPr>
+            <a:r>
+              <a:rPr lang="ru-RU" dirty="0" err="1"/>
+              <a:t>are</a:t>
+            </a:r>
+            <a:r>
+              <a:rPr lang="ru-RU" dirty="0"/>
+              <a:t> </a:t>
+            </a:r>
+            <a:r>
+              <a:rPr lang="ru-RU" dirty="0" err="1"/>
+              <a:t>here</a:t>
+            </a:r>
+            <a:r>
+              <a:rPr lang="ru-RU" dirty="0"/>
+              <a:t> </a:t>
+            </a:r>
+            <a:r>
+              <a:rPr lang="ru-RU" dirty="0" err="1"/>
+              <a:t>other</a:t>
+            </a:r>
+            <a:r>
+              <a:rPr lang="ru-RU" dirty="0"/>
+              <a:t> </a:t>
+            </a:r>
+            <a:r>
+              <a:rPr lang="ru-RU" dirty="0" err="1"/>
+              <a:t>options</a:t>
+            </a:r>
+            <a:r>
+              <a:rPr lang="ru-RU" dirty="0"/>
+              <a:t> </a:t>
+            </a:r>
+            <a:r>
+              <a:rPr lang="ru-RU" dirty="0" err="1"/>
+              <a:t>available</a:t>
+            </a:r>
+            <a:r>
+              <a:rPr lang="ru-RU" dirty="0"/>
+              <a:t> ?</a:t>
+            </a:r>
+          </a:p>
+          <a:p>
+            <a:pPr marL="914400" lvl="1" indent="-457200">
+              <a:buFont typeface="+mj-lt"/>
+              <a:buAutoNum type="alphaLcParenR"/>
+            </a:pPr>
+            <a:r>
+              <a:rPr lang="ru-RU" dirty="0" err="1"/>
+              <a:t>how</a:t>
+            </a:r>
+            <a:r>
+              <a:rPr lang="ru-RU" dirty="0"/>
+              <a:t> </a:t>
+            </a:r>
+            <a:r>
+              <a:rPr lang="ru-RU" dirty="0" err="1"/>
+              <a:t>well</a:t>
+            </a:r>
+            <a:r>
+              <a:rPr lang="ru-RU" dirty="0"/>
+              <a:t> </a:t>
+            </a:r>
+            <a:r>
+              <a:rPr lang="ru-RU" dirty="0" err="1"/>
+              <a:t>this</a:t>
+            </a:r>
+            <a:r>
+              <a:rPr lang="ru-RU" dirty="0"/>
+              <a:t> </a:t>
+            </a:r>
+            <a:r>
+              <a:rPr lang="ru-RU" dirty="0" err="1"/>
+              <a:t>search</a:t>
+            </a:r>
+            <a:r>
+              <a:rPr lang="ru-RU" dirty="0"/>
+              <a:t> </a:t>
+            </a:r>
+            <a:r>
+              <a:rPr lang="ru-RU" dirty="0" err="1"/>
+              <a:t>cover</a:t>
+            </a:r>
+            <a:r>
+              <a:rPr lang="ru-RU" dirty="0"/>
+              <a:t> </a:t>
+            </a:r>
+            <a:r>
+              <a:rPr lang="ru-RU" dirty="0" err="1"/>
+              <a:t>real</a:t>
+            </a:r>
+            <a:r>
+              <a:rPr lang="ru-RU" dirty="0"/>
+              <a:t> </a:t>
+            </a:r>
+            <a:r>
+              <a:rPr lang="ru-RU" dirty="0" err="1"/>
+              <a:t>vacancies</a:t>
+            </a:r>
+            <a:r>
+              <a:rPr lang="ru-RU" dirty="0"/>
+              <a:t>?</a:t>
+            </a:r>
+          </a:p>
+          <a:p>
+            <a:r>
+              <a:rPr lang="ru-RU" sz="2400" dirty="0"/>
+              <a:t>2. </a:t>
+            </a:r>
+            <a:r>
+              <a:rPr lang="ru-RU" sz="2400" dirty="0" err="1"/>
+              <a:t>Proceeding</a:t>
+            </a:r>
+            <a:r>
+              <a:rPr lang="ru-RU" sz="2400" dirty="0"/>
+              <a:t> from </a:t>
+            </a:r>
+            <a:r>
+              <a:rPr lang="ru-RU" sz="2400" dirty="0" err="1"/>
+              <a:t>jobs</a:t>
+            </a:r>
+            <a:r>
+              <a:rPr lang="ru-RU" sz="2400" dirty="0"/>
+              <a:t> </a:t>
+            </a:r>
+            <a:r>
+              <a:rPr lang="ru-RU" sz="2400" dirty="0" err="1"/>
+              <a:t>found</a:t>
+            </a:r>
+            <a:r>
+              <a:rPr lang="ru-RU" sz="2400" dirty="0"/>
+              <a:t>, </a:t>
+            </a:r>
+            <a:r>
+              <a:rPr lang="ru-RU" sz="2400" dirty="0" err="1"/>
+              <a:t>is</a:t>
+            </a:r>
+            <a:r>
+              <a:rPr lang="ru-RU" sz="2400" dirty="0"/>
+              <a:t> </a:t>
+            </a:r>
+            <a:r>
+              <a:rPr lang="ru-RU" sz="2400" dirty="0" err="1"/>
+              <a:t>here</a:t>
+            </a:r>
+            <a:r>
+              <a:rPr lang="ru-RU" sz="2400" dirty="0"/>
+              <a:t> </a:t>
+            </a:r>
+            <a:r>
+              <a:rPr lang="ru-RU" sz="2400" dirty="0" err="1"/>
+              <a:t>possible</a:t>
+            </a:r>
+            <a:r>
+              <a:rPr lang="ru-RU" sz="2400" dirty="0"/>
+              <a:t> </a:t>
+            </a:r>
+            <a:r>
+              <a:rPr lang="ru-RU" sz="2400" dirty="0" err="1"/>
+              <a:t>do</a:t>
+            </a:r>
+            <a:r>
+              <a:rPr lang="ru-RU" sz="2400" dirty="0"/>
+              <a:t> </a:t>
+            </a:r>
+            <a:r>
+              <a:rPr lang="ru-RU" sz="2400" dirty="0" err="1"/>
+              <a:t>distinguish</a:t>
+            </a:r>
+            <a:r>
+              <a:rPr lang="ru-RU" sz="2400" dirty="0"/>
+              <a:t> </a:t>
+            </a:r>
+            <a:r>
+              <a:rPr lang="ru-RU" sz="2400" dirty="0" err="1"/>
+              <a:t>online</a:t>
+            </a:r>
+            <a:r>
+              <a:rPr lang="ru-RU" sz="2400" dirty="0"/>
+              <a:t>/</a:t>
+            </a:r>
+            <a:r>
+              <a:rPr lang="ru-RU" sz="2400" dirty="0" err="1"/>
+              <a:t>office</a:t>
+            </a:r>
+            <a:r>
+              <a:rPr lang="ru-RU" sz="2400" dirty="0"/>
+              <a:t>/</a:t>
+            </a:r>
+            <a:r>
+              <a:rPr lang="ru-RU" sz="2400" dirty="0" err="1"/>
+              <a:t>partially</a:t>
+            </a:r>
+            <a:r>
+              <a:rPr lang="ru-RU" sz="2400" dirty="0"/>
+              <a:t> </a:t>
+            </a:r>
+            <a:r>
+              <a:rPr lang="ru-RU" sz="2400" dirty="0" err="1"/>
+              <a:t>office</a:t>
+            </a:r>
+            <a:r>
+              <a:rPr lang="ru-RU" sz="2400" dirty="0"/>
+              <a:t> </a:t>
+            </a:r>
+            <a:r>
+              <a:rPr lang="ru-RU" sz="2400" dirty="0" err="1"/>
+              <a:t>positions</a:t>
+            </a:r>
+            <a:r>
+              <a:rPr lang="ru-RU" sz="2400" dirty="0"/>
+              <a:t> ?</a:t>
+            </a:r>
+          </a:p>
+          <a:p>
+            <a:endParaRPr lang="ru-RU" dirty="0"/>
+          </a:p>
+        </p:txBody>
+      </p:sp>
+      <p:pic>
+        <p:nvPicPr>
+          <p:cNvPr id="13" name="Picture 12">
+            <a:extLst>
+              <a:ext uri="{FF2B5EF4-FFF2-40B4-BE49-F238E27FC236}">
+                <a16:creationId xmlns:a16="http://schemas.microsoft.com/office/drawing/2014/main" id="{DB2A9960-D7B4-8693-1084-55D37FF5A33B}"/>
+              </a:ext>
+            </a:extLst>
+          </p:cNvPr>
+          <p:cNvPicPr>
+            <a:picLocks noChangeAspect="1"/>
+          </p:cNvPicPr>
+          <p:nvPr/>
+        </p:nvPicPr>
+        <p:blipFill>
+          <a:blip r:embed="rId2"/>
+          <a:stretch>
+            <a:fillRect/>
+          </a:stretch>
+        </p:blipFill>
+        <p:spPr>
+          <a:xfrm>
+            <a:off x="838200" y="1690688"/>
+            <a:ext cx="5298293" cy="3732959"/>
+          </a:xfrm>
+          <a:prstGeom prst="rect">
+            <a:avLst/>
+          </a:prstGeom>
+        </p:spPr>
+      </p:pic>
+      <p:sp>
+        <p:nvSpPr>
+          <p:cNvPr id="14" name="TextBox 13">
+            <a:extLst>
+              <a:ext uri="{FF2B5EF4-FFF2-40B4-BE49-F238E27FC236}">
+                <a16:creationId xmlns:a16="http://schemas.microsoft.com/office/drawing/2014/main" id="{12440992-BC59-EC30-EB5E-AA67848847BC}"/>
+              </a:ext>
+            </a:extLst>
+          </p:cNvPr>
+          <p:cNvSpPr txBox="1"/>
+          <p:nvPr/>
+        </p:nvSpPr>
+        <p:spPr>
+          <a:xfrm>
+            <a:off x="1547869" y="5269758"/>
+            <a:ext cx="3878954" cy="307777"/>
+          </a:xfrm>
+          <a:prstGeom prst="rect">
+            <a:avLst/>
+          </a:prstGeom>
+          <a:noFill/>
+        </p:spPr>
+        <p:txBody>
+          <a:bodyPr wrap="square" rtlCol="0">
+            <a:spAutoFit/>
+          </a:bodyPr>
+          <a:lstStyle/>
+          <a:p>
+            <a:r>
+              <a:rPr lang="ru-RU" sz="1400" dirty="0">
+                <a:solidFill>
+                  <a:schemeClr val="tx1">
+                    <a:lumMod val="50000"/>
+                    <a:lumOff val="50000"/>
+                  </a:schemeClr>
+                </a:solidFill>
+              </a:rPr>
+              <a:t>Рисунок </a:t>
+            </a:r>
+            <a:r>
+              <a:rPr lang="en-US" sz="1400" dirty="0">
+                <a:solidFill>
+                  <a:schemeClr val="tx1">
+                    <a:lumMod val="50000"/>
+                    <a:lumOff val="50000"/>
+                  </a:schemeClr>
+                </a:solidFill>
+              </a:rPr>
+              <a:t>6</a:t>
+            </a:r>
+            <a:r>
+              <a:rPr lang="ru-RU" sz="1400" dirty="0">
+                <a:solidFill>
+                  <a:schemeClr val="tx1">
+                    <a:lumMod val="50000"/>
+                    <a:lumOff val="50000"/>
+                  </a:schemeClr>
+                </a:solidFill>
+              </a:rPr>
+              <a:t>. </a:t>
+            </a:r>
+            <a:r>
+              <a:rPr lang="en-US" sz="1400" dirty="0">
+                <a:solidFill>
+                  <a:schemeClr val="tx1">
+                    <a:lumMod val="50000"/>
+                    <a:lumOff val="50000"/>
+                  </a:schemeClr>
+                </a:solidFill>
+              </a:rPr>
+              <a:t>Questions </a:t>
+            </a:r>
+            <a:r>
+              <a:rPr lang="ru-RU" sz="1400" dirty="0">
+                <a:solidFill>
+                  <a:schemeClr val="tx1">
+                    <a:lumMod val="50000"/>
+                    <a:lumOff val="50000"/>
+                  </a:schemeClr>
+                </a:solidFill>
+              </a:rPr>
+              <a:t>(источник: unDraw</a:t>
+            </a:r>
+            <a:r>
+              <a:rPr lang="en-US" sz="1400" dirty="0">
+                <a:solidFill>
+                  <a:schemeClr val="tx1">
+                    <a:lumMod val="50000"/>
+                    <a:lumOff val="50000"/>
+                  </a:schemeClr>
+                </a:solidFill>
+              </a:rPr>
+              <a:t> , n.d. -c</a:t>
+            </a:r>
+            <a:r>
+              <a:rPr lang="ru-RU" sz="1400" dirty="0">
+                <a:solidFill>
+                  <a:schemeClr val="tx1">
+                    <a:lumMod val="50000"/>
+                    <a:lumOff val="50000"/>
+                  </a:schemeClr>
+                </a:solidFill>
+              </a:rPr>
+              <a:t>).</a:t>
+            </a:r>
+          </a:p>
+        </p:txBody>
+      </p:sp>
+    </p:spTree>
+    <p:extLst>
+      <p:ext uri="{BB962C8B-B14F-4D97-AF65-F5344CB8AC3E}">
+        <p14:creationId xmlns:p14="http://schemas.microsoft.com/office/powerpoint/2010/main" val="92624472"/>
       </p:ext>
     </p:extLst>
   </p:cSld>
@@ -4601,8 +4796,8 @@
         </p:nvSpPr>
         <p:spPr>
           <a:xfrm>
-            <a:off x="1069041" y="5534262"/>
-            <a:ext cx="3173505" cy="307777"/>
+            <a:off x="785896" y="5507368"/>
+            <a:ext cx="3724834" cy="307777"/>
           </a:xfrm>
           <a:prstGeom prst="rect">
             <a:avLst/>
@@ -4624,7 +4819,29 @@
                   </a:schemeClr>
                 </a:solidFill>
               </a:rPr>
-              <a:t>Рисунок 1. Process (источник: unDraw).</a:t>
+              <a:t>Рисунок 1. Process (источник: unDraw</a:t>
+            </a:r>
+            <a:r>
+              <a:rPr lang="en-US" sz="1400" dirty="0">
+                <a:solidFill>
+                  <a:schemeClr val="tx1">
+                    <a:lumMod val="50000"/>
+                    <a:lumOff val="50000"/>
+                  </a:schemeClr>
+                </a:solidFill>
+              </a:rPr>
+              <a:t> , n.d. -b</a:t>
+            </a:r>
+            <a:r>
+              <a:rPr lang="ru-RU" sz="1400" dirty="0">
+                <a:solidFill>
+                  <a:schemeClr val="tx1">
+                    <a:lumMod val="50000"/>
+                    <a:lumOff val="50000"/>
+                  </a:schemeClr>
+                </a:solidFill>
+              </a:rPr>
+              <a:t>).</a:t>
             </a:r>
           </a:p>
         </p:txBody>
@@ -4772,8 +4989,8 @@
         </p:nvSpPr>
         <p:spPr>
           <a:xfrm>
-            <a:off x="1620371" y="5646276"/>
-            <a:ext cx="3173505" cy="307777"/>
+            <a:off x="1443319" y="5646276"/>
+            <a:ext cx="3529852" cy="307777"/>
           </a:xfrm>
           <a:prstGeom prst="rect">
             <a:avLst/>
@@ -4839,7 +5056,29 @@
                   </a:schemeClr>
                 </a:solidFill>
               </a:rPr>
-              <a:t> (источник: unDraw).</a:t>
+              <a:t> (источник: unDraw</a:t>
+            </a:r>
+            <a:r>
+              <a:rPr lang="en-US" sz="1400" dirty="0">
+                <a:solidFill>
+                  <a:schemeClr val="tx1">
+                    <a:lumMod val="50000"/>
+                    <a:lumOff val="50000"/>
+                  </a:schemeClr>
+                </a:solidFill>
+              </a:rPr>
+              <a:t>, n.d. -a</a:t>
+            </a:r>
+            <a:r>
+              <a:rPr lang="ru-RU" sz="1400" dirty="0">
+                <a:solidFill>
+                  <a:schemeClr val="tx1">
+                    <a:lumMod val="50000"/>
+                    <a:lumOff val="50000"/>
+                  </a:schemeClr>
+                </a:solidFill>
+              </a:rPr>
+              <a:t>).</a:t>
             </a:r>
           </a:p>
         </p:txBody>
@@ -4876,10 +5115,10 @@
       </p:grpSpPr>
       <p:sp>
         <p:nvSpPr>
-          <p:cNvPr id="2" name="Title 1">
-            <a:extLst>
-              <a:ext uri="{FF2B5EF4-FFF2-40B4-BE49-F238E27FC236}">
-                <a16:creationId xmlns:a16="http://schemas.microsoft.com/office/drawing/2014/main" id="{D310B972-DCD3-164E-D66C-C0A738DBF382}"/>
+          <p:cNvPr id="5" name="Title 4">
+            <a:extLst>
+              <a:ext uri="{FF2B5EF4-FFF2-40B4-BE49-F238E27FC236}">
+                <a16:creationId xmlns:a16="http://schemas.microsoft.com/office/drawing/2014/main" id="{065817BB-4CC2-84BB-24C8-8897BA9BEE15}"/>
               </a:ext>
             </a:extLst>
           </p:cNvPr>
@@ -4897,112 +5136,107 @@
           <a:p>
             <a:r>
               <a:rPr lang="ru-RU" dirty="0"/>
-              <a:t>Методология</a:t>
-            </a:r>
-          </a:p>
-        </p:txBody>
-      </p:sp>
-      <p:pic>
-        <p:nvPicPr>
-          <p:cNvPr id="5" name="Content Placeholder 4">
-            <a:hlinkClick r:id="rId2"/>
-            <a:extLst>
-              <a:ext uri="{FF2B5EF4-FFF2-40B4-BE49-F238E27FC236}">
-                <a16:creationId xmlns:a16="http://schemas.microsoft.com/office/drawing/2014/main" id="{2F79D6BF-CD45-073D-C09B-B57007679754}"/>
-              </a:ext>
-            </a:extLst>
-          </p:cNvPr>
-          <p:cNvPicPr>
-            <a:picLocks noGrp="1" noChangeAspect="1"/>
-          </p:cNvPicPr>
+              <a:t>Задачи исследования</a:t>
+            </a:r>
+          </a:p>
+        </p:txBody>
+      </p:sp>
+      <p:sp>
+        <p:nvSpPr>
+          <p:cNvPr id="6" name="Content Placeholder 5">
+            <a:extLst>
+              <a:ext uri="{FF2B5EF4-FFF2-40B4-BE49-F238E27FC236}">
+                <a16:creationId xmlns:a16="http://schemas.microsoft.com/office/drawing/2014/main" id="{94980C09-07F7-AC17-A58F-3DE49C25EC1E}"/>
+              </a:ext>
+            </a:extLst>
+          </p:cNvPr>
+          <p:cNvSpPr>
+            <a:spLocks noGrp="1"/>
+          </p:cNvSpPr>
           <p:nvPr>
             <p:ph idx="1"/>
           </p:nvPr>
-        </p:nvPicPr>
-        <p:blipFill>
-          <a:blip r:embed="rId3"/>
-          <a:stretch>
-            <a:fillRect/>
-          </a:stretch>
-        </p:blipFill>
+        </p:nvSpPr>
         <p:spPr>
           <a:xfrm>
-            <a:off x="574067" y="1416680"/>
-            <a:ext cx="11043866" cy="5196315"/>
+            <a:off x="838200" y="1825624"/>
+            <a:ext cx="10797988" cy="4826187"/>
           </a:xfrm>
-          <a:prstGeom prst="rect">
-            <a:avLst/>
-          </a:prstGeom>
         </p:spPr>
-      </p:pic>
-      <p:sp>
-        <p:nvSpPr>
-          <p:cNvPr id="3" name="TextBox 2">
-            <a:extLst>
-              <a:ext uri="{FF2B5EF4-FFF2-40B4-BE49-F238E27FC236}">
-                <a16:creationId xmlns:a16="http://schemas.microsoft.com/office/drawing/2014/main" id="{676DC912-9FF6-0A1B-44A6-F466EC26ED1D}"/>
-              </a:ext>
-            </a:extLst>
-          </p:cNvPr>
-          <p:cNvSpPr txBox="1"/>
-          <p:nvPr/>
-        </p:nvSpPr>
-        <p:spPr>
-          <a:xfrm>
-            <a:off x="574067" y="6459106"/>
-            <a:ext cx="5105400" cy="307777"/>
-          </a:xfrm>
-          <a:prstGeom prst="rect">
-            <a:avLst/>
-          </a:prstGeom>
-          <a:noFill/>
-        </p:spPr>
-        <p:txBody>
-          <a:bodyPr wrap="square" rtlCol="0">
-            <a:spAutoFit/>
+        <p:txBody>
+          <a:bodyPr>
+            <a:normAutofit fontScale="70000" lnSpcReduction="20000"/>
           </a:bodyPr>
           <a:lstStyle/>
           <a:p>
-            <a:r>
-              <a:rPr lang="ru-RU" sz="1400" dirty="0">
-                <a:solidFill>
-                  <a:schemeClr val="tx1">
-                    <a:lumMod val="50000"/>
-                    <a:lumOff val="50000"/>
-                  </a:schemeClr>
-                </a:solidFill>
-              </a:rPr>
-              <a:t>Рисунок </a:t>
-            </a:r>
-            <a:r>
-              <a:rPr lang="en-US" sz="1400" dirty="0">
-                <a:solidFill>
-                  <a:schemeClr val="tx1">
-                    <a:lumMod val="50000"/>
-                    <a:lumOff val="50000"/>
-                  </a:schemeClr>
-                </a:solidFill>
-              </a:rPr>
-              <a:t>3</a:t>
-            </a:r>
-            <a:r>
-              <a:rPr lang="ru-RU" sz="1400" dirty="0">
-                <a:solidFill>
-                  <a:schemeClr val="tx1">
-                    <a:lumMod val="50000"/>
-                    <a:lumOff val="50000"/>
-                  </a:schemeClr>
-                </a:solidFill>
-              </a:rPr>
-              <a:t>. Методология (источник: составлено автором).</a:t>
-            </a:r>
+            <a:pPr marL="514350" indent="-514350" fontAlgn="base">
+              <a:buFont typeface="+mj-lt"/>
+              <a:buAutoNum type="arabicPeriod"/>
+            </a:pPr>
+            <a:r>
+              <a:rPr lang="ru-RU" sz="3400" dirty="0"/>
+              <a:t>Провести обзор литературы по рынку мобильной разработки и сформулировать исследовательскую рамку; </a:t>
+            </a:r>
+          </a:p>
+          <a:p>
+            <a:pPr marL="514350" indent="-514350" fontAlgn="base">
+              <a:buFont typeface="+mj-lt"/>
+              <a:buAutoNum type="arabicPeriod"/>
+            </a:pPr>
+            <a:r>
+              <a:rPr lang="ru-RU" sz="3400" dirty="0"/>
+              <a:t>Определить географический охват (Европа и Северная Америка) и критерии отбора вакансий; </a:t>
+            </a:r>
+          </a:p>
+          <a:p>
+            <a:pPr marL="514350" indent="-514350" fontAlgn="base">
+              <a:buFont typeface="+mj-lt"/>
+              <a:buAutoNum type="arabicPeriod"/>
+            </a:pPr>
+            <a:r>
+              <a:rPr lang="ru-RU" sz="3400" dirty="0"/>
+              <a:t>Собрать корпус вакансий (Google Jobs через SerpApi) и выполнить базовую подготовку данных: дедупликацию, фильтрацию, определение языка и, при необходимости, перевод на английский язык; </a:t>
+            </a:r>
+          </a:p>
+          <a:p>
+            <a:pPr marL="514350" indent="-514350" fontAlgn="base">
+              <a:buFont typeface="+mj-lt"/>
+              <a:buAutoNum type="arabicPeriod"/>
+            </a:pPr>
+            <a:r>
+              <a:rPr lang="ru-RU" sz="3400" dirty="0"/>
+              <a:t>Разметить вакансии на логические секции и валидировать разметку; извлечь технологии/инструменты и валидировать извлечение; оставить в наборе данных только позиции, относящиеся к iOS/Android; </a:t>
+            </a:r>
+          </a:p>
+          <a:p>
+            <a:pPr marL="514350" indent="-514350" fontAlgn="base">
+              <a:buFont typeface="+mj-lt"/>
+              <a:buAutoNum type="arabicPeriod"/>
+            </a:pPr>
+            <a:r>
+              <a:rPr lang="ru-RU" sz="3400" dirty="0"/>
+              <a:t>Нормализовать и очистить список технологий (нормализация синонимов, удаление ошибочных упоминаний), сгруппировать по категориям и посчитать проценты упоминаний технологий; </a:t>
+            </a:r>
+          </a:p>
+          <a:p>
+            <a:pPr marL="514350" indent="-514350" fontAlgn="base">
+              <a:buFont typeface="+mj-lt"/>
+              <a:buAutoNum type="arabicPeriod"/>
+            </a:pPr>
+            <a:r>
+              <a:rPr lang="ru-RU" sz="3400" dirty="0"/>
+              <a:t>Представить результаты в виде таблиц и дашборда в Tableau, сравнить требования в Европе и Северной Америке и сформулировать рекомендации.</a:t>
+            </a:r>
+          </a:p>
+          <a:p>
+            <a:endParaRPr lang="ru-RU" dirty="0"/>
           </a:p>
         </p:txBody>
       </p:sp>
     </p:spTree>
     <p:extLst>
       <p:ext uri="{BB962C8B-B14F-4D97-AF65-F5344CB8AC3E}">
-        <p14:creationId xmlns:p14="http://schemas.microsoft.com/office/powerpoint/2010/main" val="1705616875"/>
+        <p14:creationId xmlns:p14="http://schemas.microsoft.com/office/powerpoint/2010/main" val="4180450140"/>
       </p:ext>
     </p:extLst>
   </p:cSld>
@@ -5029,110 +5263,22 @@
           <a:chExt cx="0" cy="0"/>
         </a:xfrm>
       </p:grpSpPr>
-      <p:sp>
-        <p:nvSpPr>
-          <p:cNvPr id="2" name="Title 1">
-            <a:extLst>
-              <a:ext uri="{FF2B5EF4-FFF2-40B4-BE49-F238E27FC236}">
-                <a16:creationId xmlns:a16="http://schemas.microsoft.com/office/drawing/2014/main" id="{D8E9A2DA-DD70-C3C0-8B68-81D50155BAD5}"/>
-              </a:ext>
-            </a:extLst>
-          </p:cNvPr>
-          <p:cNvSpPr>
-            <a:spLocks noGrp="1"/>
-          </p:cNvSpPr>
-          <p:nvPr>
-            <p:ph type="title"/>
-          </p:nvPr>
-        </p:nvSpPr>
-        <p:spPr/>
-        <p:txBody>
-          <a:bodyPr/>
-          <a:lstStyle/>
-          <a:p>
-            <a:r>
-              <a:rPr lang="ru-RU" dirty="0"/>
-              <a:t>Результаты 1</a:t>
-            </a:r>
-          </a:p>
-        </p:txBody>
-      </p:sp>
-      <p:sp>
-        <p:nvSpPr>
-          <p:cNvPr id="3" name="Content Placeholder 2">
-            <a:extLst>
-              <a:ext uri="{FF2B5EF4-FFF2-40B4-BE49-F238E27FC236}">
-                <a16:creationId xmlns:a16="http://schemas.microsoft.com/office/drawing/2014/main" id="{DDDC9CA8-3DFA-836C-509E-9569BCC2271F}"/>
-              </a:ext>
-            </a:extLst>
-          </p:cNvPr>
-          <p:cNvSpPr>
-            <a:spLocks noGrp="1"/>
-          </p:cNvSpPr>
-          <p:nvPr>
-            <p:ph idx="1"/>
-          </p:nvPr>
-        </p:nvSpPr>
-        <p:spPr>
-          <a:xfrm>
-            <a:off x="6176682" y="1825625"/>
-            <a:ext cx="5472393" cy="4351338"/>
-          </a:xfrm>
-        </p:spPr>
-        <p:txBody>
-          <a:bodyPr>
-            <a:normAutofit/>
-          </a:bodyPr>
-          <a:lstStyle/>
-          <a:p>
-            <a:r>
-              <a:rPr lang="ru-RU" sz="2400" dirty="0"/>
-              <a:t>2 178 релевантных вакансий iOS/Android (Европа + Северная Америка).</a:t>
-            </a:r>
-          </a:p>
-          <a:p>
-            <a:r>
-              <a:rPr lang="pt-BR" sz="2400" dirty="0"/>
-              <a:t>4 группы: EU+Android, EU+iOS, NA+Android, NA+iOS</a:t>
-            </a:r>
-            <a:r>
-              <a:rPr lang="ru-RU" sz="2400" dirty="0"/>
-              <a:t>.</a:t>
-            </a:r>
-            <a:r>
-              <a:rPr lang="pt-BR" sz="2400" dirty="0"/>
-              <a:t> </a:t>
-            </a:r>
-            <a:endParaRPr lang="ru-RU" sz="2400" dirty="0"/>
-          </a:p>
-          <a:p>
-            <a:r>
-              <a:rPr lang="ru-RU" sz="2400" dirty="0"/>
-              <a:t>213 технологий, сгруппированных в 28 категорий.</a:t>
-            </a:r>
-          </a:p>
-          <a:p>
-            <a:r>
-              <a:rPr lang="ru-RU" sz="2400" dirty="0"/>
-              <a:t>Результаты: таблицы + интерактивный дашборд Tableau с фильтрами.</a:t>
-            </a:r>
-          </a:p>
-        </p:txBody>
-      </p:sp>
       <p:pic>
         <p:nvPicPr>
-          <p:cNvPr id="4" name="Content Placeholder 6">
+          <p:cNvPr id="14" name="Content Placeholder 13" descr="A diagram of a flowchart&#10;">
             <a:hlinkClick r:id="rId2"/>
             <a:extLst>
               <a:ext uri="{FF2B5EF4-FFF2-40B4-BE49-F238E27FC236}">
-                <a16:creationId xmlns:a16="http://schemas.microsoft.com/office/drawing/2014/main" id="{B1BDA3B3-3580-B25A-BDAB-1251FE8DDFF3}"/>
+                <a16:creationId xmlns:a16="http://schemas.microsoft.com/office/drawing/2014/main" id="{636241A3-44F3-AE07-1F42-38D28E5E9CC9}"/>
               </a:ext>
             </a:extLst>
           </p:cNvPr>
           <p:cNvPicPr>
-            <a:picLocks noChangeAspect="1"/>
+            <a:picLocks noGrp="1" noChangeAspect="1"/>
           </p:cNvPicPr>
-          <p:nvPr/>
+          <p:nvPr>
+            <p:ph idx="1"/>
+          </p:nvPr>
         </p:nvPicPr>
         <p:blipFill>
           <a:blip r:embed="rId3"/>
@@ -5142,8 +5288,8 @@
         </p:blipFill>
         <p:spPr>
           <a:xfrm>
-            <a:off x="832985" y="1825625"/>
-            <a:ext cx="5182334" cy="2974975"/>
+            <a:off x="259976" y="1326899"/>
+            <a:ext cx="11357957" cy="5357813"/>
           </a:xfrm>
           <a:prstGeom prst="rect">
             <a:avLst/>
@@ -5152,10 +5298,38 @@
       </p:pic>
       <p:sp>
         <p:nvSpPr>
-          <p:cNvPr id="5" name="TextBox 4">
-            <a:extLst>
-              <a:ext uri="{FF2B5EF4-FFF2-40B4-BE49-F238E27FC236}">
-                <a16:creationId xmlns:a16="http://schemas.microsoft.com/office/drawing/2014/main" id="{B0004905-1524-51BD-B0CF-F15EF156D722}"/>
+          <p:cNvPr id="2" name="Title 1">
+            <a:extLst>
+              <a:ext uri="{FF2B5EF4-FFF2-40B4-BE49-F238E27FC236}">
+                <a16:creationId xmlns:a16="http://schemas.microsoft.com/office/drawing/2014/main" id="{D310B972-DCD3-164E-D66C-C0A738DBF382}"/>
+              </a:ext>
+            </a:extLst>
+          </p:cNvPr>
+          <p:cNvSpPr>
+            <a:spLocks noGrp="1"/>
+          </p:cNvSpPr>
+          <p:nvPr>
+            <p:ph type="title"/>
+          </p:nvPr>
+        </p:nvSpPr>
+        <p:spPr/>
+        <p:txBody>
+          <a:bodyPr/>
+          <a:lstStyle/>
+          <a:p>
+            <a:r>
+              <a:rPr lang="ru-RU" dirty="0"/>
+              <a:t>Методология</a:t>
+            </a:r>
+          </a:p>
+        </p:txBody>
+      </p:sp>
+      <p:sp>
+        <p:nvSpPr>
+          <p:cNvPr id="3" name="TextBox 2">
+            <a:extLst>
+              <a:ext uri="{FF2B5EF4-FFF2-40B4-BE49-F238E27FC236}">
+                <a16:creationId xmlns:a16="http://schemas.microsoft.com/office/drawing/2014/main" id="{676DC912-9FF6-0A1B-44A6-F466EC26ED1D}"/>
               </a:ext>
             </a:extLst>
           </p:cNvPr>
@@ -5164,8 +5338,8 @@
         </p:nvSpPr>
         <p:spPr>
           <a:xfrm>
-            <a:off x="918894" y="4935537"/>
-            <a:ext cx="5010516" cy="307777"/>
+            <a:off x="574067" y="6459106"/>
+            <a:ext cx="5105400" cy="307777"/>
           </a:xfrm>
           <a:prstGeom prst="rect">
             <a:avLst/>
@@ -5198,7 +5372,7 @@
                   </a:schemeClr>
                 </a:solidFill>
               </a:rPr>
-              <a:t>4</a:t>
+              <a:t>3</a:t>
             </a:r>
             <a:r>
               <a:rPr lang="ru-RU" sz="1400" dirty="0">
@@ -5209,29 +5383,7 @@
                   </a:schemeClr>
                 </a:solidFill>
               </a:rPr>
-              <a:t>. Дашборд в </a:t>
-            </a:r>
-            <a:r>
-              <a:rPr lang="en-US" sz="1400" dirty="0">
-                <a:solidFill>
-                  <a:schemeClr val="tx1">
-                    <a:lumMod val="50000"/>
-                    <a:lumOff val="50000"/>
-                  </a:schemeClr>
-                </a:solidFill>
-              </a:rPr>
-              <a:t>Tableau</a:t>
-            </a:r>
-            <a:r>
-              <a:rPr lang="ru-RU" sz="1400" dirty="0">
-                <a:solidFill>
-                  <a:schemeClr val="tx1">
-                    <a:lumMod val="50000"/>
-                    <a:lumOff val="50000"/>
-                  </a:schemeClr>
-                </a:solidFill>
-              </a:rPr>
-              <a:t> (источник: составлено автором).</a:t>
+              <a:t>. Методология (источник: составлено автором).</a:t>
             </a:r>
           </a:p>
         </p:txBody>
@@ -5239,7 +5391,7 @@
     </p:spTree>
     <p:extLst>
       <p:ext uri="{BB962C8B-B14F-4D97-AF65-F5344CB8AC3E}">
-        <p14:creationId xmlns:p14="http://schemas.microsoft.com/office/powerpoint/2010/main" val="4006114258"/>
+        <p14:creationId xmlns:p14="http://schemas.microsoft.com/office/powerpoint/2010/main" val="1705616875"/>
       </p:ext>
     </p:extLst>
   </p:cSld>
@@ -5271,7 +5423,7 @@
           <p:cNvPr id="2" name="Title 1">
             <a:extLst>
               <a:ext uri="{FF2B5EF4-FFF2-40B4-BE49-F238E27FC236}">
-                <a16:creationId xmlns:a16="http://schemas.microsoft.com/office/drawing/2014/main" id="{19499884-ED48-50C9-4165-051E6C2BED78}"/>
+                <a16:creationId xmlns:a16="http://schemas.microsoft.com/office/drawing/2014/main" id="{D8E9A2DA-DD70-C3C0-8B68-81D50155BAD5}"/>
               </a:ext>
             </a:extLst>
           </p:cNvPr>
@@ -5289,15 +5441,7 @@
           <a:p>
             <a:r>
               <a:rPr lang="ru-RU" dirty="0"/>
-              <a:t>Результаты</a:t>
-            </a:r>
-            <a:r>
-              <a:rPr lang="en-US" dirty="0"/>
-              <a:t> </a:t>
-            </a:r>
-            <a:r>
-              <a:rPr lang="ru-RU" dirty="0"/>
-              <a:t>2</a:t>
+              <a:t>Результаты 1</a:t>
             </a:r>
           </a:p>
         </p:txBody>
@@ -5307,195 +5451,100 @@
           <p:cNvPr id="3" name="Content Placeholder 2">
             <a:extLst>
               <a:ext uri="{FF2B5EF4-FFF2-40B4-BE49-F238E27FC236}">
-                <a16:creationId xmlns:a16="http://schemas.microsoft.com/office/drawing/2014/main" id="{073F2D2F-3CBB-3B06-7E11-EE56A7B51577}"/>
-              </a:ext>
-            </a:extLst>
-          </p:cNvPr>
-          <p:cNvSpPr>
-            <a:spLocks noGrp="1"/>
-          </p:cNvSpPr>
-          <p:nvPr>
-            <p:ph sz="half" idx="1"/>
+                <a16:creationId xmlns:a16="http://schemas.microsoft.com/office/drawing/2014/main" id="{DDDC9CA8-3DFA-836C-509E-9569BCC2271F}"/>
+              </a:ext>
+            </a:extLst>
+          </p:cNvPr>
+          <p:cNvSpPr>
+            <a:spLocks noGrp="1"/>
+          </p:cNvSpPr>
+          <p:nvPr>
+            <p:ph idx="1"/>
           </p:nvPr>
         </p:nvSpPr>
         <p:spPr>
           <a:xfrm>
-            <a:off x="838200" y="2476499"/>
-            <a:ext cx="5181600" cy="3895726"/>
+            <a:off x="6176682" y="1825625"/>
+            <a:ext cx="5472393" cy="4351338"/>
           </a:xfrm>
         </p:spPr>
         <p:txBody>
           <a:bodyPr>
-            <a:noAutofit/>
+            <a:normAutofit/>
           </a:bodyPr>
           <a:lstStyle/>
           <a:p>
-            <a:pPr lvl="1"/>
-            <a:r>
-              <a:rPr lang="ru-RU" dirty="0"/>
-              <a:t>язык платформы  </a:t>
-            </a:r>
-          </a:p>
-          <a:p>
-            <a:pPr lvl="1"/>
-            <a:r>
-              <a:rPr lang="ru-RU" dirty="0"/>
-              <a:t>система контроля версий  </a:t>
-            </a:r>
-          </a:p>
-          <a:p>
-            <a:pPr lvl="1"/>
-            <a:r>
-              <a:rPr lang="ru-RU" dirty="0"/>
-              <a:t>IDE  </a:t>
-            </a:r>
-          </a:p>
-          <a:p>
-            <a:pPr lvl="1"/>
-            <a:r>
-              <a:rPr lang="ru-RU" dirty="0"/>
-              <a:t>сетевое взаимодействие (API)  </a:t>
-            </a:r>
-          </a:p>
-          <a:p>
-            <a:pPr lvl="1"/>
-            <a:r>
-              <a:rPr lang="ru-RU" dirty="0"/>
-              <a:t>методологии разработки и PM-инструменты  </a:t>
-            </a:r>
-          </a:p>
-          <a:p>
-            <a:pPr lvl="1"/>
-            <a:r>
-              <a:rPr lang="ru-RU" dirty="0"/>
-              <a:t>UI-фреймворки  </a:t>
-            </a:r>
-          </a:p>
-          <a:p>
-            <a:pPr lvl="1"/>
-            <a:r>
-              <a:rPr lang="ru-RU" dirty="0"/>
-              <a:t>хранение данных  </a:t>
-            </a:r>
-          </a:p>
-          <a:p>
-            <a:pPr lvl="1"/>
-            <a:r>
-              <a:rPr lang="ru-RU" dirty="0"/>
-              <a:t>платформенный SDK/базовые компоненты  </a:t>
-            </a:r>
-          </a:p>
-        </p:txBody>
-      </p:sp>
-      <p:sp>
-        <p:nvSpPr>
-          <p:cNvPr id="4" name="Content Placeholder 3">
-            <a:extLst>
-              <a:ext uri="{FF2B5EF4-FFF2-40B4-BE49-F238E27FC236}">
-                <a16:creationId xmlns:a16="http://schemas.microsoft.com/office/drawing/2014/main" id="{83C1DAA2-5DBA-15DA-A878-4F9733F84084}"/>
-              </a:ext>
-            </a:extLst>
-          </p:cNvPr>
-          <p:cNvSpPr>
-            <a:spLocks noGrp="1"/>
-          </p:cNvSpPr>
-          <p:nvPr>
-            <p:ph sz="half" idx="2"/>
-          </p:nvPr>
-        </p:nvSpPr>
+            <a:r>
+              <a:rPr lang="ru-RU" sz="2400" dirty="0"/>
+              <a:t>2 178 релевантных вакансий iOS/Android (Европа + Северная Америка).</a:t>
+            </a:r>
+          </a:p>
+          <a:p>
+            <a:r>
+              <a:rPr lang="pt-BR" sz="2400" dirty="0"/>
+              <a:t>4 группы: EU+Android, EU+iOS, NA+Android, NA+iOS</a:t>
+            </a:r>
+            <a:r>
+              <a:rPr lang="ru-RU" sz="2400" dirty="0"/>
+              <a:t>.</a:t>
+            </a:r>
+            <a:r>
+              <a:rPr lang="pt-BR" sz="2400" dirty="0"/>
+              <a:t> </a:t>
+            </a:r>
+            <a:endParaRPr lang="ru-RU" sz="2400" dirty="0"/>
+          </a:p>
+          <a:p>
+            <a:r>
+              <a:rPr lang="ru-RU" sz="2400" dirty="0"/>
+              <a:t>213 технологий, сгруппированных в 28 категорий.</a:t>
+            </a:r>
+          </a:p>
+          <a:p>
+            <a:r>
+              <a:rPr lang="ru-RU" sz="2400" dirty="0"/>
+              <a:t>Результаты: таблицы + интерактивный дашборд Tableau с фильтрами.</a:t>
+            </a:r>
+          </a:p>
+        </p:txBody>
+      </p:sp>
+      <p:pic>
+        <p:nvPicPr>
+          <p:cNvPr id="4" name="Content Placeholder 6">
+            <a:hlinkClick r:id="rId2"/>
+            <a:extLst>
+              <a:ext uri="{FF2B5EF4-FFF2-40B4-BE49-F238E27FC236}">
+                <a16:creationId xmlns:a16="http://schemas.microsoft.com/office/drawing/2014/main" id="{B1BDA3B3-3580-B25A-BDAB-1251FE8DDFF3}"/>
+              </a:ext>
+            </a:extLst>
+          </p:cNvPr>
+          <p:cNvPicPr>
+            <a:picLocks noChangeAspect="1"/>
+          </p:cNvPicPr>
+          <p:nvPr/>
+        </p:nvPicPr>
+        <p:blipFill>
+          <a:blip r:embed="rId3"/>
+          <a:stretch>
+            <a:fillRect/>
+          </a:stretch>
+        </p:blipFill>
         <p:spPr>
           <a:xfrm>
-            <a:off x="6172199" y="2476499"/>
-            <a:ext cx="5266765" cy="3895726"/>
+            <a:off x="832985" y="1825625"/>
+            <a:ext cx="5182334" cy="2974975"/>
           </a:xfrm>
+          <a:prstGeom prst="rect">
+            <a:avLst/>
+          </a:prstGeom>
         </p:spPr>
-        <p:txBody>
-          <a:bodyPr>
-            <a:normAutofit fontScale="92500"/>
-          </a:bodyPr>
-          <a:lstStyle/>
-          <a:p>
-            <a:pPr lvl="1"/>
-            <a:r>
-              <a:rPr lang="ru-RU" sz="2600" dirty="0"/>
-              <a:t>архитектура и DI </a:t>
-            </a:r>
-          </a:p>
-          <a:p>
-            <a:pPr lvl="1"/>
-            <a:r>
-              <a:rPr lang="ru-RU" sz="2600" dirty="0"/>
-              <a:t>каналы публикации  </a:t>
-            </a:r>
-          </a:p>
-          <a:p>
-            <a:pPr lvl="1"/>
-            <a:r>
-              <a:rPr lang="ru-RU" sz="2600" dirty="0"/>
-              <a:t>асинхронность/реактивность  </a:t>
-            </a:r>
-          </a:p>
-          <a:p>
-            <a:pPr lvl="1"/>
-            <a:r>
-              <a:rPr lang="ru-RU" sz="2600" dirty="0"/>
-              <a:t>сборка и управление зависимостями  </a:t>
-            </a:r>
-          </a:p>
-          <a:p>
-            <a:pPr lvl="1"/>
-            <a:r>
-              <a:rPr lang="ru-RU" sz="2600" dirty="0"/>
-              <a:t>тестирование  </a:t>
-            </a:r>
-          </a:p>
-          <a:p>
-            <a:pPr lvl="1"/>
-            <a:r>
-              <a:rPr lang="ru-RU" sz="2600" dirty="0"/>
-              <a:t>дополнительные языки  </a:t>
-            </a:r>
-          </a:p>
-          <a:p>
-            <a:pPr lvl="1"/>
-            <a:r>
-              <a:rPr lang="ru-RU" sz="2600" dirty="0"/>
-              <a:t>облачные/бэкенд-сервисы (</a:t>
-            </a:r>
-            <a:r>
-              <a:rPr lang="ru-RU" sz="2600" dirty="0" err="1"/>
-              <a:t>BaaS</a:t>
-            </a:r>
-            <a:r>
-              <a:rPr lang="ru-RU" sz="2600" dirty="0"/>
-              <a:t>)  </a:t>
-            </a:r>
-          </a:p>
-          <a:p>
-            <a:pPr lvl="1"/>
-            <a:r>
-              <a:rPr lang="ru-RU" sz="2600" dirty="0"/>
-              <a:t>CI/CD и автоматизация  </a:t>
-            </a:r>
-          </a:p>
-          <a:p>
-            <a:pPr lvl="1"/>
-            <a:r>
-              <a:rPr lang="ru-RU" sz="2600" dirty="0"/>
-              <a:t>остальное </a:t>
-            </a:r>
-          </a:p>
-          <a:p>
-            <a:endParaRPr lang="ru-RU" dirty="0"/>
-          </a:p>
-        </p:txBody>
-      </p:sp>
+      </p:pic>
       <p:sp>
         <p:nvSpPr>
           <p:cNvPr id="5" name="TextBox 4">
             <a:extLst>
               <a:ext uri="{FF2B5EF4-FFF2-40B4-BE49-F238E27FC236}">
-                <a16:creationId xmlns:a16="http://schemas.microsoft.com/office/drawing/2014/main" id="{BC29CB38-4D78-AEF3-5735-8BEACD27A66B}"/>
+                <a16:creationId xmlns:a16="http://schemas.microsoft.com/office/drawing/2014/main" id="{B0004905-1524-51BD-B0CF-F15EF156D722}"/>
               </a:ext>
             </a:extLst>
           </p:cNvPr>
@@ -5504,8 +5553,8 @@
         </p:nvSpPr>
         <p:spPr>
           <a:xfrm>
-            <a:off x="838200" y="1752123"/>
-            <a:ext cx="9058275" cy="738664"/>
+            <a:off x="918894" y="4935537"/>
+            <a:ext cx="5010516" cy="307777"/>
           </a:xfrm>
           <a:prstGeom prst="rect">
             <a:avLst/>
@@ -5519,19 +5568,67 @@
           <a:lstStyle/>
           <a:p>
             <a:r>
-              <a:rPr lang="ru-RU" sz="2400" dirty="0"/>
-              <a:t>По обоим платформам повторяется общий каркас стека:</a:t>
-            </a:r>
-          </a:p>
-          <a:p>
-            <a:endParaRPr lang="ru-RU" dirty="0"/>
+              <a:rPr lang="ru-RU" sz="1400" dirty="0">
+                <a:solidFill>
+                  <a:schemeClr val="tx1">
+                    <a:lumMod val="50000"/>
+                    <a:lumOff val="50000"/>
+                  </a:schemeClr>
+                </a:solidFill>
+              </a:rPr>
+              <a:t>Рисунок </a:t>
+            </a:r>
+            <a:r>
+              <a:rPr lang="en-US" sz="1400" dirty="0">
+                <a:solidFill>
+                  <a:schemeClr val="tx1">
+                    <a:lumMod val="50000"/>
+                    <a:lumOff val="50000"/>
+                  </a:schemeClr>
+                </a:solidFill>
+              </a:rPr>
+              <a:t>4</a:t>
+            </a:r>
+            <a:r>
+              <a:rPr lang="ru-RU" sz="1400" dirty="0">
+                <a:solidFill>
+                  <a:schemeClr val="tx1">
+                    <a:lumMod val="50000"/>
+                    <a:lumOff val="50000"/>
+                  </a:schemeClr>
+                </a:solidFill>
+              </a:rPr>
+              <a:t>. Дашборд в </a:t>
+            </a:r>
+            <a:r>
+              <a:rPr lang="en-US" sz="1400" dirty="0">
+                <a:solidFill>
+                  <a:schemeClr val="tx1">
+                    <a:lumMod val="50000"/>
+                    <a:lumOff val="50000"/>
+                  </a:schemeClr>
+                </a:solidFill>
+              </a:rPr>
+              <a:t>Tableau</a:t>
+            </a:r>
+            <a:r>
+              <a:rPr lang="ru-RU" sz="1400" dirty="0">
+                <a:solidFill>
+                  <a:schemeClr val="tx1">
+                    <a:lumMod val="50000"/>
+                    <a:lumOff val="50000"/>
+                  </a:schemeClr>
+                </a:solidFill>
+              </a:rPr>
+              <a:t> (источник: составлено автором).</a:t>
+            </a:r>
           </a:p>
         </p:txBody>
       </p:sp>
     </p:spTree>
     <p:extLst>
       <p:ext uri="{BB962C8B-B14F-4D97-AF65-F5344CB8AC3E}">
-        <p14:creationId xmlns:p14="http://schemas.microsoft.com/office/powerpoint/2010/main" val="1655250204"/>
+        <p14:creationId xmlns:p14="http://schemas.microsoft.com/office/powerpoint/2010/main" val="4006114258"/>
       </p:ext>
     </p:extLst>
   </p:cSld>
@@ -5563,7 +5660,7 @@
           <p:cNvPr id="2" name="Title 1">
             <a:extLst>
               <a:ext uri="{FF2B5EF4-FFF2-40B4-BE49-F238E27FC236}">
-                <a16:creationId xmlns:a16="http://schemas.microsoft.com/office/drawing/2014/main" id="{BEC27215-C1F7-3B59-3396-2A6F8AD5769F}"/>
+                <a16:creationId xmlns:a16="http://schemas.microsoft.com/office/drawing/2014/main" id="{19499884-ED48-50C9-4165-051E6C2BED78}"/>
               </a:ext>
             </a:extLst>
           </p:cNvPr>
@@ -5581,7 +5678,15 @@
           <a:p>
             <a:r>
               <a:rPr lang="ru-RU" dirty="0"/>
-              <a:t>Выводы и рекомендации</a:t>
+              <a:t>Результаты</a:t>
+            </a:r>
+            <a:r>
+              <a:rPr lang="en-US" dirty="0"/>
+              <a:t> </a:t>
+            </a:r>
+            <a:r>
+              <a:rPr lang="ru-RU" dirty="0"/>
+              <a:t>2</a:t>
             </a:r>
           </a:p>
         </p:txBody>
@@ -5591,88 +5696,195 @@
           <p:cNvPr id="3" name="Content Placeholder 2">
             <a:extLst>
               <a:ext uri="{FF2B5EF4-FFF2-40B4-BE49-F238E27FC236}">
-                <a16:creationId xmlns:a16="http://schemas.microsoft.com/office/drawing/2014/main" id="{1125D273-41BD-973A-6857-8ECB6919C8C5}"/>
-              </a:ext>
-            </a:extLst>
-          </p:cNvPr>
-          <p:cNvSpPr>
-            <a:spLocks noGrp="1"/>
-          </p:cNvSpPr>
-          <p:nvPr>
-            <p:ph idx="1"/>
+                <a16:creationId xmlns:a16="http://schemas.microsoft.com/office/drawing/2014/main" id="{073F2D2F-3CBB-3B06-7E11-EE56A7B51577}"/>
+              </a:ext>
+            </a:extLst>
+          </p:cNvPr>
+          <p:cNvSpPr>
+            <a:spLocks noGrp="1"/>
+          </p:cNvSpPr>
+          <p:nvPr>
+            <p:ph sz="half" idx="1"/>
           </p:nvPr>
         </p:nvSpPr>
         <p:spPr>
           <a:xfrm>
-            <a:off x="5351929" y="1825625"/>
-            <a:ext cx="6001871" cy="4351338"/>
+            <a:off x="838200" y="2476499"/>
+            <a:ext cx="5181600" cy="3895726"/>
           </a:xfrm>
         </p:spPr>
         <p:txBody>
           <a:bodyPr>
-            <a:normAutofit/>
+            <a:noAutofit/>
           </a:bodyPr>
           <a:lstStyle/>
           <a:p>
-            <a:r>
-              <a:rPr lang="ru-RU" sz="2400" dirty="0"/>
-              <a:t>Ключевые выводы: главные требования стабильны как для iOS-, так и для Android-разработчиков, а межрегиональные различия касаются редких/специфичных технологий.</a:t>
-            </a:r>
-          </a:p>
-          <a:p>
-            <a:r>
-              <a:rPr lang="ru-RU" sz="2400" dirty="0"/>
-              <a:t>Результаты исследования согласуются с литературой/прошлыми исследованиями. </a:t>
-            </a:r>
-          </a:p>
-          <a:p>
-            <a:r>
-              <a:rPr lang="ru-RU" sz="2400" dirty="0"/>
-              <a:t>На основе результатов составлены рекомендации по изучению в формате «Основа/Дополнение» для обеих платформ.</a:t>
-            </a:r>
-            <a:endParaRPr lang="en-US" sz="2400" dirty="0"/>
-          </a:p>
-          <a:p>
-            <a:endParaRPr lang="ru-RU" sz="2400" dirty="0"/>
-          </a:p>
-        </p:txBody>
-      </p:sp>
-      <p:pic>
-        <p:nvPicPr>
-          <p:cNvPr id="5" name="Picture 4">
-            <a:extLst>
-              <a:ext uri="{FF2B5EF4-FFF2-40B4-BE49-F238E27FC236}">
-                <a16:creationId xmlns:a16="http://schemas.microsoft.com/office/drawing/2014/main" id="{5D2FB450-5937-1F1A-26CD-687F83463C7C}"/>
-              </a:ext>
-            </a:extLst>
-          </p:cNvPr>
-          <p:cNvPicPr>
-            <a:picLocks noChangeAspect="1"/>
-          </p:cNvPicPr>
-          <p:nvPr/>
-        </p:nvPicPr>
-        <p:blipFill>
-          <a:blip r:embed="rId3"/>
-          <a:stretch>
-            <a:fillRect/>
-          </a:stretch>
-        </p:blipFill>
+            <a:pPr lvl="1"/>
+            <a:r>
+              <a:rPr lang="ru-RU" dirty="0"/>
+              <a:t>язык платформы  </a:t>
+            </a:r>
+          </a:p>
+          <a:p>
+            <a:pPr lvl="1"/>
+            <a:r>
+              <a:rPr lang="ru-RU" dirty="0"/>
+              <a:t>система контроля версий  </a:t>
+            </a:r>
+          </a:p>
+          <a:p>
+            <a:pPr lvl="1"/>
+            <a:r>
+              <a:rPr lang="ru-RU" dirty="0"/>
+              <a:t>IDE  </a:t>
+            </a:r>
+          </a:p>
+          <a:p>
+            <a:pPr lvl="1"/>
+            <a:r>
+              <a:rPr lang="ru-RU" dirty="0"/>
+              <a:t>сетевое взаимодействие (API)  </a:t>
+            </a:r>
+          </a:p>
+          <a:p>
+            <a:pPr lvl="1"/>
+            <a:r>
+              <a:rPr lang="ru-RU" dirty="0"/>
+              <a:t>методологии разработки и PM-инструменты  </a:t>
+            </a:r>
+          </a:p>
+          <a:p>
+            <a:pPr lvl="1"/>
+            <a:r>
+              <a:rPr lang="ru-RU" dirty="0"/>
+              <a:t>UI-фреймворки  </a:t>
+            </a:r>
+          </a:p>
+          <a:p>
+            <a:pPr lvl="1"/>
+            <a:r>
+              <a:rPr lang="ru-RU" dirty="0"/>
+              <a:t>хранение данных  </a:t>
+            </a:r>
+          </a:p>
+          <a:p>
+            <a:pPr lvl="1"/>
+            <a:r>
+              <a:rPr lang="ru-RU" dirty="0"/>
+              <a:t>платформенный SDK/базовые компоненты  </a:t>
+            </a:r>
+          </a:p>
+        </p:txBody>
+      </p:sp>
+      <p:sp>
+        <p:nvSpPr>
+          <p:cNvPr id="4" name="Content Placeholder 3">
+            <a:extLst>
+              <a:ext uri="{FF2B5EF4-FFF2-40B4-BE49-F238E27FC236}">
+                <a16:creationId xmlns:a16="http://schemas.microsoft.com/office/drawing/2014/main" id="{83C1DAA2-5DBA-15DA-A878-4F9733F84084}"/>
+              </a:ext>
+            </a:extLst>
+          </p:cNvPr>
+          <p:cNvSpPr>
+            <a:spLocks noGrp="1"/>
+          </p:cNvSpPr>
+          <p:nvPr>
+            <p:ph sz="half" idx="2"/>
+          </p:nvPr>
+        </p:nvSpPr>
         <p:spPr>
           <a:xfrm>
-            <a:off x="580763" y="1687478"/>
-            <a:ext cx="4694965" cy="3932032"/>
+            <a:off x="6172199" y="2476499"/>
+            <a:ext cx="5266765" cy="3895726"/>
           </a:xfrm>
-          <a:prstGeom prst="rect">
-            <a:avLst/>
-          </a:prstGeom>
         </p:spPr>
-      </p:pic>
-      <p:sp>
-        <p:nvSpPr>
-          <p:cNvPr id="8" name="TextBox 7">
-            <a:extLst>
-              <a:ext uri="{FF2B5EF4-FFF2-40B4-BE49-F238E27FC236}">
-                <a16:creationId xmlns:a16="http://schemas.microsoft.com/office/drawing/2014/main" id="{C5A2F7D2-F857-8123-1CDB-C7F9F754E351}"/>
+        <p:txBody>
+          <a:bodyPr>
+            <a:normAutofit fontScale="92500"/>
+          </a:bodyPr>
+          <a:lstStyle/>
+          <a:p>
+            <a:pPr lvl="1"/>
+            <a:r>
+              <a:rPr lang="ru-RU" sz="2600" dirty="0"/>
+              <a:t>архитектура и DI </a:t>
+            </a:r>
+          </a:p>
+          <a:p>
+            <a:pPr lvl="1"/>
+            <a:r>
+              <a:rPr lang="ru-RU" sz="2600" dirty="0"/>
+              <a:t>каналы публикации  </a:t>
+            </a:r>
+          </a:p>
+          <a:p>
+            <a:pPr lvl="1"/>
+            <a:r>
+              <a:rPr lang="ru-RU" sz="2600" dirty="0"/>
+              <a:t>асинхронность/реактивность  </a:t>
+            </a:r>
+          </a:p>
+          <a:p>
+            <a:pPr lvl="1"/>
+            <a:r>
+              <a:rPr lang="ru-RU" sz="2600" dirty="0"/>
+              <a:t>сборка и управление зависимостями  </a:t>
+            </a:r>
+          </a:p>
+          <a:p>
+            <a:pPr lvl="1"/>
+            <a:r>
+              <a:rPr lang="ru-RU" sz="2600" dirty="0"/>
+              <a:t>тестирование  </a:t>
+            </a:r>
+          </a:p>
+          <a:p>
+            <a:pPr lvl="1"/>
+            <a:r>
+              <a:rPr lang="ru-RU" sz="2600" dirty="0"/>
+              <a:t>дополнительные языки  </a:t>
+            </a:r>
+          </a:p>
+          <a:p>
+            <a:pPr lvl="1"/>
+            <a:r>
+              <a:rPr lang="ru-RU" sz="2600" dirty="0"/>
+              <a:t>облачные/бэкенд-сервисы (</a:t>
+            </a:r>
+            <a:r>
+              <a:rPr lang="ru-RU" sz="2600" dirty="0" err="1"/>
+              <a:t>BaaS</a:t>
+            </a:r>
+            <a:r>
+              <a:rPr lang="ru-RU" sz="2600" dirty="0"/>
+              <a:t>)  </a:t>
+            </a:r>
+          </a:p>
+          <a:p>
+            <a:pPr lvl="1"/>
+            <a:r>
+              <a:rPr lang="ru-RU" sz="2600" dirty="0"/>
+              <a:t>CI/CD и автоматизация  </a:t>
+            </a:r>
+          </a:p>
+          <a:p>
+            <a:pPr lvl="1"/>
+            <a:r>
+              <a:rPr lang="ru-RU" sz="2600" dirty="0"/>
+              <a:t>остальное </a:t>
+            </a:r>
+          </a:p>
+          <a:p>
+            <a:endParaRPr lang="ru-RU" dirty="0"/>
+          </a:p>
+        </p:txBody>
+      </p:sp>
+      <p:sp>
+        <p:nvSpPr>
+          <p:cNvPr id="5" name="TextBox 4">
+            <a:extLst>
+              <a:ext uri="{FF2B5EF4-FFF2-40B4-BE49-F238E27FC236}">
+                <a16:creationId xmlns:a16="http://schemas.microsoft.com/office/drawing/2014/main" id="{BC29CB38-4D78-AEF3-5735-8BEACD27A66B}"/>
               </a:ext>
             </a:extLst>
           </p:cNvPr>
@@ -5681,8 +5893,8 @@
         </p:nvSpPr>
         <p:spPr>
           <a:xfrm>
-            <a:off x="1190212" y="5465621"/>
-            <a:ext cx="3476065" cy="307777"/>
+            <a:off x="838200" y="1752123"/>
+            <a:ext cx="9058275" cy="738664"/>
           </a:xfrm>
           <a:prstGeom prst="rect">
             <a:avLst/>
@@ -5696,67 +5908,19 @@
           <a:lstStyle/>
           <a:p>
             <a:r>
-              <a:rPr lang="ru-RU" sz="1400" dirty="0">
-                <a:solidFill>
-                  <a:schemeClr val="tx1">
-                    <a:lumMod val="50000"/>
-                    <a:lumOff val="50000"/>
-                  </a:schemeClr>
-                </a:solidFill>
-              </a:rPr>
-              <a:t>Рисунок </a:t>
-            </a:r>
-            <a:r>
-              <a:rPr lang="en-US" sz="1400" dirty="0">
-                <a:solidFill>
-                  <a:schemeClr val="tx1">
-                    <a:lumMod val="50000"/>
-                    <a:lumOff val="50000"/>
-                  </a:schemeClr>
-                </a:solidFill>
-              </a:rPr>
-              <a:t>5</a:t>
-            </a:r>
-            <a:r>
-              <a:rPr lang="ru-RU" sz="1400" dirty="0">
-                <a:solidFill>
-                  <a:schemeClr val="tx1">
-                    <a:lumMod val="50000"/>
-                    <a:lumOff val="50000"/>
-                  </a:schemeClr>
-                </a:solidFill>
-              </a:rPr>
-              <a:t>. </a:t>
-            </a:r>
-            <a:r>
-              <a:rPr lang="en-US" sz="1400" dirty="0">
-                <a:solidFill>
-                  <a:schemeClr val="tx1">
-                    <a:lumMod val="50000"/>
-                    <a:lumOff val="50000"/>
-                  </a:schemeClr>
-                </a:solidFill>
-              </a:rPr>
-              <a:t>Visual Data</a:t>
-            </a:r>
-            <a:r>
-              <a:rPr lang="ru-RU" sz="1400" dirty="0">
-                <a:solidFill>
-                  <a:schemeClr val="tx1">
-                    <a:lumMod val="50000"/>
-                    <a:lumOff val="50000"/>
-                  </a:schemeClr>
-                </a:solidFill>
-              </a:rPr>
-              <a:t> (источник: unDraw).</a:t>
-            </a:r>
+              <a:rPr lang="ru-RU" sz="2400" dirty="0"/>
+              <a:t>По обоим платформам повторяется общий каркас стека:</a:t>
+            </a:r>
+          </a:p>
+          <a:p>
+            <a:endParaRPr lang="ru-RU" dirty="0"/>
           </a:p>
         </p:txBody>
       </p:sp>
     </p:spTree>
     <p:extLst>
       <p:ext uri="{BB962C8B-B14F-4D97-AF65-F5344CB8AC3E}">
-        <p14:creationId xmlns:p14="http://schemas.microsoft.com/office/powerpoint/2010/main" val="3226884331"/>
+        <p14:creationId xmlns:p14="http://schemas.microsoft.com/office/powerpoint/2010/main" val="1655250204"/>
       </p:ext>
     </p:extLst>
   </p:cSld>
@@ -5788,15 +5952,15 @@
           <p:cNvPr id="2" name="Title 1">
             <a:extLst>
               <a:ext uri="{FF2B5EF4-FFF2-40B4-BE49-F238E27FC236}">
-                <a16:creationId xmlns:a16="http://schemas.microsoft.com/office/drawing/2014/main" id="{847D6EE1-6D2F-9E32-9EC1-EE212D09B274}"/>
-              </a:ext>
-            </a:extLst>
-          </p:cNvPr>
-          <p:cNvSpPr>
-            <a:spLocks noGrp="1"/>
-          </p:cNvSpPr>
-          <p:nvPr>
-            <p:ph type="ctrTitle"/>
+                <a16:creationId xmlns:a16="http://schemas.microsoft.com/office/drawing/2014/main" id="{BEC27215-C1F7-3B59-3396-2A6F8AD5769F}"/>
+              </a:ext>
+            </a:extLst>
+          </p:cNvPr>
+          <p:cNvSpPr>
+            <a:spLocks noGrp="1"/>
+          </p:cNvSpPr>
+          <p:nvPr>
+            <p:ph type="title"/>
           </p:nvPr>
         </p:nvSpPr>
         <p:spPr/>
@@ -5806,35 +5970,196 @@
           <a:p>
             <a:r>
               <a:rPr lang="ru-RU" dirty="0"/>
-              <a:t>Спасибо за внимание</a:t>
-            </a:r>
-          </a:p>
-        </p:txBody>
-      </p:sp>
-      <p:sp>
-        <p:nvSpPr>
-          <p:cNvPr id="4" name="Subtitle 3">
-            <a:extLst>
-              <a:ext uri="{FF2B5EF4-FFF2-40B4-BE49-F238E27FC236}">
-                <a16:creationId xmlns:a16="http://schemas.microsoft.com/office/drawing/2014/main" id="{9C58F630-B371-2B29-97B2-5932BEE916D2}"/>
-              </a:ext>
-            </a:extLst>
-          </p:cNvPr>
-          <p:cNvSpPr>
-            <a:spLocks noGrp="1"/>
-          </p:cNvSpPr>
-          <p:nvPr>
-            <p:ph type="subTitle" idx="1"/>
-          </p:nvPr>
-        </p:nvSpPr>
-        <p:spPr/>
-        <p:txBody>
-          <a:bodyPr/>
-          <a:lstStyle/>
-          <a:p>
-            <a:r>
-              <a:rPr lang="ru-RU" dirty="0"/>
-              <a:t> </a:t>
+              <a:t>Выводы и рекомендации</a:t>
+            </a:r>
+          </a:p>
+        </p:txBody>
+      </p:sp>
+      <p:sp>
+        <p:nvSpPr>
+          <p:cNvPr id="3" name="Content Placeholder 2">
+            <a:extLst>
+              <a:ext uri="{FF2B5EF4-FFF2-40B4-BE49-F238E27FC236}">
+                <a16:creationId xmlns:a16="http://schemas.microsoft.com/office/drawing/2014/main" id="{1125D273-41BD-973A-6857-8ECB6919C8C5}"/>
+              </a:ext>
+            </a:extLst>
+          </p:cNvPr>
+          <p:cNvSpPr>
+            <a:spLocks noGrp="1"/>
+          </p:cNvSpPr>
+          <p:nvPr>
+            <p:ph idx="1"/>
+          </p:nvPr>
+        </p:nvSpPr>
+        <p:spPr>
+          <a:xfrm>
+            <a:off x="5351929" y="1825625"/>
+            <a:ext cx="6001871" cy="4351338"/>
+          </a:xfrm>
+        </p:spPr>
+        <p:txBody>
+          <a:bodyPr>
+            <a:normAutofit/>
+          </a:bodyPr>
+          <a:lstStyle/>
+          <a:p>
+            <a:r>
+              <a:rPr lang="ru-RU" sz="2400" dirty="0"/>
+              <a:t>Ключевые выводы: главные требования стабильны как для iOS-, так и для Android-разработчиков, а межрегиональные различия касаются редких/специфичных технологий.</a:t>
+            </a:r>
+          </a:p>
+          <a:p>
+            <a:r>
+              <a:rPr lang="ru-RU" sz="2400" dirty="0"/>
+              <a:t>Результаты исследования согласуются с литературой/прошлыми исследованиями. </a:t>
+            </a:r>
+          </a:p>
+          <a:p>
+            <a:r>
+              <a:rPr lang="ru-RU" sz="2400" dirty="0"/>
+              <a:t>На основе результатов составлены рекомендации по изучению в формате «Основа/Дополнение» для обеих платформ.</a:t>
+            </a:r>
+            <a:endParaRPr lang="en-US" sz="2400" dirty="0"/>
+          </a:p>
+          <a:p>
+            <a:endParaRPr lang="ru-RU" sz="2400" dirty="0"/>
+          </a:p>
+        </p:txBody>
+      </p:sp>
+      <p:pic>
+        <p:nvPicPr>
+          <p:cNvPr id="5" name="Picture 4">
+            <a:extLst>
+              <a:ext uri="{FF2B5EF4-FFF2-40B4-BE49-F238E27FC236}">
+                <a16:creationId xmlns:a16="http://schemas.microsoft.com/office/drawing/2014/main" id="{5D2FB450-5937-1F1A-26CD-687F83463C7C}"/>
+              </a:ext>
+            </a:extLst>
+          </p:cNvPr>
+          <p:cNvPicPr>
+            <a:picLocks noChangeAspect="1"/>
+          </p:cNvPicPr>
+          <p:nvPr/>
+        </p:nvPicPr>
+        <p:blipFill>
+          <a:blip r:embed="rId3"/>
+          <a:stretch>
+            <a:fillRect/>
+          </a:stretch>
+        </p:blipFill>
+        <p:spPr>
+          <a:xfrm>
+            <a:off x="580763" y="1687478"/>
+            <a:ext cx="4694965" cy="3932032"/>
+          </a:xfrm>
+          <a:prstGeom prst="rect">
+            <a:avLst/>
+          </a:prstGeom>
+        </p:spPr>
+      </p:pic>
+      <p:sp>
+        <p:nvSpPr>
+          <p:cNvPr id="8" name="TextBox 7">
+            <a:extLst>
+              <a:ext uri="{FF2B5EF4-FFF2-40B4-BE49-F238E27FC236}">
+                <a16:creationId xmlns:a16="http://schemas.microsoft.com/office/drawing/2014/main" id="{C5A2F7D2-F857-8123-1CDB-C7F9F754E351}"/>
+              </a:ext>
+            </a:extLst>
+          </p:cNvPr>
+          <p:cNvSpPr txBox="1"/>
+          <p:nvPr/>
+        </p:nvSpPr>
+        <p:spPr>
+          <a:xfrm>
+            <a:off x="940321" y="5465621"/>
+            <a:ext cx="3975847" cy="307777"/>
+          </a:xfrm>
+          <a:prstGeom prst="rect">
+            <a:avLst/>
+          </a:prstGeom>
+          <a:noFill/>
+        </p:spPr>
+        <p:txBody>
+          <a:bodyPr wrap="square" rtlCol="0">
+            <a:spAutoFit/>
+          </a:bodyPr>
+          <a:lstStyle/>
+          <a:p>
+            <a:r>
+              <a:rPr lang="ru-RU" sz="1400" dirty="0">
+                <a:solidFill>
+                  <a:schemeClr val="tx1">
+                    <a:lumMod val="50000"/>
+                    <a:lumOff val="50000"/>
+                  </a:schemeClr>
+                </a:solidFill>
+              </a:rPr>
+              <a:t>Рисунок </a:t>
+            </a:r>
+            <a:r>
+              <a:rPr lang="en-US" sz="1400" dirty="0">
+                <a:solidFill>
+                  <a:schemeClr val="tx1">
+                    <a:lumMod val="50000"/>
+                    <a:lumOff val="50000"/>
+                  </a:schemeClr>
+                </a:solidFill>
+              </a:rPr>
+              <a:t>5</a:t>
+            </a:r>
+            <a:r>
+              <a:rPr lang="ru-RU" sz="1400" dirty="0">
+                <a:solidFill>
+                  <a:schemeClr val="tx1">
+                    <a:lumMod val="50000"/>
+                    <a:lumOff val="50000"/>
+                  </a:schemeClr>
+                </a:solidFill>
+              </a:rPr>
+              <a:t>. </a:t>
+            </a:r>
+            <a:r>
+              <a:rPr lang="en-US" sz="1400" dirty="0">
+                <a:solidFill>
+                  <a:schemeClr val="tx1">
+                    <a:lumMod val="50000"/>
+                    <a:lumOff val="50000"/>
+                  </a:schemeClr>
+                </a:solidFill>
+              </a:rPr>
+              <a:t>Visual Data</a:t>
+            </a:r>
+            <a:r>
+              <a:rPr lang="ru-RU" sz="1400" dirty="0">
+                <a:solidFill>
+                  <a:schemeClr val="tx1">
+                    <a:lumMod val="50000"/>
+                    <a:lumOff val="50000"/>
+                  </a:schemeClr>
+                </a:solidFill>
+              </a:rPr>
+              <a:t> (источник: unDraw</a:t>
+            </a:r>
+            <a:r>
+              <a:rPr lang="en-US" sz="1400" dirty="0">
+                <a:solidFill>
+                  <a:schemeClr val="tx1">
+                    <a:lumMod val="50000"/>
+                    <a:lumOff val="50000"/>
+                  </a:schemeClr>
+                </a:solidFill>
+              </a:rPr>
+              <a:t> , n.d. -d</a:t>
+            </a:r>
+            <a:r>
+              <a:rPr lang="ru-RU" sz="1400" dirty="0">
+                <a:solidFill>
+                  <a:schemeClr val="tx1">
+                    <a:lumMod val="50000"/>
+                    <a:lumOff val="50000"/>
+                  </a:schemeClr>
+                </a:solidFill>
+              </a:rPr>
+              <a:t>).</a:t>
             </a:r>
           </a:p>
         </p:txBody>
@@ -5842,7 +6167,7 @@
     </p:spTree>
     <p:extLst>
       <p:ext uri="{BB962C8B-B14F-4D97-AF65-F5344CB8AC3E}">
-        <p14:creationId xmlns:p14="http://schemas.microsoft.com/office/powerpoint/2010/main" val="531444177"/>
+        <p14:creationId xmlns:p14="http://schemas.microsoft.com/office/powerpoint/2010/main" val="3226884331"/>
       </p:ext>
     </p:extLst>
   </p:cSld>
@@ -5874,7 +6199,7 @@
           <p:cNvPr id="2" name="Title 1">
             <a:extLst>
               <a:ext uri="{FF2B5EF4-FFF2-40B4-BE49-F238E27FC236}">
-                <a16:creationId xmlns:a16="http://schemas.microsoft.com/office/drawing/2014/main" id="{CB8DC19C-5148-0A92-9163-5C2674A8DB3A}"/>
+                <a16:creationId xmlns:a16="http://schemas.microsoft.com/office/drawing/2014/main" id="{C310D019-DF5D-FE77-908B-6B425EFCDDE0}"/>
               </a:ext>
             </a:extLst>
           </p:cNvPr>
@@ -5892,17 +6217,17 @@
           <a:p>
             <a:r>
               <a:rPr lang="ru-RU" dirty="0"/>
-              <a:t>Ответы рецензенту</a:t>
-            </a:r>
-          </a:p>
-        </p:txBody>
-      </p:sp>
-      <p:sp>
-        <p:nvSpPr>
-          <p:cNvPr id="9" name="Content Placeholder 8">
-            <a:extLst>
-              <a:ext uri="{FF2B5EF4-FFF2-40B4-BE49-F238E27FC236}">
-                <a16:creationId xmlns:a16="http://schemas.microsoft.com/office/drawing/2014/main" id="{C109ADB3-8318-D911-588A-B7DA9CF4DA40}"/>
+              <a:t>Ссылки на источники</a:t>
+            </a:r>
+          </a:p>
+        </p:txBody>
+      </p:sp>
+      <p:sp>
+        <p:nvSpPr>
+          <p:cNvPr id="3" name="Content Placeholder 2">
+            <a:extLst>
+              <a:ext uri="{FF2B5EF4-FFF2-40B4-BE49-F238E27FC236}">
+                <a16:creationId xmlns:a16="http://schemas.microsoft.com/office/drawing/2014/main" id="{2FD37D67-1AEE-44BD-42A0-2D3EC9B15E33}"/>
               </a:ext>
             </a:extLst>
           </p:cNvPr>
@@ -5913,364 +6238,316 @@
             <p:ph idx="1"/>
           </p:nvPr>
         </p:nvSpPr>
-        <p:spPr>
-          <a:xfrm>
-            <a:off x="6096000" y="1690688"/>
-            <a:ext cx="5025830" cy="4351338"/>
-          </a:xfrm>
-        </p:spPr>
-        <p:txBody>
-          <a:bodyPr/>
-          <a:lstStyle/>
-          <a:p>
-            <a:r>
-              <a:rPr lang="ru-RU" sz="2400" dirty="0"/>
-              <a:t>1. “Собрать корпус вакансий (Google Jobs через SerpApi)“,</a:t>
-            </a:r>
-          </a:p>
-          <a:p>
-            <a:pPr marL="914400" lvl="1" indent="-457200">
-              <a:buFont typeface="+mj-lt"/>
-              <a:buAutoNum type="alphaLcParenR"/>
+        <p:spPr/>
+        <p:txBody>
+          <a:bodyPr>
+            <a:normAutofit fontScale="85000" lnSpcReduction="20000"/>
+          </a:bodyPr>
+          <a:lstStyle/>
+          <a:p>
+            <a:pPr marL="0" indent="0">
+              <a:buNone/>
             </a:pPr>
             <a:r>
-              <a:rPr lang="ru-RU" dirty="0" err="1"/>
-              <a:t>are</a:t>
-            </a:r>
-            <a:r>
               <a:rPr lang="ru-RU" dirty="0"/>
+              <a:t>unDraw. (n.d.</a:t>
+            </a:r>
+            <a:r>
+              <a:rPr lang="en-US" dirty="0"/>
+              <a:t>-a</a:t>
+            </a:r>
+            <a:r>
+              <a:rPr lang="ru-RU" dirty="0"/>
+              <a:t>). </a:t>
+            </a:r>
+            <a:r>
+              <a:rPr lang="en-US" i="1" dirty="0"/>
+              <a:t>Goals</a:t>
+            </a:r>
+            <a:r>
+              <a:rPr lang="en-US" dirty="0"/>
               <a:t> </a:t>
             </a:r>
             <a:r>
-              <a:rPr lang="ru-RU" dirty="0" err="1"/>
-              <a:t>here</a:t>
-            </a:r>
-            <a:r>
               <a:rPr lang="ru-RU" dirty="0"/>
+              <a:t>[Иллюстрация].</a:t>
+            </a:r>
+            <a:r>
+              <a:rPr lang="en-US" dirty="0"/>
               <a:t> </a:t>
             </a:r>
             <a:r>
-              <a:rPr lang="ru-RU" dirty="0" err="1"/>
-              <a:t>other</a:t>
-            </a:r>
+              <a:rPr lang="en-US" dirty="0">
+                <a:hlinkClick r:id="rId2">
+                  <a:extLst>
+                    <a:ext uri="{A12FA001-AC4F-418D-AE19-62706E023703}">
+                      <ahyp:hlinkClr xmlns:ahyp="http://schemas.microsoft.com/office/drawing/2018/hyperlinkcolor" val="tx"/>
+                    </a:ext>
+                  </a:extLst>
+                </a:hlinkClick>
+              </a:rPr>
+              <a:t>https://undraw.co/search/goals</a:t>
+            </a:r>
+            <a:endParaRPr lang="en-US" dirty="0"/>
+          </a:p>
+          <a:p>
+            <a:pPr marL="0" indent="0">
+              <a:buNone/>
+            </a:pPr>
             <a:r>
               <a:rPr lang="ru-RU" dirty="0"/>
+              <a:t>unDraw. (n.d.</a:t>
+            </a:r>
+            <a:r>
+              <a:rPr lang="en-US" dirty="0"/>
+              <a:t>-b</a:t>
+            </a:r>
+            <a:r>
+              <a:rPr lang="ru-RU" dirty="0"/>
+              <a:t>). </a:t>
+            </a:r>
+            <a:r>
+              <a:rPr lang="en-US" i="1" dirty="0"/>
+              <a:t>Process</a:t>
+            </a:r>
+            <a:r>
+              <a:rPr lang="en-US" dirty="0"/>
               <a:t> </a:t>
             </a:r>
             <a:r>
-              <a:rPr lang="ru-RU" dirty="0" err="1"/>
-              <a:t>options</a:t>
-            </a:r>
-            <a:r>
               <a:rPr lang="ru-RU" dirty="0"/>
+              <a:t>[Иллюстрация]. </a:t>
+            </a:r>
+            <a:r>
+              <a:rPr lang="en-US" dirty="0">
+                <a:hlinkClick r:id="rId3">
+                  <a:extLst>
+                    <a:ext uri="{A12FA001-AC4F-418D-AE19-62706E023703}">
+                      <ahyp:hlinkClr xmlns:ahyp="http://schemas.microsoft.com/office/drawing/2018/hyperlinkcolor" val="tx"/>
+                    </a:ext>
+                  </a:extLst>
+                </a:hlinkClick>
+              </a:rPr>
+              <a:t>https://undraw.co/search/questions</a:t>
+            </a:r>
+            <a:endParaRPr lang="en-US" dirty="0"/>
+          </a:p>
+          <a:p>
+            <a:pPr marL="0" indent="0">
+              <a:buNone/>
+            </a:pPr>
+            <a:r>
+              <a:rPr lang="ru-RU" dirty="0"/>
+              <a:t>unDraw. (n.d.</a:t>
+            </a:r>
+            <a:r>
+              <a:rPr lang="en-US" dirty="0"/>
+              <a:t>-c</a:t>
+            </a:r>
+            <a:r>
+              <a:rPr lang="ru-RU" dirty="0"/>
+              <a:t>). </a:t>
+            </a:r>
+            <a:r>
+              <a:rPr lang="en-US" i="1" dirty="0"/>
+              <a:t>Questions</a:t>
+            </a:r>
+            <a:r>
+              <a:rPr lang="en-US" dirty="0"/>
               <a:t> </a:t>
             </a:r>
             <a:r>
-              <a:rPr lang="ru-RU" dirty="0" err="1"/>
-              <a:t>available</a:t>
-            </a:r>
-            <a:r>
               <a:rPr lang="ru-RU" dirty="0"/>
-              <a:t> ?</a:t>
-            </a:r>
-          </a:p>
-          <a:p>
-            <a:pPr marL="914400" lvl="1" indent="-457200">
-              <a:buFont typeface="+mj-lt"/>
-              <a:buAutoNum type="alphaLcParenR"/>
+              <a:t>[Иллюстрация].</a:t>
+            </a:r>
+            <a:r>
+              <a:rPr lang="en-US" dirty="0"/>
+              <a:t> </a:t>
+            </a:r>
+            <a:r>
+              <a:rPr lang="en-US" dirty="0">
+                <a:hlinkClick r:id="rId3">
+                  <a:extLst>
+                    <a:ext uri="{A12FA001-AC4F-418D-AE19-62706E023703}">
+                      <ahyp:hlinkClr xmlns:ahyp="http://schemas.microsoft.com/office/drawing/2018/hyperlinkcolor" val="tx"/>
+                    </a:ext>
+                  </a:extLst>
+                </a:hlinkClick>
+              </a:rPr>
+              <a:t>https://undraw.co/search/questions</a:t>
+            </a:r>
+            <a:endParaRPr lang="en-US" dirty="0"/>
+          </a:p>
+          <a:p>
+            <a:pPr marL="0" indent="0">
+              <a:buNone/>
             </a:pPr>
             <a:r>
-              <a:rPr lang="ru-RU" dirty="0" err="1"/>
-              <a:t>how</a:t>
-            </a:r>
-            <a:r>
               <a:rPr lang="ru-RU" dirty="0"/>
+              <a:t>unDraw. (n.d.</a:t>
+            </a:r>
+            <a:r>
+              <a:rPr lang="en-US" dirty="0"/>
+              <a:t>-d</a:t>
+            </a:r>
+            <a:r>
+              <a:rPr lang="ru-RU" dirty="0"/>
+              <a:t>). </a:t>
+            </a:r>
+            <a:r>
+              <a:rPr lang="en-US" i="1" dirty="0"/>
+              <a:t>Visual</a:t>
+            </a:r>
+            <a:r>
+              <a:rPr lang="en-US" dirty="0"/>
               <a:t> </a:t>
             </a:r>
             <a:r>
-              <a:rPr lang="ru-RU" dirty="0" err="1"/>
-              <a:t>well</a:t>
+              <a:rPr lang="en-US" i="1" dirty="0"/>
+              <a:t>Data</a:t>
+            </a:r>
+            <a:r>
+              <a:rPr lang="en-US" dirty="0"/>
+              <a:t> </a:t>
             </a:r>
             <a:r>
               <a:rPr lang="ru-RU" dirty="0"/>
+              <a:t>[Иллюстрация].</a:t>
+            </a:r>
+            <a:r>
+              <a:rPr lang="en-US" dirty="0"/>
               <a:t> </a:t>
             </a:r>
             <a:r>
-              <a:rPr lang="ru-RU" dirty="0" err="1"/>
-              <a:t>this</a:t>
-            </a:r>
+              <a:rPr lang="en-US" dirty="0">
+                <a:hlinkClick r:id="rId4">
+                  <a:extLst>
+                    <a:ext uri="{A12FA001-AC4F-418D-AE19-62706E023703}">
+                      <ahyp:hlinkClr xmlns:ahyp="http://schemas.microsoft.com/office/drawing/2018/hyperlinkcolor" val="tx"/>
+                    </a:ext>
+                  </a:extLst>
+                </a:hlinkClick>
+              </a:rPr>
+              <a:t>https://undraw.co/search/visual-data</a:t>
+            </a:r>
+            <a:endParaRPr lang="en-US" dirty="0"/>
+          </a:p>
+          <a:p>
+            <a:endParaRPr lang="en-US" dirty="0"/>
+          </a:p>
+          <a:p>
+            <a:pPr marL="0" indent="0">
+              <a:buNone/>
+            </a:pPr>
             <a:r>
               <a:rPr lang="ru-RU" dirty="0"/>
+              <a:t>Авторские материалы: </a:t>
+            </a:r>
+          </a:p>
+          <a:p>
+            <a:pPr marL="0" indent="0">
+              <a:buNone/>
+            </a:pPr>
+            <a:r>
+              <a:rPr lang="en-US" i="1" dirty="0"/>
+              <a:t>Mobile</a:t>
+            </a:r>
+            <a:r>
+              <a:rPr lang="en-US" dirty="0"/>
               <a:t> </a:t>
             </a:r>
             <a:r>
-              <a:rPr lang="ru-RU" dirty="0" err="1"/>
-              <a:t>search</a:t>
+              <a:rPr lang="en-US" i="1" dirty="0"/>
+              <a:t>Development</a:t>
+            </a:r>
+            <a:r>
+              <a:rPr lang="en-US" dirty="0"/>
+              <a:t> </a:t>
+            </a:r>
+            <a:r>
+              <a:rPr lang="en-US" i="1" dirty="0"/>
+              <a:t>Stack</a:t>
+            </a:r>
+            <a:r>
+              <a:rPr lang="en-US" dirty="0"/>
+              <a:t> </a:t>
+            </a:r>
+            <a:r>
+              <a:rPr lang="en-US" i="1" dirty="0"/>
+              <a:t>Dashboard</a:t>
+            </a:r>
+            <a:r>
+              <a:rPr lang="en-US" dirty="0"/>
+              <a:t> [</a:t>
+            </a:r>
+            <a:r>
+              <a:rPr lang="en-US" dirty="0" err="1"/>
+              <a:t>Дашборд</a:t>
+            </a:r>
+            <a:r>
+              <a:rPr lang="en-US" dirty="0"/>
+              <a:t> Tableau]. </a:t>
+            </a:r>
+            <a:r>
+              <a:rPr lang="en-US" u="sng" dirty="0">
+                <a:hlinkClick r:id="rId5">
+                  <a:extLst>
+                    <a:ext uri="{A12FA001-AC4F-418D-AE19-62706E023703}">
+                      <ahyp:hlinkClr xmlns:ahyp="http://schemas.microsoft.com/office/drawing/2018/hyperlinkcolor" val="tx"/>
+                    </a:ext>
+                  </a:extLst>
+                </a:hlinkClick>
+              </a:rPr>
+              <a:t>https://public.tableau.com/app/profile/ivan.ireev/viz/mobile_development_stack_dashboard/Dashboard1</a:t>
+            </a:r>
+            <a:endParaRPr lang="en-US" u="sng" dirty="0"/>
+          </a:p>
+          <a:p>
+            <a:pPr marL="0" indent="0">
+              <a:buNone/>
+            </a:pPr>
+            <a:r>
+              <a:rPr lang="ru-RU" i="1" dirty="0"/>
+              <a:t>Методология</a:t>
+            </a:r>
+            <a:r>
+              <a:rPr lang="en-US" dirty="0"/>
+              <a:t> [</a:t>
             </a:r>
             <a:r>
               <a:rPr lang="ru-RU" dirty="0"/>
-              <a:t> </a:t>
-            </a:r>
-            <a:r>
-              <a:rPr lang="ru-RU" dirty="0" err="1"/>
-              <a:t>cover</a:t>
-            </a:r>
-            <a:r>
-              <a:rPr lang="ru-RU" dirty="0"/>
-              <a:t> </a:t>
-            </a:r>
-            <a:r>
-              <a:rPr lang="ru-RU" dirty="0" err="1"/>
-              <a:t>real</a:t>
-            </a:r>
-            <a:r>
-              <a:rPr lang="ru-RU" dirty="0"/>
-              <a:t> </a:t>
-            </a:r>
-            <a:r>
-              <a:rPr lang="ru-RU" dirty="0" err="1"/>
-              <a:t>vacancies</a:t>
-            </a:r>
-            <a:r>
-              <a:rPr lang="ru-RU" dirty="0"/>
-              <a:t>?</a:t>
-            </a:r>
-          </a:p>
-          <a:p>
-            <a:r>
-              <a:rPr lang="ru-RU" sz="2400" dirty="0"/>
-              <a:t>2. </a:t>
-            </a:r>
-            <a:r>
-              <a:rPr lang="ru-RU" sz="2400" dirty="0" err="1"/>
-              <a:t>Proceeding</a:t>
-            </a:r>
-            <a:r>
-              <a:rPr lang="ru-RU" sz="2400" dirty="0"/>
-              <a:t> from </a:t>
-            </a:r>
-            <a:r>
-              <a:rPr lang="ru-RU" sz="2400" dirty="0" err="1"/>
-              <a:t>jobs</a:t>
-            </a:r>
-            <a:r>
-              <a:rPr lang="ru-RU" sz="2400" dirty="0"/>
-              <a:t> </a:t>
-            </a:r>
-            <a:r>
-              <a:rPr lang="ru-RU" sz="2400" dirty="0" err="1"/>
-              <a:t>found</a:t>
-            </a:r>
-            <a:r>
-              <a:rPr lang="ru-RU" sz="2400" dirty="0"/>
-              <a:t>, </a:t>
-            </a:r>
-            <a:r>
-              <a:rPr lang="ru-RU" sz="2400" dirty="0" err="1"/>
-              <a:t>is</a:t>
-            </a:r>
-            <a:r>
-              <a:rPr lang="ru-RU" sz="2400" dirty="0"/>
-              <a:t> </a:t>
-            </a:r>
-            <a:r>
-              <a:rPr lang="ru-RU" sz="2400" dirty="0" err="1"/>
-              <a:t>here</a:t>
-            </a:r>
-            <a:r>
-              <a:rPr lang="ru-RU" sz="2400" dirty="0"/>
-              <a:t> </a:t>
-            </a:r>
-            <a:r>
-              <a:rPr lang="ru-RU" sz="2400" dirty="0" err="1"/>
-              <a:t>possible</a:t>
-            </a:r>
-            <a:r>
-              <a:rPr lang="ru-RU" sz="2400" dirty="0"/>
-              <a:t> </a:t>
-            </a:r>
-            <a:r>
-              <a:rPr lang="ru-RU" sz="2400" dirty="0" err="1"/>
-              <a:t>do</a:t>
-            </a:r>
-            <a:r>
-              <a:rPr lang="ru-RU" sz="2400" dirty="0"/>
-              <a:t> </a:t>
-            </a:r>
-            <a:r>
-              <a:rPr lang="ru-RU" sz="2400" dirty="0" err="1"/>
-              <a:t>distinguish</a:t>
-            </a:r>
-            <a:r>
-              <a:rPr lang="ru-RU" sz="2400" dirty="0"/>
-              <a:t> </a:t>
-            </a:r>
-            <a:r>
-              <a:rPr lang="ru-RU" sz="2400" dirty="0" err="1"/>
-              <a:t>online</a:t>
-            </a:r>
-            <a:r>
-              <a:rPr lang="ru-RU" sz="2400" dirty="0"/>
-              <a:t>/</a:t>
-            </a:r>
-            <a:r>
-              <a:rPr lang="ru-RU" sz="2400" dirty="0" err="1"/>
-              <a:t>office</a:t>
-            </a:r>
-            <a:r>
-              <a:rPr lang="ru-RU" sz="2400" dirty="0"/>
-              <a:t>/</a:t>
-            </a:r>
-            <a:r>
-              <a:rPr lang="ru-RU" sz="2400" dirty="0" err="1"/>
-              <a:t>partially</a:t>
-            </a:r>
-            <a:r>
-              <a:rPr lang="ru-RU" sz="2400" dirty="0"/>
-              <a:t> </a:t>
-            </a:r>
-            <a:r>
-              <a:rPr lang="ru-RU" sz="2400" dirty="0" err="1"/>
-              <a:t>office</a:t>
-            </a:r>
-            <a:r>
-              <a:rPr lang="ru-RU" sz="2400" dirty="0"/>
-              <a:t> </a:t>
-            </a:r>
-            <a:r>
-              <a:rPr lang="ru-RU" sz="2400" dirty="0" err="1"/>
-              <a:t>positions</a:t>
-            </a:r>
-            <a:r>
-              <a:rPr lang="ru-RU" sz="2400" dirty="0"/>
-              <a:t> ?</a:t>
-            </a:r>
-          </a:p>
-          <a:p>
-            <a:endParaRPr lang="ru-RU" dirty="0"/>
-          </a:p>
-        </p:txBody>
-      </p:sp>
-      <p:pic>
-        <p:nvPicPr>
-          <p:cNvPr id="13" name="Picture 12">
-            <a:extLst>
-              <a:ext uri="{FF2B5EF4-FFF2-40B4-BE49-F238E27FC236}">
-                <a16:creationId xmlns:a16="http://schemas.microsoft.com/office/drawing/2014/main" id="{DB2A9960-D7B4-8693-1084-55D37FF5A33B}"/>
-              </a:ext>
-            </a:extLst>
-          </p:cNvPr>
-          <p:cNvPicPr>
-            <a:picLocks noChangeAspect="1"/>
-          </p:cNvPicPr>
-          <p:nvPr/>
-        </p:nvPicPr>
-        <p:blipFill>
-          <a:blip r:embed="rId2"/>
-          <a:stretch>
-            <a:fillRect/>
-          </a:stretch>
-        </p:blipFill>
-        <p:spPr>
-          <a:xfrm>
-            <a:off x="838200" y="1690688"/>
-            <a:ext cx="5298293" cy="3732959"/>
-          </a:xfrm>
-          <a:prstGeom prst="rect">
-            <a:avLst/>
-          </a:prstGeom>
-        </p:spPr>
-      </p:pic>
-      <p:sp>
-        <p:nvSpPr>
-          <p:cNvPr id="14" name="TextBox 13">
-            <a:extLst>
-              <a:ext uri="{FF2B5EF4-FFF2-40B4-BE49-F238E27FC236}">
-                <a16:creationId xmlns:a16="http://schemas.microsoft.com/office/drawing/2014/main" id="{12440992-BC59-EC30-EB5E-AA67848847BC}"/>
-              </a:ext>
-            </a:extLst>
-          </p:cNvPr>
-          <p:cNvSpPr txBox="1"/>
-          <p:nvPr/>
-        </p:nvSpPr>
-        <p:spPr>
-          <a:xfrm>
-            <a:off x="1749313" y="5271171"/>
-            <a:ext cx="3476065" cy="307777"/>
-          </a:xfrm>
-          <a:prstGeom prst="rect">
-            <a:avLst/>
-          </a:prstGeom>
-          <a:noFill/>
-        </p:spPr>
-        <p:txBody>
-          <a:bodyPr wrap="square" rtlCol="0">
-            <a:spAutoFit/>
-          </a:bodyPr>
-          <a:lstStyle/>
-          <a:p>
-            <a:r>
-              <a:rPr lang="ru-RU" sz="1400" dirty="0">
-                <a:solidFill>
-                  <a:schemeClr val="tx1">
-                    <a:lumMod val="50000"/>
-                    <a:lumOff val="50000"/>
-                  </a:schemeClr>
-                </a:solidFill>
+              <a:t>Схема </a:t>
+            </a:r>
+            <a:r>
+              <a:rPr lang="en-US" dirty="0"/>
+              <a:t>Miro]. </a:t>
+            </a:r>
+            <a:r>
+              <a:rPr lang="en-US" dirty="0">
+                <a:hlinkClick r:id="rId6">
+                  <a:extLst>
+                    <a:ext uri="{A12FA001-AC4F-418D-AE19-62706E023703}">
+                      <ahyp:hlinkClr xmlns:ahyp="http://schemas.microsoft.com/office/drawing/2018/hyperlinkcolor" val="tx"/>
+                    </a:ext>
+                  </a:extLst>
+                </a:hlinkClick>
               </a:rPr>
-              <a:t>Рисунок </a:t>
-            </a:r>
-            <a:r>
-              <a:rPr lang="en-US" sz="1400" dirty="0">
-                <a:solidFill>
-                  <a:schemeClr val="tx1">
-                    <a:lumMod val="50000"/>
-                    <a:lumOff val="50000"/>
-                  </a:schemeClr>
-                </a:solidFill>
-              </a:rPr>
-              <a:t>6</a:t>
-            </a:r>
-            <a:r>
-              <a:rPr lang="ru-RU" sz="1400" dirty="0">
-                <a:solidFill>
-                  <a:schemeClr val="tx1">
-                    <a:lumMod val="50000"/>
-                    <a:lumOff val="50000"/>
-                  </a:schemeClr>
-                </a:solidFill>
-              </a:rPr>
-              <a:t>. </a:t>
-            </a:r>
-            <a:r>
-              <a:rPr lang="en-US" sz="1400" dirty="0">
-                <a:solidFill>
-                  <a:schemeClr val="tx1">
-                    <a:lumMod val="50000"/>
-                    <a:lumOff val="50000"/>
-                  </a:schemeClr>
-                </a:solidFill>
-              </a:rPr>
-              <a:t>Questions </a:t>
-            </a:r>
-            <a:r>
-              <a:rPr lang="ru-RU" sz="1400" dirty="0">
-                <a:solidFill>
-                  <a:schemeClr val="tx1">
-                    <a:lumMod val="50000"/>
-                    <a:lumOff val="50000"/>
-                  </a:schemeClr>
-                </a:solidFill>
-              </a:rPr>
-              <a:t>(источник: unDraw).</a:t>
-            </a:r>
+              <a:t>https://miro.com/app/board/uXjVJjGG9q4=/?share_link_id=182148449610</a:t>
+            </a:r>
+            <a:endParaRPr lang="en-US" dirty="0"/>
+          </a:p>
+          <a:p>
+            <a:pPr marL="0" indent="0">
+              <a:buNone/>
+            </a:pPr>
+            <a:endParaRPr lang="en-US" dirty="0"/>
           </a:p>
         </p:txBody>
       </p:sp>
     </p:spTree>
     <p:extLst>
       <p:ext uri="{BB962C8B-B14F-4D97-AF65-F5344CB8AC3E}">
-        <p14:creationId xmlns:p14="http://schemas.microsoft.com/office/powerpoint/2010/main" val="92624472"/>
+        <p14:creationId xmlns:p14="http://schemas.microsoft.com/office/powerpoint/2010/main" val="365788303"/>
       </p:ext>
     </p:extLst>
   </p:cSld>

--- a/Presentations of Bachelor's theses.pptx
+++ b/Presentations of Bachelor's theses.pptx
@@ -207,7 +207,7 @@
           <a:p>
             <a:fld id="{D4779A6A-4B5B-4880-8428-24B39EC00E81}" type="datetimeFigureOut">
               <a:rPr lang="ru-RU" smtClean="0"/>
-              <a:t>09.12.2025</a:t>
+              <a:t>10.12.2025</a:t>
             </a:fld>
             <a:endParaRPr lang="ru-RU"/>
           </a:p>
@@ -799,7 +799,7 @@
           <a:p>
             <a:fld id="{E9846F43-F1B2-4AEE-B1BF-466D06853D46}" type="datetimeFigureOut">
               <a:rPr lang="ru-RU" smtClean="0"/>
-              <a:t>09.12.2025</a:t>
+              <a:t>10.12.2025</a:t>
             </a:fld>
             <a:endParaRPr lang="ru-RU"/>
           </a:p>
@@ -999,7 +999,7 @@
           <a:p>
             <a:fld id="{E9846F43-F1B2-4AEE-B1BF-466D06853D46}" type="datetimeFigureOut">
               <a:rPr lang="ru-RU" smtClean="0"/>
-              <a:t>09.12.2025</a:t>
+              <a:t>10.12.2025</a:t>
             </a:fld>
             <a:endParaRPr lang="ru-RU"/>
           </a:p>
@@ -1209,7 +1209,7 @@
           <a:p>
             <a:fld id="{E9846F43-F1B2-4AEE-B1BF-466D06853D46}" type="datetimeFigureOut">
               <a:rPr lang="ru-RU" smtClean="0"/>
-              <a:t>09.12.2025</a:t>
+              <a:t>10.12.2025</a:t>
             </a:fld>
             <a:endParaRPr lang="ru-RU"/>
           </a:p>
@@ -1409,7 +1409,7 @@
           <a:p>
             <a:fld id="{E9846F43-F1B2-4AEE-B1BF-466D06853D46}" type="datetimeFigureOut">
               <a:rPr lang="ru-RU" smtClean="0"/>
-              <a:t>09.12.2025</a:t>
+              <a:t>10.12.2025</a:t>
             </a:fld>
             <a:endParaRPr lang="ru-RU"/>
           </a:p>
@@ -1685,7 +1685,7 @@
           <a:p>
             <a:fld id="{E9846F43-F1B2-4AEE-B1BF-466D06853D46}" type="datetimeFigureOut">
               <a:rPr lang="ru-RU" smtClean="0"/>
-              <a:t>09.12.2025</a:t>
+              <a:t>10.12.2025</a:t>
             </a:fld>
             <a:endParaRPr lang="ru-RU"/>
           </a:p>
@@ -1953,7 +1953,7 @@
           <a:p>
             <a:fld id="{E9846F43-F1B2-4AEE-B1BF-466D06853D46}" type="datetimeFigureOut">
               <a:rPr lang="ru-RU" smtClean="0"/>
-              <a:t>09.12.2025</a:t>
+              <a:t>10.12.2025</a:t>
             </a:fld>
             <a:endParaRPr lang="ru-RU"/>
           </a:p>
@@ -2368,7 +2368,7 @@
           <a:p>
             <a:fld id="{E9846F43-F1B2-4AEE-B1BF-466D06853D46}" type="datetimeFigureOut">
               <a:rPr lang="ru-RU" smtClean="0"/>
-              <a:t>09.12.2025</a:t>
+              <a:t>10.12.2025</a:t>
             </a:fld>
             <a:endParaRPr lang="ru-RU"/>
           </a:p>
@@ -2510,7 +2510,7 @@
           <a:p>
             <a:fld id="{E9846F43-F1B2-4AEE-B1BF-466D06853D46}" type="datetimeFigureOut">
               <a:rPr lang="ru-RU" smtClean="0"/>
-              <a:t>09.12.2025</a:t>
+              <a:t>10.12.2025</a:t>
             </a:fld>
             <a:endParaRPr lang="ru-RU"/>
           </a:p>
@@ -2623,7 +2623,7 @@
           <a:p>
             <a:fld id="{E9846F43-F1B2-4AEE-B1BF-466D06853D46}" type="datetimeFigureOut">
               <a:rPr lang="ru-RU" smtClean="0"/>
-              <a:t>09.12.2025</a:t>
+              <a:t>10.12.2025</a:t>
             </a:fld>
             <a:endParaRPr lang="ru-RU"/>
           </a:p>
@@ -2936,7 +2936,7 @@
           <a:p>
             <a:fld id="{E9846F43-F1B2-4AEE-B1BF-466D06853D46}" type="datetimeFigureOut">
               <a:rPr lang="ru-RU" smtClean="0"/>
-              <a:t>09.12.2025</a:t>
+              <a:t>10.12.2025</a:t>
             </a:fld>
             <a:endParaRPr lang="ru-RU"/>
           </a:p>
@@ -3225,7 +3225,7 @@
           <a:p>
             <a:fld id="{E9846F43-F1B2-4AEE-B1BF-466D06853D46}" type="datetimeFigureOut">
               <a:rPr lang="ru-RU" smtClean="0"/>
-              <a:t>09.12.2025</a:t>
+              <a:t>10.12.2025</a:t>
             </a:fld>
             <a:endParaRPr lang="ru-RU"/>
           </a:p>
@@ -3468,7 +3468,7 @@
           <a:p>
             <a:fld id="{E9846F43-F1B2-4AEE-B1BF-466D06853D46}" type="datetimeFigureOut">
               <a:rPr lang="ru-RU" smtClean="0"/>
-              <a:t>09.12.2025</a:t>
+              <a:t>10.12.2025</a:t>
             </a:fld>
             <a:endParaRPr lang="ru-RU"/>
           </a:p>
@@ -6148,7 +6148,7 @@
                   </a:schemeClr>
                 </a:solidFill>
               </a:rPr>
-              <a:t> , n.d. -d</a:t>
+              <a:t>, n.d. -d</a:t>
             </a:r>
             <a:r>
               <a:rPr lang="ru-RU" sz="1400" dirty="0">
@@ -6217,7 +6217,7 @@
           <a:p>
             <a:r>
               <a:rPr lang="ru-RU" dirty="0"/>
-              <a:t>Ссылки на источники</a:t>
+              <a:t>Материалы для презентации</a:t>
             </a:r>
           </a:p>
         </p:txBody>
